--- a/output/wordlabs-plan-3day.pptx
+++ b/output/wordlabs-plan-3day.pptx
@@ -4240,7 +4240,7 @@
                 <a:ea typeface="Calibri" pitchFamily="34" charset="-122"/>
                 <a:cs typeface="Calibri" pitchFamily="34" charset="-120"/>
               </a:rPr>
-              <a:t>"arrange, design, flat surface"</a:t>
+              <a:t>"a scheme or flat surface"</a:t>
             </a:r>
             <a:endParaRPr lang="en-US" sz="2200" dirty="0"/>
           </a:p>
@@ -5288,7 +5288,7 @@
                 <a:ea typeface="Calibri" pitchFamily="34" charset="-122"/>
                 <a:cs typeface="Calibri" pitchFamily="34" charset="-120"/>
               </a:rPr>
-              <a:t>Word Labs  •  wordlabs.app  •  Root: 'plan' = arrange, design, flat surface</a:t>
+              <a:t>Word Labs  •  wordlabs.app  •  Root: 'plan' = a scheme or flat surface</a:t>
             </a:r>
             <a:endParaRPr lang="en-US" sz="800" dirty="0"/>
           </a:p>
@@ -5928,7 +5928,7 @@
                 <a:ea typeface="Calibri" pitchFamily="34" charset="-122"/>
                 <a:cs typeface="Calibri" pitchFamily="34" charset="-120"/>
               </a:rPr>
-              <a:t>Word Labs  •  wordlabs.app  •  Root: 'plan' = arrange, design, flat surface</a:t>
+              <a:t>Word Labs  •  wordlabs.app  •  Root: 'plan' = a scheme or flat surface</a:t>
             </a:r>
             <a:endParaRPr lang="en-US" sz="800" dirty="0"/>
           </a:p>
@@ -6040,7 +6040,7 @@
                 <a:ea typeface="Calibri" pitchFamily="34" charset="-122"/>
                 <a:cs typeface="Calibri" pitchFamily="34" charset="-120"/>
               </a:rPr>
-              <a:t>The </a:t>
+              <a:t>The careful </a:t>
             </a:r>
             <a:pPr algn="l" indent="0" marL="0">
               <a:buNone/>
@@ -6071,7 +6071,7 @@
                 <a:ea typeface="Calibri" pitchFamily="34" charset="-122"/>
                 <a:cs typeface="Calibri" pitchFamily="34" charset="-120"/>
               </a:rPr>
-              <a:t> asked the students to </a:t>
+              <a:t> explained that all </a:t>
             </a:r>
             <a:pPr algn="l" indent="0" marL="0">
               <a:buNone/>
@@ -6088,7 +6088,7 @@
                 <a:ea typeface="Calibri" pitchFamily="34" charset="-122"/>
                 <a:cs typeface="Calibri" pitchFamily="34" charset="-120"/>
               </a:rPr>
-              <a:t>explain</a:t>
+              <a:t>unplanned</a:t>
             </a:r>
             <a:pPr algn="l" indent="0" marL="0">
               <a:buNone/>
@@ -6102,7 +6102,7 @@
                 <a:ea typeface="Calibri" pitchFamily="34" charset="-122"/>
                 <a:cs typeface="Calibri" pitchFamily="34" charset="-120"/>
               </a:rPr>
-              <a:t> their ideas before the project began.</a:t>
+              <a:t> events would be rescheduled.</a:t>
             </a:r>
             <a:endParaRPr lang="en-US" sz="1800" dirty="0"/>
           </a:p>
@@ -6385,7 +6385,7 @@
                 <a:ea typeface="Trebuchet MS" pitchFamily="34" charset="-122"/>
                 <a:cs typeface="Trebuchet MS" pitchFamily="34" charset="-120"/>
               </a:rPr>
-              <a:t>explain</a:t>
+              <a:t>unplanned</a:t>
             </a:r>
             <a:endParaRPr lang="en-US" sz="1400" dirty="0"/>
           </a:p>
@@ -6716,7 +6716,7 @@
                 <a:ea typeface="Calibri" pitchFamily="34" charset="-122"/>
                 <a:cs typeface="Calibri" pitchFamily="34" charset="-120"/>
               </a:rPr>
-              <a:t>Word Labs  •  wordlabs.app  •  Root: 'plan' = arrange, design, flat surface</a:t>
+              <a:t>Word Labs  •  wordlabs.app  •  Root: 'plan' = a scheme or flat surface</a:t>
             </a:r>
             <a:endParaRPr lang="en-US" sz="800" dirty="0"/>
           </a:p>
@@ -7543,7 +7543,7 @@
                 <a:ea typeface="Calibri" pitchFamily="34" charset="-122"/>
                 <a:cs typeface="Calibri" pitchFamily="34" charset="-120"/>
               </a:rPr>
-              <a:t>Word Labs  •  wordlabs.app  •  Root: 'plan' = arrange, design, flat surface</a:t>
+              <a:t>Word Labs  •  wordlabs.app  •  Root: 'plan' = a scheme or flat surface</a:t>
             </a:r>
             <a:endParaRPr lang="en-US" sz="800" dirty="0"/>
           </a:p>
@@ -7860,7 +7860,7 @@
                 <a:ea typeface="Calibri" pitchFamily="34" charset="-122"/>
                 <a:cs typeface="Calibri" pitchFamily="34" charset="-120"/>
               </a:rPr>
-              <a:t>design, arrange</a:t>
+              <a:t>a scheme or design</a:t>
             </a:r>
             <a:endParaRPr lang="en-US" sz="850" dirty="0"/>
           </a:p>
@@ -8123,7 +8123,7 @@
                 <a:ea typeface="Calibri" pitchFamily="34" charset="-122"/>
                 <a:cs typeface="Calibri" pitchFamily="34" charset="-120"/>
               </a:rPr>
-              <a:t>person or thing that does</a:t>
+              <a:t>a person who does something</a:t>
             </a:r>
             <a:endParaRPr lang="en-US" sz="850" dirty="0"/>
           </a:p>
@@ -8679,7 +8679,7 @@
                 <a:ea typeface="Calibri" pitchFamily="34" charset="-122"/>
                 <a:cs typeface="Calibri" pitchFamily="34" charset="-120"/>
               </a:rPr>
-              <a:t>Word Labs  •  wordlabs.app  •  Root: 'plan' = arrange, design, flat surface</a:t>
+              <a:t>Word Labs  •  wordlabs.app  •  Root: 'plan' = a scheme or flat surface</a:t>
             </a:r>
             <a:endParaRPr lang="en-US" sz="800" dirty="0"/>
           </a:p>
@@ -8996,7 +8996,7 @@
                 <a:ea typeface="Calibri" pitchFamily="34" charset="-122"/>
                 <a:cs typeface="Calibri" pitchFamily="34" charset="-120"/>
               </a:rPr>
-              <a:t>design, arrange</a:t>
+              <a:t>a scheme or design</a:t>
             </a:r>
             <a:endParaRPr lang="en-US" sz="850" dirty="0"/>
           </a:p>
@@ -9259,7 +9259,7 @@
                 <a:ea typeface="Calibri" pitchFamily="34" charset="-122"/>
                 <a:cs typeface="Calibri" pitchFamily="34" charset="-120"/>
               </a:rPr>
-              <a:t>person or thing that does</a:t>
+              <a:t>a person who does something</a:t>
             </a:r>
             <a:endParaRPr lang="en-US" sz="850" dirty="0"/>
           </a:p>
@@ -9947,7 +9947,7 @@
                 <a:ea typeface="Calibri" pitchFamily="34" charset="-122"/>
                 <a:cs typeface="Calibri" pitchFamily="34" charset="-120"/>
               </a:rPr>
-              <a:t>Word Labs  •  wordlabs.app  •  Root: 'plan' = arrange, design, flat surface</a:t>
+              <a:t>Word Labs  •  wordlabs.app  •  Root: 'plan' = a scheme or flat surface</a:t>
             </a:r>
             <a:endParaRPr lang="en-US" sz="800" dirty="0"/>
           </a:p>
@@ -10264,7 +10264,7 @@
                 <a:ea typeface="Calibri" pitchFamily="34" charset="-122"/>
                 <a:cs typeface="Calibri" pitchFamily="34" charset="-120"/>
               </a:rPr>
-              <a:t>design, arrange</a:t>
+              <a:t>a scheme or design</a:t>
             </a:r>
             <a:endParaRPr lang="en-US" sz="850" dirty="0"/>
           </a:p>
@@ -10527,7 +10527,7 @@
                 <a:ea typeface="Calibri" pitchFamily="34" charset="-122"/>
                 <a:cs typeface="Calibri" pitchFamily="34" charset="-120"/>
               </a:rPr>
-              <a:t>person or thing that does</a:t>
+              <a:t>a person who does something</a:t>
             </a:r>
             <a:endParaRPr lang="en-US" sz="850" dirty="0"/>
           </a:p>
@@ -11440,7 +11440,7 @@
                 <a:ea typeface="Calibri" pitchFamily="34" charset="-122"/>
                 <a:cs typeface="Calibri" pitchFamily="34" charset="-120"/>
               </a:rPr>
-              <a:t>Word Labs  •  wordlabs.app  •  Root: 'plan' = arrange, design, flat surface</a:t>
+              <a:t>Word Labs  •  wordlabs.app  •  Root: 'plan' = a scheme or flat surface</a:t>
             </a:r>
             <a:endParaRPr lang="en-US" sz="800" dirty="0"/>
           </a:p>
@@ -11579,7 +11579,7 @@
                 <a:ea typeface="Trebuchet MS" pitchFamily="34" charset="-122"/>
                 <a:cs typeface="Trebuchet MS" pitchFamily="34" charset="-120"/>
               </a:rPr>
-              <a:t>explain</a:t>
+              <a:t>unplanned</a:t>
             </a:r>
             <a:endParaRPr lang="en-US" sz="2800" dirty="0"/>
           </a:p>
@@ -12267,7 +12267,7 @@
                 <a:ea typeface="Calibri" pitchFamily="34" charset="-122"/>
                 <a:cs typeface="Calibri" pitchFamily="34" charset="-120"/>
               </a:rPr>
-              <a:t>Word Labs  •  wordlabs.app  •  Root: 'plan' = arrange, design, flat surface</a:t>
+              <a:t>Word Labs  •  wordlabs.app  •  Root: 'plan' = a scheme or flat surface</a:t>
             </a:r>
             <a:endParaRPr lang="en-US" sz="800" dirty="0"/>
           </a:p>
@@ -12406,7 +12406,7 @@
                 <a:ea typeface="Trebuchet MS" pitchFamily="34" charset="-122"/>
                 <a:cs typeface="Trebuchet MS" pitchFamily="34" charset="-120"/>
               </a:rPr>
-              <a:t>explain</a:t>
+              <a:t>unplanned</a:t>
             </a:r>
             <a:endParaRPr lang="en-US" sz="2800" dirty="0"/>
           </a:p>
@@ -12486,8 +12486,8 @@
         </p:nvSpPr>
         <p:spPr>
           <a:xfrm>
-            <a:off x="2938272" y="2258568"/>
-            <a:ext cx="1828800" cy="292608"/>
+            <a:off x="1989734" y="2258568"/>
+            <a:ext cx="1581912" cy="292608"/>
           </a:xfrm>
           <a:prstGeom prst="rect">
             <a:avLst>
@@ -12520,8 +12520,8 @@
         </p:nvSpPr>
         <p:spPr>
           <a:xfrm>
-            <a:off x="2938272" y="2258568"/>
-            <a:ext cx="1828800" cy="292608"/>
+            <a:off x="1989734" y="2258568"/>
+            <a:ext cx="1581912" cy="292608"/>
           </a:xfrm>
           <a:prstGeom prst="rect">
             <a:avLst/>
@@ -12545,7 +12545,7 @@
                 <a:ea typeface="Trebuchet MS" pitchFamily="34" charset="-122"/>
                 <a:cs typeface="Trebuchet MS" pitchFamily="34" charset="-120"/>
               </a:rPr>
-              <a:t>ex</a:t>
+              <a:t>un</a:t>
             </a:r>
             <a:endParaRPr lang="en-US" sz="1300" dirty="0"/>
           </a:p>
@@ -12559,8 +12559,8 @@
         </p:nvSpPr>
         <p:spPr>
           <a:xfrm>
-            <a:off x="2938272" y="2569464"/>
-            <a:ext cx="1828800" cy="201168"/>
+            <a:off x="1989734" y="2569464"/>
+            <a:ext cx="1581912" cy="201168"/>
           </a:xfrm>
           <a:prstGeom prst="rect">
             <a:avLst/>
@@ -12584,7 +12584,7 @@
                 <a:ea typeface="Calibri" pitchFamily="34" charset="-122"/>
                 <a:cs typeface="Calibri" pitchFamily="34" charset="-120"/>
               </a:rPr>
-              <a:t>out, away from</a:t>
+              <a:t>not</a:t>
             </a:r>
             <a:endParaRPr lang="en-US" sz="850" dirty="0"/>
           </a:p>
@@ -12598,8 +12598,8 @@
         </p:nvSpPr>
         <p:spPr>
           <a:xfrm>
-            <a:off x="5803392" y="2258568"/>
-            <a:ext cx="1828800" cy="292608"/>
+            <a:off x="3659429" y="2258568"/>
+            <a:ext cx="1581912" cy="292608"/>
           </a:xfrm>
           <a:prstGeom prst="rect">
             <a:avLst>
@@ -12607,11 +12607,11 @@
             </a:avLst>
           </a:prstGeom>
           <a:solidFill>
-            <a:srgbClr val="FCE7F3"/>
+            <a:srgbClr val="CCFBF1"/>
           </a:solidFill>
           <a:ln w="19050">
             <a:solidFill>
-              <a:srgbClr val="DB2777"/>
+              <a:srgbClr val="0D9488"/>
             </a:solidFill>
             <a:prstDash val="solid"/>
           </a:ln>
@@ -12632,8 +12632,8 @@
         </p:nvSpPr>
         <p:spPr>
           <a:xfrm>
-            <a:off x="5803392" y="2258568"/>
-            <a:ext cx="1828800" cy="292608"/>
+            <a:off x="3659429" y="2258568"/>
+            <a:ext cx="1581912" cy="292608"/>
           </a:xfrm>
           <a:prstGeom prst="rect">
             <a:avLst/>
@@ -12651,13 +12651,13 @@
             <a:r>
               <a:rPr lang="en-US" sz="1300" b="1" dirty="0">
                 <a:solidFill>
-                  <a:srgbClr val="9D174D"/>
+                  <a:srgbClr val="0F766E"/>
                 </a:solidFill>
                 <a:latin typeface="Trebuchet MS" pitchFamily="34" charset="0"/>
                 <a:ea typeface="Trebuchet MS" pitchFamily="34" charset="-122"/>
                 <a:cs typeface="Trebuchet MS" pitchFamily="34" charset="-120"/>
               </a:rPr>
-              <a:t>plain</a:t>
+              <a:t>plan</a:t>
             </a:r>
             <a:endParaRPr lang="en-US" sz="1300" dirty="0"/>
           </a:p>
@@ -12671,8 +12671,8 @@
         </p:nvSpPr>
         <p:spPr>
           <a:xfrm>
-            <a:off x="5803392" y="2569464"/>
-            <a:ext cx="1828800" cy="201168"/>
+            <a:off x="3659429" y="2569464"/>
+            <a:ext cx="1581912" cy="201168"/>
           </a:xfrm>
           <a:prstGeom prst="rect">
             <a:avLst/>
@@ -12696,7 +12696,7 @@
                 <a:ea typeface="Calibri" pitchFamily="34" charset="-122"/>
                 <a:cs typeface="Calibri" pitchFamily="34" charset="-120"/>
               </a:rPr>
-              <a:t>flat, clear, make clear</a:t>
+              <a:t>a scheme or design</a:t>
             </a:r>
             <a:endParaRPr lang="en-US" sz="850" dirty="0"/>
           </a:p>
@@ -12705,6 +12705,269 @@
       <p:sp>
         <p:nvSpPr>
           <p:cNvPr id="22" name="Shape 20"/>
+          <p:cNvSpPr/>
+          <p:nvPr/>
+        </p:nvSpPr>
+        <p:spPr>
+          <a:xfrm>
+            <a:off x="5329123" y="2258568"/>
+            <a:ext cx="1581912" cy="292608"/>
+          </a:xfrm>
+          <a:prstGeom prst="rect">
+            <a:avLst>
+              <a:gd name="adj" fmla="val 25000"/>
+            </a:avLst>
+          </a:prstGeom>
+          <a:solidFill>
+            <a:srgbClr val="FCE7F3"/>
+          </a:solidFill>
+          <a:ln w="19050">
+            <a:solidFill>
+              <a:srgbClr val="DB2777"/>
+            </a:solidFill>
+            <a:prstDash val="solid"/>
+          </a:ln>
+          <a:effectLst>
+            <a:outerShdw sx="100000" sy="100000" kx="0" ky="0" algn="bl" rotWithShape="0" blurRad="101600" dist="38100" dir="8100000">
+              <a:srgbClr val="000000">
+                <a:alpha val="12000"/>
+              </a:srgbClr>
+            </a:outerShdw>
+          </a:effectLst>
+        </p:spPr>
+      </p:sp>
+      <p:sp>
+        <p:nvSpPr>
+          <p:cNvPr id="23" name="Text 21"/>
+          <p:cNvSpPr/>
+          <p:nvPr/>
+        </p:nvSpPr>
+        <p:spPr>
+          <a:xfrm>
+            <a:off x="5329123" y="2258568"/>
+            <a:ext cx="1581912" cy="292608"/>
+          </a:xfrm>
+          <a:prstGeom prst="rect">
+            <a:avLst/>
+          </a:prstGeom>
+          <a:noFill/>
+          <a:ln/>
+        </p:spPr>
+        <p:txBody>
+          <a:bodyPr wrap="square" lIns="0" tIns="0" rIns="0" bIns="0" rtlCol="0" anchor="ctr"/>
+          <a:lstStyle/>
+          <a:p>
+            <a:pPr algn="ctr" indent="0" marL="0">
+              <a:buNone/>
+            </a:pPr>
+            <a:r>
+              <a:rPr lang="en-US" sz="1300" b="1" dirty="0">
+                <a:solidFill>
+                  <a:srgbClr val="9D174D"/>
+                </a:solidFill>
+                <a:latin typeface="Trebuchet MS" pitchFamily="34" charset="0"/>
+                <a:ea typeface="Trebuchet MS" pitchFamily="34" charset="-122"/>
+                <a:cs typeface="Trebuchet MS" pitchFamily="34" charset="-120"/>
+              </a:rPr>
+              <a:t>n</a:t>
+            </a:r>
+            <a:endParaRPr lang="en-US" sz="1300" dirty="0"/>
+          </a:p>
+        </p:txBody>
+      </p:sp>
+      <p:sp>
+        <p:nvSpPr>
+          <p:cNvPr id="24" name="Text 22"/>
+          <p:cNvSpPr/>
+          <p:nvPr/>
+        </p:nvSpPr>
+        <p:spPr>
+          <a:xfrm>
+            <a:off x="5329123" y="2569464"/>
+            <a:ext cx="1581912" cy="201168"/>
+          </a:xfrm>
+          <a:prstGeom prst="rect">
+            <a:avLst/>
+          </a:prstGeom>
+          <a:noFill/>
+          <a:ln/>
+        </p:spPr>
+        <p:txBody>
+          <a:bodyPr wrap="square" lIns="0" tIns="0" rIns="0" bIns="0" rtlCol="0" anchor="t"/>
+          <a:lstStyle/>
+          <a:p>
+            <a:pPr algn="ctr" indent="0" marL="0">
+              <a:buNone/>
+            </a:pPr>
+            <a:r>
+              <a:rPr lang="en-US" sz="850" dirty="0">
+                <a:solidFill>
+                  <a:srgbClr val="475569"/>
+                </a:solidFill>
+                <a:latin typeface="Calibri" pitchFamily="34" charset="0"/>
+                <a:ea typeface="Calibri" pitchFamily="34" charset="-122"/>
+                <a:cs typeface="Calibri" pitchFamily="34" charset="-120"/>
+              </a:rPr>
+              <a:t>double consonant before suffix</a:t>
+            </a:r>
+            <a:endParaRPr lang="en-US" sz="850" dirty="0"/>
+          </a:p>
+        </p:txBody>
+      </p:sp>
+      <p:sp>
+        <p:nvSpPr>
+          <p:cNvPr id="25" name="Text 23"/>
+          <p:cNvSpPr/>
+          <p:nvPr/>
+        </p:nvSpPr>
+        <p:spPr>
+          <a:xfrm>
+            <a:off x="5329123" y="2752344"/>
+            <a:ext cx="1581912" cy="182880"/>
+          </a:xfrm>
+          <a:prstGeom prst="rect">
+            <a:avLst/>
+          </a:prstGeom>
+          <a:noFill/>
+          <a:ln/>
+        </p:spPr>
+        <p:txBody>
+          <a:bodyPr wrap="square" lIns="0" tIns="0" rIns="0" bIns="0" rtlCol="0" anchor="t"/>
+          <a:lstStyle/>
+          <a:p>
+            <a:pPr algn="ctr" indent="0" marL="0">
+              <a:buNone/>
+            </a:pPr>
+            <a:r>
+              <a:rPr lang="en-US" sz="700" i="1" dirty="0">
+                <a:solidFill>
+                  <a:srgbClr val="94A3B8"/>
+                </a:solidFill>
+                <a:latin typeface="Calibri" pitchFamily="34" charset="0"/>
+                <a:ea typeface="Calibri" pitchFamily="34" charset="-122"/>
+                <a:cs typeface="Calibri" pitchFamily="34" charset="-120"/>
+              </a:rPr>
+              <a:t>final consonant doubled before vowel suffix</a:t>
+            </a:r>
+            <a:endParaRPr lang="en-US" sz="700" dirty="0"/>
+          </a:p>
+        </p:txBody>
+      </p:sp>
+      <p:sp>
+        <p:nvSpPr>
+          <p:cNvPr id="26" name="Shape 24"/>
+          <p:cNvSpPr/>
+          <p:nvPr/>
+        </p:nvSpPr>
+        <p:spPr>
+          <a:xfrm>
+            <a:off x="6998818" y="2258568"/>
+            <a:ext cx="1581912" cy="292608"/>
+          </a:xfrm>
+          <a:prstGeom prst="rect">
+            <a:avLst>
+              <a:gd name="adj" fmla="val 25000"/>
+            </a:avLst>
+          </a:prstGeom>
+          <a:solidFill>
+            <a:srgbClr val="FCE7F3"/>
+          </a:solidFill>
+          <a:ln w="19050">
+            <a:solidFill>
+              <a:srgbClr val="DB2777"/>
+            </a:solidFill>
+            <a:prstDash val="solid"/>
+          </a:ln>
+          <a:effectLst>
+            <a:outerShdw sx="100000" sy="100000" kx="0" ky="0" algn="bl" rotWithShape="0" blurRad="101600" dist="38100" dir="8100000">
+              <a:srgbClr val="000000">
+                <a:alpha val="12000"/>
+              </a:srgbClr>
+            </a:outerShdw>
+          </a:effectLst>
+        </p:spPr>
+      </p:sp>
+      <p:sp>
+        <p:nvSpPr>
+          <p:cNvPr id="27" name="Text 25"/>
+          <p:cNvSpPr/>
+          <p:nvPr/>
+        </p:nvSpPr>
+        <p:spPr>
+          <a:xfrm>
+            <a:off x="6998818" y="2258568"/>
+            <a:ext cx="1581912" cy="292608"/>
+          </a:xfrm>
+          <a:prstGeom prst="rect">
+            <a:avLst/>
+          </a:prstGeom>
+          <a:noFill/>
+          <a:ln/>
+        </p:spPr>
+        <p:txBody>
+          <a:bodyPr wrap="square" lIns="0" tIns="0" rIns="0" bIns="0" rtlCol="0" anchor="ctr"/>
+          <a:lstStyle/>
+          <a:p>
+            <a:pPr algn="ctr" indent="0" marL="0">
+              <a:buNone/>
+            </a:pPr>
+            <a:r>
+              <a:rPr lang="en-US" sz="1300" b="1" dirty="0">
+                <a:solidFill>
+                  <a:srgbClr val="9D174D"/>
+                </a:solidFill>
+                <a:latin typeface="Trebuchet MS" pitchFamily="34" charset="0"/>
+                <a:ea typeface="Trebuchet MS" pitchFamily="34" charset="-122"/>
+                <a:cs typeface="Trebuchet MS" pitchFamily="34" charset="-120"/>
+              </a:rPr>
+              <a:t>ed</a:t>
+            </a:r>
+            <a:endParaRPr lang="en-US" sz="1300" dirty="0"/>
+          </a:p>
+        </p:txBody>
+      </p:sp>
+      <p:sp>
+        <p:nvSpPr>
+          <p:cNvPr id="28" name="Text 26"/>
+          <p:cNvSpPr/>
+          <p:nvPr/>
+        </p:nvSpPr>
+        <p:spPr>
+          <a:xfrm>
+            <a:off x="6998818" y="2569464"/>
+            <a:ext cx="1581912" cy="201168"/>
+          </a:xfrm>
+          <a:prstGeom prst="rect">
+            <a:avLst/>
+          </a:prstGeom>
+          <a:noFill/>
+          <a:ln/>
+        </p:spPr>
+        <p:txBody>
+          <a:bodyPr wrap="square" lIns="0" tIns="0" rIns="0" bIns="0" rtlCol="0" anchor="t"/>
+          <a:lstStyle/>
+          <a:p>
+            <a:pPr algn="ctr" indent="0" marL="0">
+              <a:buNone/>
+            </a:pPr>
+            <a:r>
+              <a:rPr lang="en-US" sz="850" dirty="0">
+                <a:solidFill>
+                  <a:srgbClr val="475569"/>
+                </a:solidFill>
+                <a:latin typeface="Calibri" pitchFamily="34" charset="0"/>
+                <a:ea typeface="Calibri" pitchFamily="34" charset="-122"/>
+                <a:cs typeface="Calibri" pitchFamily="34" charset="-120"/>
+              </a:rPr>
+              <a:t>in the past</a:t>
+            </a:r>
+            <a:endParaRPr lang="en-US" sz="850" dirty="0"/>
+          </a:p>
+        </p:txBody>
+      </p:sp>
+      <p:sp>
+        <p:nvSpPr>
+          <p:cNvPr id="29" name="Shape 27"/>
           <p:cNvSpPr/>
           <p:nvPr/>
         </p:nvSpPr>
@@ -12731,7 +12994,7 @@
       </p:sp>
       <p:sp>
         <p:nvSpPr>
-          <p:cNvPr id="23" name="Text 21"/>
+          <p:cNvPr id="30" name="Text 28"/>
           <p:cNvSpPr/>
           <p:nvPr/>
         </p:nvSpPr>
@@ -12770,7 +13033,7 @@
       </p:sp>
       <p:sp>
         <p:nvSpPr>
-          <p:cNvPr id="24" name="Shape 22"/>
+          <p:cNvPr id="31" name="Shape 29"/>
           <p:cNvSpPr/>
           <p:nvPr/>
         </p:nvSpPr>
@@ -12797,7 +13060,7 @@
       </p:sp>
       <p:sp>
         <p:nvSpPr>
-          <p:cNvPr id="25" name="Text 23"/>
+          <p:cNvPr id="32" name="Text 30"/>
           <p:cNvSpPr/>
           <p:nvPr/>
         </p:nvSpPr>
@@ -12836,7 +13099,7 @@
       </p:sp>
       <p:sp>
         <p:nvSpPr>
-          <p:cNvPr id="26" name="Shape 24"/>
+          <p:cNvPr id="33" name="Shape 31"/>
           <p:cNvSpPr/>
           <p:nvPr/>
         </p:nvSpPr>
@@ -12863,7 +13126,7 @@
       </p:sp>
       <p:sp>
         <p:nvSpPr>
-          <p:cNvPr id="27" name="Text 25"/>
+          <p:cNvPr id="34" name="Text 32"/>
           <p:cNvSpPr/>
           <p:nvPr/>
         </p:nvSpPr>
@@ -12902,7 +13165,7 @@
       </p:sp>
       <p:sp>
         <p:nvSpPr>
-          <p:cNvPr id="28" name="Shape 26"/>
+          <p:cNvPr id="35" name="Shape 33"/>
           <p:cNvSpPr/>
           <p:nvPr/>
         </p:nvSpPr>
@@ -12929,7 +13192,7 @@
       </p:sp>
       <p:sp>
         <p:nvSpPr>
-          <p:cNvPr id="29" name="Text 27"/>
+          <p:cNvPr id="36" name="Text 34"/>
           <p:cNvSpPr/>
           <p:nvPr/>
         </p:nvSpPr>
@@ -13252,7 +13515,7 @@
                 <a:ea typeface="Calibri" pitchFamily="34" charset="-122"/>
                 <a:cs typeface="Calibri" pitchFamily="34" charset="-120"/>
               </a:rPr>
-              <a:t>Word Labs  •  wordlabs.app  •  Root: 'plan' = arrange, design, flat surface</a:t>
+              <a:t>Word Labs  •  wordlabs.app  •  Root: 'plan' = a scheme or flat surface</a:t>
             </a:r>
             <a:endParaRPr lang="en-US" sz="800" dirty="0"/>
           </a:p>
@@ -13391,7 +13654,7 @@
                 <a:ea typeface="Trebuchet MS" pitchFamily="34" charset="-122"/>
                 <a:cs typeface="Trebuchet MS" pitchFamily="34" charset="-120"/>
               </a:rPr>
-              <a:t>explain</a:t>
+              <a:t>unplanned</a:t>
             </a:r>
             <a:endParaRPr lang="en-US" sz="2800" dirty="0"/>
           </a:p>
@@ -13471,8 +13734,8 @@
         </p:nvSpPr>
         <p:spPr>
           <a:xfrm>
-            <a:off x="2938272" y="2258568"/>
-            <a:ext cx="1828800" cy="292608"/>
+            <a:off x="1989734" y="2258568"/>
+            <a:ext cx="1581912" cy="292608"/>
           </a:xfrm>
           <a:prstGeom prst="rect">
             <a:avLst>
@@ -13505,8 +13768,8 @@
         </p:nvSpPr>
         <p:spPr>
           <a:xfrm>
-            <a:off x="2938272" y="2258568"/>
-            <a:ext cx="1828800" cy="292608"/>
+            <a:off x="1989734" y="2258568"/>
+            <a:ext cx="1581912" cy="292608"/>
           </a:xfrm>
           <a:prstGeom prst="rect">
             <a:avLst/>
@@ -13530,7 +13793,7 @@
                 <a:ea typeface="Trebuchet MS" pitchFamily="34" charset="-122"/>
                 <a:cs typeface="Trebuchet MS" pitchFamily="34" charset="-120"/>
               </a:rPr>
-              <a:t>ex</a:t>
+              <a:t>un</a:t>
             </a:r>
             <a:endParaRPr lang="en-US" sz="1300" dirty="0"/>
           </a:p>
@@ -13544,8 +13807,8 @@
         </p:nvSpPr>
         <p:spPr>
           <a:xfrm>
-            <a:off x="2938272" y="2569464"/>
-            <a:ext cx="1828800" cy="201168"/>
+            <a:off x="1989734" y="2569464"/>
+            <a:ext cx="1581912" cy="201168"/>
           </a:xfrm>
           <a:prstGeom prst="rect">
             <a:avLst/>
@@ -13569,7 +13832,7 @@
                 <a:ea typeface="Calibri" pitchFamily="34" charset="-122"/>
                 <a:cs typeface="Calibri" pitchFamily="34" charset="-120"/>
               </a:rPr>
-              <a:t>out, away from</a:t>
+              <a:t>not</a:t>
             </a:r>
             <a:endParaRPr lang="en-US" sz="850" dirty="0"/>
           </a:p>
@@ -13583,8 +13846,8 @@
         </p:nvSpPr>
         <p:spPr>
           <a:xfrm>
-            <a:off x="5803392" y="2258568"/>
-            <a:ext cx="1828800" cy="292608"/>
+            <a:off x="3659429" y="2258568"/>
+            <a:ext cx="1581912" cy="292608"/>
           </a:xfrm>
           <a:prstGeom prst="rect">
             <a:avLst>
@@ -13592,11 +13855,11 @@
             </a:avLst>
           </a:prstGeom>
           <a:solidFill>
-            <a:srgbClr val="FCE7F3"/>
+            <a:srgbClr val="CCFBF1"/>
           </a:solidFill>
           <a:ln w="19050">
             <a:solidFill>
-              <a:srgbClr val="DB2777"/>
+              <a:srgbClr val="0D9488"/>
             </a:solidFill>
             <a:prstDash val="solid"/>
           </a:ln>
@@ -13617,8 +13880,8 @@
         </p:nvSpPr>
         <p:spPr>
           <a:xfrm>
-            <a:off x="5803392" y="2258568"/>
-            <a:ext cx="1828800" cy="292608"/>
+            <a:off x="3659429" y="2258568"/>
+            <a:ext cx="1581912" cy="292608"/>
           </a:xfrm>
           <a:prstGeom prst="rect">
             <a:avLst/>
@@ -13636,13 +13899,13 @@
             <a:r>
               <a:rPr lang="en-US" sz="1300" b="1" dirty="0">
                 <a:solidFill>
-                  <a:srgbClr val="9D174D"/>
+                  <a:srgbClr val="0F766E"/>
                 </a:solidFill>
                 <a:latin typeface="Trebuchet MS" pitchFamily="34" charset="0"/>
                 <a:ea typeface="Trebuchet MS" pitchFamily="34" charset="-122"/>
                 <a:cs typeface="Trebuchet MS" pitchFamily="34" charset="-120"/>
               </a:rPr>
-              <a:t>plain</a:t>
+              <a:t>plan</a:t>
             </a:r>
             <a:endParaRPr lang="en-US" sz="1300" dirty="0"/>
           </a:p>
@@ -13656,8 +13919,8 @@
         </p:nvSpPr>
         <p:spPr>
           <a:xfrm>
-            <a:off x="5803392" y="2569464"/>
-            <a:ext cx="1828800" cy="201168"/>
+            <a:off x="3659429" y="2569464"/>
+            <a:ext cx="1581912" cy="201168"/>
           </a:xfrm>
           <a:prstGeom prst="rect">
             <a:avLst/>
@@ -13681,7 +13944,7 @@
                 <a:ea typeface="Calibri" pitchFamily="34" charset="-122"/>
                 <a:cs typeface="Calibri" pitchFamily="34" charset="-120"/>
               </a:rPr>
-              <a:t>flat, clear, make clear</a:t>
+              <a:t>a scheme or design</a:t>
             </a:r>
             <a:endParaRPr lang="en-US" sz="850" dirty="0"/>
           </a:p>
@@ -13690,6 +13953,269 @@
       <p:sp>
         <p:nvSpPr>
           <p:cNvPr id="22" name="Shape 20"/>
+          <p:cNvSpPr/>
+          <p:nvPr/>
+        </p:nvSpPr>
+        <p:spPr>
+          <a:xfrm>
+            <a:off x="5329123" y="2258568"/>
+            <a:ext cx="1581912" cy="292608"/>
+          </a:xfrm>
+          <a:prstGeom prst="rect">
+            <a:avLst>
+              <a:gd name="adj" fmla="val 25000"/>
+            </a:avLst>
+          </a:prstGeom>
+          <a:solidFill>
+            <a:srgbClr val="FCE7F3"/>
+          </a:solidFill>
+          <a:ln w="19050">
+            <a:solidFill>
+              <a:srgbClr val="DB2777"/>
+            </a:solidFill>
+            <a:prstDash val="solid"/>
+          </a:ln>
+          <a:effectLst>
+            <a:outerShdw sx="100000" sy="100000" kx="0" ky="0" algn="bl" rotWithShape="0" blurRad="101600" dist="38100" dir="8100000">
+              <a:srgbClr val="000000">
+                <a:alpha val="12000"/>
+              </a:srgbClr>
+            </a:outerShdw>
+          </a:effectLst>
+        </p:spPr>
+      </p:sp>
+      <p:sp>
+        <p:nvSpPr>
+          <p:cNvPr id="23" name="Text 21"/>
+          <p:cNvSpPr/>
+          <p:nvPr/>
+        </p:nvSpPr>
+        <p:spPr>
+          <a:xfrm>
+            <a:off x="5329123" y="2258568"/>
+            <a:ext cx="1581912" cy="292608"/>
+          </a:xfrm>
+          <a:prstGeom prst="rect">
+            <a:avLst/>
+          </a:prstGeom>
+          <a:noFill/>
+          <a:ln/>
+        </p:spPr>
+        <p:txBody>
+          <a:bodyPr wrap="square" lIns="0" tIns="0" rIns="0" bIns="0" rtlCol="0" anchor="ctr"/>
+          <a:lstStyle/>
+          <a:p>
+            <a:pPr algn="ctr" indent="0" marL="0">
+              <a:buNone/>
+            </a:pPr>
+            <a:r>
+              <a:rPr lang="en-US" sz="1300" b="1" dirty="0">
+                <a:solidFill>
+                  <a:srgbClr val="9D174D"/>
+                </a:solidFill>
+                <a:latin typeface="Trebuchet MS" pitchFamily="34" charset="0"/>
+                <a:ea typeface="Trebuchet MS" pitchFamily="34" charset="-122"/>
+                <a:cs typeface="Trebuchet MS" pitchFamily="34" charset="-120"/>
+              </a:rPr>
+              <a:t>n</a:t>
+            </a:r>
+            <a:endParaRPr lang="en-US" sz="1300" dirty="0"/>
+          </a:p>
+        </p:txBody>
+      </p:sp>
+      <p:sp>
+        <p:nvSpPr>
+          <p:cNvPr id="24" name="Text 22"/>
+          <p:cNvSpPr/>
+          <p:nvPr/>
+        </p:nvSpPr>
+        <p:spPr>
+          <a:xfrm>
+            <a:off x="5329123" y="2569464"/>
+            <a:ext cx="1581912" cy="201168"/>
+          </a:xfrm>
+          <a:prstGeom prst="rect">
+            <a:avLst/>
+          </a:prstGeom>
+          <a:noFill/>
+          <a:ln/>
+        </p:spPr>
+        <p:txBody>
+          <a:bodyPr wrap="square" lIns="0" tIns="0" rIns="0" bIns="0" rtlCol="0" anchor="t"/>
+          <a:lstStyle/>
+          <a:p>
+            <a:pPr algn="ctr" indent="0" marL="0">
+              <a:buNone/>
+            </a:pPr>
+            <a:r>
+              <a:rPr lang="en-US" sz="850" dirty="0">
+                <a:solidFill>
+                  <a:srgbClr val="475569"/>
+                </a:solidFill>
+                <a:latin typeface="Calibri" pitchFamily="34" charset="0"/>
+                <a:ea typeface="Calibri" pitchFamily="34" charset="-122"/>
+                <a:cs typeface="Calibri" pitchFamily="34" charset="-120"/>
+              </a:rPr>
+              <a:t>double consonant before suffix</a:t>
+            </a:r>
+            <a:endParaRPr lang="en-US" sz="850" dirty="0"/>
+          </a:p>
+        </p:txBody>
+      </p:sp>
+      <p:sp>
+        <p:nvSpPr>
+          <p:cNvPr id="25" name="Text 23"/>
+          <p:cNvSpPr/>
+          <p:nvPr/>
+        </p:nvSpPr>
+        <p:spPr>
+          <a:xfrm>
+            <a:off x="5329123" y="2752344"/>
+            <a:ext cx="1581912" cy="182880"/>
+          </a:xfrm>
+          <a:prstGeom prst="rect">
+            <a:avLst/>
+          </a:prstGeom>
+          <a:noFill/>
+          <a:ln/>
+        </p:spPr>
+        <p:txBody>
+          <a:bodyPr wrap="square" lIns="0" tIns="0" rIns="0" bIns="0" rtlCol="0" anchor="t"/>
+          <a:lstStyle/>
+          <a:p>
+            <a:pPr algn="ctr" indent="0" marL="0">
+              <a:buNone/>
+            </a:pPr>
+            <a:r>
+              <a:rPr lang="en-US" sz="700" i="1" dirty="0">
+                <a:solidFill>
+                  <a:srgbClr val="94A3B8"/>
+                </a:solidFill>
+                <a:latin typeface="Calibri" pitchFamily="34" charset="0"/>
+                <a:ea typeface="Calibri" pitchFamily="34" charset="-122"/>
+                <a:cs typeface="Calibri" pitchFamily="34" charset="-120"/>
+              </a:rPr>
+              <a:t>final consonant doubled before vowel suffix</a:t>
+            </a:r>
+            <a:endParaRPr lang="en-US" sz="700" dirty="0"/>
+          </a:p>
+        </p:txBody>
+      </p:sp>
+      <p:sp>
+        <p:nvSpPr>
+          <p:cNvPr id="26" name="Shape 24"/>
+          <p:cNvSpPr/>
+          <p:nvPr/>
+        </p:nvSpPr>
+        <p:spPr>
+          <a:xfrm>
+            <a:off x="6998818" y="2258568"/>
+            <a:ext cx="1581912" cy="292608"/>
+          </a:xfrm>
+          <a:prstGeom prst="rect">
+            <a:avLst>
+              <a:gd name="adj" fmla="val 25000"/>
+            </a:avLst>
+          </a:prstGeom>
+          <a:solidFill>
+            <a:srgbClr val="FCE7F3"/>
+          </a:solidFill>
+          <a:ln w="19050">
+            <a:solidFill>
+              <a:srgbClr val="DB2777"/>
+            </a:solidFill>
+            <a:prstDash val="solid"/>
+          </a:ln>
+          <a:effectLst>
+            <a:outerShdw sx="100000" sy="100000" kx="0" ky="0" algn="bl" rotWithShape="0" blurRad="101600" dist="38100" dir="8100000">
+              <a:srgbClr val="000000">
+                <a:alpha val="12000"/>
+              </a:srgbClr>
+            </a:outerShdw>
+          </a:effectLst>
+        </p:spPr>
+      </p:sp>
+      <p:sp>
+        <p:nvSpPr>
+          <p:cNvPr id="27" name="Text 25"/>
+          <p:cNvSpPr/>
+          <p:nvPr/>
+        </p:nvSpPr>
+        <p:spPr>
+          <a:xfrm>
+            <a:off x="6998818" y="2258568"/>
+            <a:ext cx="1581912" cy="292608"/>
+          </a:xfrm>
+          <a:prstGeom prst="rect">
+            <a:avLst/>
+          </a:prstGeom>
+          <a:noFill/>
+          <a:ln/>
+        </p:spPr>
+        <p:txBody>
+          <a:bodyPr wrap="square" lIns="0" tIns="0" rIns="0" bIns="0" rtlCol="0" anchor="ctr"/>
+          <a:lstStyle/>
+          <a:p>
+            <a:pPr algn="ctr" indent="0" marL="0">
+              <a:buNone/>
+            </a:pPr>
+            <a:r>
+              <a:rPr lang="en-US" sz="1300" b="1" dirty="0">
+                <a:solidFill>
+                  <a:srgbClr val="9D174D"/>
+                </a:solidFill>
+                <a:latin typeface="Trebuchet MS" pitchFamily="34" charset="0"/>
+                <a:ea typeface="Trebuchet MS" pitchFamily="34" charset="-122"/>
+                <a:cs typeface="Trebuchet MS" pitchFamily="34" charset="-120"/>
+              </a:rPr>
+              <a:t>ed</a:t>
+            </a:r>
+            <a:endParaRPr lang="en-US" sz="1300" dirty="0"/>
+          </a:p>
+        </p:txBody>
+      </p:sp>
+      <p:sp>
+        <p:nvSpPr>
+          <p:cNvPr id="28" name="Text 26"/>
+          <p:cNvSpPr/>
+          <p:nvPr/>
+        </p:nvSpPr>
+        <p:spPr>
+          <a:xfrm>
+            <a:off x="6998818" y="2569464"/>
+            <a:ext cx="1581912" cy="201168"/>
+          </a:xfrm>
+          <a:prstGeom prst="rect">
+            <a:avLst/>
+          </a:prstGeom>
+          <a:noFill/>
+          <a:ln/>
+        </p:spPr>
+        <p:txBody>
+          <a:bodyPr wrap="square" lIns="0" tIns="0" rIns="0" bIns="0" rtlCol="0" anchor="t"/>
+          <a:lstStyle/>
+          <a:p>
+            <a:pPr algn="ctr" indent="0" marL="0">
+              <a:buNone/>
+            </a:pPr>
+            <a:r>
+              <a:rPr lang="en-US" sz="850" dirty="0">
+                <a:solidFill>
+                  <a:srgbClr val="475569"/>
+                </a:solidFill>
+                <a:latin typeface="Calibri" pitchFamily="34" charset="0"/>
+                <a:ea typeface="Calibri" pitchFamily="34" charset="-122"/>
+                <a:cs typeface="Calibri" pitchFamily="34" charset="-120"/>
+              </a:rPr>
+              <a:t>in the past</a:t>
+            </a:r>
+            <a:endParaRPr lang="en-US" sz="850" dirty="0"/>
+          </a:p>
+        </p:txBody>
+      </p:sp>
+      <p:sp>
+        <p:nvSpPr>
+          <p:cNvPr id="29" name="Shape 27"/>
           <p:cNvSpPr/>
           <p:nvPr/>
         </p:nvSpPr>
@@ -13716,7 +14242,7 @@
       </p:sp>
       <p:sp>
         <p:nvSpPr>
-          <p:cNvPr id="23" name="Text 21"/>
+          <p:cNvPr id="30" name="Text 28"/>
           <p:cNvSpPr/>
           <p:nvPr/>
         </p:nvSpPr>
@@ -13755,7 +14281,7 @@
       </p:sp>
       <p:sp>
         <p:nvSpPr>
-          <p:cNvPr id="24" name="Shape 22"/>
+          <p:cNvPr id="31" name="Shape 29"/>
           <p:cNvSpPr/>
           <p:nvPr/>
         </p:nvSpPr>
@@ -13782,7 +14308,7 @@
       </p:sp>
       <p:sp>
         <p:nvSpPr>
-          <p:cNvPr id="25" name="Shape 23"/>
+          <p:cNvPr id="32" name="Shape 30"/>
           <p:cNvSpPr/>
           <p:nvPr/>
         </p:nvSpPr>
@@ -13809,7 +14335,7 @@
       </p:sp>
       <p:sp>
         <p:nvSpPr>
-          <p:cNvPr id="26" name="Text 24"/>
+          <p:cNvPr id="33" name="Text 31"/>
           <p:cNvSpPr/>
           <p:nvPr/>
         </p:nvSpPr>
@@ -13840,7 +14366,7 @@
                 <a:ea typeface="Trebuchet MS" pitchFamily="34" charset="-122"/>
                 <a:cs typeface="Trebuchet MS" pitchFamily="34" charset="-120"/>
               </a:rPr>
-              <a:t>ex</a:t>
+              <a:t>un</a:t>
             </a:r>
             <a:endParaRPr lang="en-US" sz="1400" dirty="0"/>
           </a:p>
@@ -13848,7 +14374,7 @@
       </p:sp>
       <p:sp>
         <p:nvSpPr>
-          <p:cNvPr id="27" name="Text 25"/>
+          <p:cNvPr id="34" name="Text 32"/>
           <p:cNvSpPr/>
           <p:nvPr/>
         </p:nvSpPr>
@@ -13887,7 +14413,7 @@
       </p:sp>
       <p:sp>
         <p:nvSpPr>
-          <p:cNvPr id="28" name="Shape 26"/>
+          <p:cNvPr id="35" name="Shape 33"/>
           <p:cNvSpPr/>
           <p:nvPr/>
         </p:nvSpPr>
@@ -13914,7 +14440,7 @@
       </p:sp>
       <p:sp>
         <p:nvSpPr>
-          <p:cNvPr id="29" name="Text 27"/>
+          <p:cNvPr id="36" name="Text 34"/>
           <p:cNvSpPr/>
           <p:nvPr/>
         </p:nvSpPr>
@@ -13945,7 +14471,7 @@
                 <a:ea typeface="Trebuchet MS" pitchFamily="34" charset="-122"/>
                 <a:cs typeface="Trebuchet MS" pitchFamily="34" charset="-120"/>
               </a:rPr>
-              <a:t>plain</a:t>
+              <a:t>planned</a:t>
             </a:r>
             <a:endParaRPr lang="en-US" sz="1400" dirty="0"/>
           </a:p>
@@ -13953,7 +14479,7 @@
       </p:sp>
       <p:sp>
         <p:nvSpPr>
-          <p:cNvPr id="30" name="Shape 28"/>
+          <p:cNvPr id="37" name="Shape 35"/>
           <p:cNvSpPr/>
           <p:nvPr/>
         </p:nvSpPr>
@@ -13980,7 +14506,7 @@
       </p:sp>
       <p:sp>
         <p:nvSpPr>
-          <p:cNvPr id="31" name="Text 29"/>
+          <p:cNvPr id="38" name="Text 36"/>
           <p:cNvSpPr/>
           <p:nvPr/>
         </p:nvSpPr>
@@ -14019,7 +14545,7 @@
       </p:sp>
       <p:sp>
         <p:nvSpPr>
-          <p:cNvPr id="32" name="Shape 30"/>
+          <p:cNvPr id="39" name="Shape 37"/>
           <p:cNvSpPr/>
           <p:nvPr/>
         </p:nvSpPr>
@@ -14046,7 +14572,7 @@
       </p:sp>
       <p:sp>
         <p:nvSpPr>
-          <p:cNvPr id="33" name="Text 31"/>
+          <p:cNvPr id="40" name="Text 38"/>
           <p:cNvSpPr/>
           <p:nvPr/>
         </p:nvSpPr>
@@ -14278,7 +14804,7 @@
                 <a:ea typeface="Calibri" pitchFamily="34" charset="-122"/>
                 <a:cs typeface="Calibri" pitchFamily="34" charset="-120"/>
               </a:rPr>
-              <a:t>Root 'plan' — arrange, design, flat surface</a:t>
+              <a:t>Root 'plan' — a scheme or flat surface</a:t>
             </a:r>
             <a:endParaRPr lang="en-US" sz="1600" dirty="0"/>
           </a:p>
@@ -14634,7 +15160,7 @@
                 <a:ea typeface="Calibri" pitchFamily="34" charset="-122"/>
                 <a:cs typeface="Calibri" pitchFamily="34" charset="-120"/>
               </a:rPr>
-              <a:t>Word Labs  •  wordlabs.app  •  Root: 'plan' = arrange, design, flat surface</a:t>
+              <a:t>Word Labs  •  wordlabs.app  •  Root: 'plan' = a scheme or flat surface</a:t>
             </a:r>
             <a:endParaRPr lang="en-US" sz="800" dirty="0"/>
           </a:p>
@@ -14773,7 +15299,7 @@
                 <a:ea typeface="Trebuchet MS" pitchFamily="34" charset="-122"/>
                 <a:cs typeface="Trebuchet MS" pitchFamily="34" charset="-120"/>
               </a:rPr>
-              <a:t>explain</a:t>
+              <a:t>unplanned</a:t>
             </a:r>
             <a:endParaRPr lang="en-US" sz="2800" dirty="0"/>
           </a:p>
@@ -14853,8 +15379,8 @@
         </p:nvSpPr>
         <p:spPr>
           <a:xfrm>
-            <a:off x="2938272" y="2258568"/>
-            <a:ext cx="1828800" cy="292608"/>
+            <a:off x="1989734" y="2258568"/>
+            <a:ext cx="1581912" cy="292608"/>
           </a:xfrm>
           <a:prstGeom prst="rect">
             <a:avLst>
@@ -14887,8 +15413,8 @@
         </p:nvSpPr>
         <p:spPr>
           <a:xfrm>
-            <a:off x="2938272" y="2258568"/>
-            <a:ext cx="1828800" cy="292608"/>
+            <a:off x="1989734" y="2258568"/>
+            <a:ext cx="1581912" cy="292608"/>
           </a:xfrm>
           <a:prstGeom prst="rect">
             <a:avLst/>
@@ -14912,7 +15438,7 @@
                 <a:ea typeface="Trebuchet MS" pitchFamily="34" charset="-122"/>
                 <a:cs typeface="Trebuchet MS" pitchFamily="34" charset="-120"/>
               </a:rPr>
-              <a:t>ex</a:t>
+              <a:t>un</a:t>
             </a:r>
             <a:endParaRPr lang="en-US" sz="1300" dirty="0"/>
           </a:p>
@@ -14926,8 +15452,8 @@
         </p:nvSpPr>
         <p:spPr>
           <a:xfrm>
-            <a:off x="2938272" y="2569464"/>
-            <a:ext cx="1828800" cy="201168"/>
+            <a:off x="1989734" y="2569464"/>
+            <a:ext cx="1581912" cy="201168"/>
           </a:xfrm>
           <a:prstGeom prst="rect">
             <a:avLst/>
@@ -14951,7 +15477,7 @@
                 <a:ea typeface="Calibri" pitchFamily="34" charset="-122"/>
                 <a:cs typeface="Calibri" pitchFamily="34" charset="-120"/>
               </a:rPr>
-              <a:t>out, away from</a:t>
+              <a:t>not</a:t>
             </a:r>
             <a:endParaRPr lang="en-US" sz="850" dirty="0"/>
           </a:p>
@@ -14965,8 +15491,8 @@
         </p:nvSpPr>
         <p:spPr>
           <a:xfrm>
-            <a:off x="5803392" y="2258568"/>
-            <a:ext cx="1828800" cy="292608"/>
+            <a:off x="3659429" y="2258568"/>
+            <a:ext cx="1581912" cy="292608"/>
           </a:xfrm>
           <a:prstGeom prst="rect">
             <a:avLst>
@@ -14974,11 +15500,11 @@
             </a:avLst>
           </a:prstGeom>
           <a:solidFill>
-            <a:srgbClr val="FCE7F3"/>
+            <a:srgbClr val="CCFBF1"/>
           </a:solidFill>
           <a:ln w="19050">
             <a:solidFill>
-              <a:srgbClr val="DB2777"/>
+              <a:srgbClr val="0D9488"/>
             </a:solidFill>
             <a:prstDash val="solid"/>
           </a:ln>
@@ -14999,8 +15525,8 @@
         </p:nvSpPr>
         <p:spPr>
           <a:xfrm>
-            <a:off x="5803392" y="2258568"/>
-            <a:ext cx="1828800" cy="292608"/>
+            <a:off x="3659429" y="2258568"/>
+            <a:ext cx="1581912" cy="292608"/>
           </a:xfrm>
           <a:prstGeom prst="rect">
             <a:avLst/>
@@ -15018,13 +15544,13 @@
             <a:r>
               <a:rPr lang="en-US" sz="1300" b="1" dirty="0">
                 <a:solidFill>
-                  <a:srgbClr val="9D174D"/>
+                  <a:srgbClr val="0F766E"/>
                 </a:solidFill>
                 <a:latin typeface="Trebuchet MS" pitchFamily="34" charset="0"/>
                 <a:ea typeface="Trebuchet MS" pitchFamily="34" charset="-122"/>
                 <a:cs typeface="Trebuchet MS" pitchFamily="34" charset="-120"/>
               </a:rPr>
-              <a:t>plain</a:t>
+              <a:t>plan</a:t>
             </a:r>
             <a:endParaRPr lang="en-US" sz="1300" dirty="0"/>
           </a:p>
@@ -15038,8 +15564,8 @@
         </p:nvSpPr>
         <p:spPr>
           <a:xfrm>
-            <a:off x="5803392" y="2569464"/>
-            <a:ext cx="1828800" cy="201168"/>
+            <a:off x="3659429" y="2569464"/>
+            <a:ext cx="1581912" cy="201168"/>
           </a:xfrm>
           <a:prstGeom prst="rect">
             <a:avLst/>
@@ -15063,7 +15589,7 @@
                 <a:ea typeface="Calibri" pitchFamily="34" charset="-122"/>
                 <a:cs typeface="Calibri" pitchFamily="34" charset="-120"/>
               </a:rPr>
-              <a:t>flat, clear, make clear</a:t>
+              <a:t>a scheme or design</a:t>
             </a:r>
             <a:endParaRPr lang="en-US" sz="850" dirty="0"/>
           </a:p>
@@ -15072,6 +15598,269 @@
       <p:sp>
         <p:nvSpPr>
           <p:cNvPr id="22" name="Shape 20"/>
+          <p:cNvSpPr/>
+          <p:nvPr/>
+        </p:nvSpPr>
+        <p:spPr>
+          <a:xfrm>
+            <a:off x="5329123" y="2258568"/>
+            <a:ext cx="1581912" cy="292608"/>
+          </a:xfrm>
+          <a:prstGeom prst="rect">
+            <a:avLst>
+              <a:gd name="adj" fmla="val 25000"/>
+            </a:avLst>
+          </a:prstGeom>
+          <a:solidFill>
+            <a:srgbClr val="FCE7F3"/>
+          </a:solidFill>
+          <a:ln w="19050">
+            <a:solidFill>
+              <a:srgbClr val="DB2777"/>
+            </a:solidFill>
+            <a:prstDash val="solid"/>
+          </a:ln>
+          <a:effectLst>
+            <a:outerShdw sx="100000" sy="100000" kx="0" ky="0" algn="bl" rotWithShape="0" blurRad="101600" dist="38100" dir="8100000">
+              <a:srgbClr val="000000">
+                <a:alpha val="12000"/>
+              </a:srgbClr>
+            </a:outerShdw>
+          </a:effectLst>
+        </p:spPr>
+      </p:sp>
+      <p:sp>
+        <p:nvSpPr>
+          <p:cNvPr id="23" name="Text 21"/>
+          <p:cNvSpPr/>
+          <p:nvPr/>
+        </p:nvSpPr>
+        <p:spPr>
+          <a:xfrm>
+            <a:off x="5329123" y="2258568"/>
+            <a:ext cx="1581912" cy="292608"/>
+          </a:xfrm>
+          <a:prstGeom prst="rect">
+            <a:avLst/>
+          </a:prstGeom>
+          <a:noFill/>
+          <a:ln/>
+        </p:spPr>
+        <p:txBody>
+          <a:bodyPr wrap="square" lIns="0" tIns="0" rIns="0" bIns="0" rtlCol="0" anchor="ctr"/>
+          <a:lstStyle/>
+          <a:p>
+            <a:pPr algn="ctr" indent="0" marL="0">
+              <a:buNone/>
+            </a:pPr>
+            <a:r>
+              <a:rPr lang="en-US" sz="1300" b="1" dirty="0">
+                <a:solidFill>
+                  <a:srgbClr val="9D174D"/>
+                </a:solidFill>
+                <a:latin typeface="Trebuchet MS" pitchFamily="34" charset="0"/>
+                <a:ea typeface="Trebuchet MS" pitchFamily="34" charset="-122"/>
+                <a:cs typeface="Trebuchet MS" pitchFamily="34" charset="-120"/>
+              </a:rPr>
+              <a:t>n</a:t>
+            </a:r>
+            <a:endParaRPr lang="en-US" sz="1300" dirty="0"/>
+          </a:p>
+        </p:txBody>
+      </p:sp>
+      <p:sp>
+        <p:nvSpPr>
+          <p:cNvPr id="24" name="Text 22"/>
+          <p:cNvSpPr/>
+          <p:nvPr/>
+        </p:nvSpPr>
+        <p:spPr>
+          <a:xfrm>
+            <a:off x="5329123" y="2569464"/>
+            <a:ext cx="1581912" cy="201168"/>
+          </a:xfrm>
+          <a:prstGeom prst="rect">
+            <a:avLst/>
+          </a:prstGeom>
+          <a:noFill/>
+          <a:ln/>
+        </p:spPr>
+        <p:txBody>
+          <a:bodyPr wrap="square" lIns="0" tIns="0" rIns="0" bIns="0" rtlCol="0" anchor="t"/>
+          <a:lstStyle/>
+          <a:p>
+            <a:pPr algn="ctr" indent="0" marL="0">
+              <a:buNone/>
+            </a:pPr>
+            <a:r>
+              <a:rPr lang="en-US" sz="850" dirty="0">
+                <a:solidFill>
+                  <a:srgbClr val="475569"/>
+                </a:solidFill>
+                <a:latin typeface="Calibri" pitchFamily="34" charset="0"/>
+                <a:ea typeface="Calibri" pitchFamily="34" charset="-122"/>
+                <a:cs typeface="Calibri" pitchFamily="34" charset="-120"/>
+              </a:rPr>
+              <a:t>double consonant before suffix</a:t>
+            </a:r>
+            <a:endParaRPr lang="en-US" sz="850" dirty="0"/>
+          </a:p>
+        </p:txBody>
+      </p:sp>
+      <p:sp>
+        <p:nvSpPr>
+          <p:cNvPr id="25" name="Text 23"/>
+          <p:cNvSpPr/>
+          <p:nvPr/>
+        </p:nvSpPr>
+        <p:spPr>
+          <a:xfrm>
+            <a:off x="5329123" y="2752344"/>
+            <a:ext cx="1581912" cy="182880"/>
+          </a:xfrm>
+          <a:prstGeom prst="rect">
+            <a:avLst/>
+          </a:prstGeom>
+          <a:noFill/>
+          <a:ln/>
+        </p:spPr>
+        <p:txBody>
+          <a:bodyPr wrap="square" lIns="0" tIns="0" rIns="0" bIns="0" rtlCol="0" anchor="t"/>
+          <a:lstStyle/>
+          <a:p>
+            <a:pPr algn="ctr" indent="0" marL="0">
+              <a:buNone/>
+            </a:pPr>
+            <a:r>
+              <a:rPr lang="en-US" sz="700" i="1" dirty="0">
+                <a:solidFill>
+                  <a:srgbClr val="94A3B8"/>
+                </a:solidFill>
+                <a:latin typeface="Calibri" pitchFamily="34" charset="0"/>
+                <a:ea typeface="Calibri" pitchFamily="34" charset="-122"/>
+                <a:cs typeface="Calibri" pitchFamily="34" charset="-120"/>
+              </a:rPr>
+              <a:t>final consonant doubled before vowel suffix</a:t>
+            </a:r>
+            <a:endParaRPr lang="en-US" sz="700" dirty="0"/>
+          </a:p>
+        </p:txBody>
+      </p:sp>
+      <p:sp>
+        <p:nvSpPr>
+          <p:cNvPr id="26" name="Shape 24"/>
+          <p:cNvSpPr/>
+          <p:nvPr/>
+        </p:nvSpPr>
+        <p:spPr>
+          <a:xfrm>
+            <a:off x="6998818" y="2258568"/>
+            <a:ext cx="1581912" cy="292608"/>
+          </a:xfrm>
+          <a:prstGeom prst="rect">
+            <a:avLst>
+              <a:gd name="adj" fmla="val 25000"/>
+            </a:avLst>
+          </a:prstGeom>
+          <a:solidFill>
+            <a:srgbClr val="FCE7F3"/>
+          </a:solidFill>
+          <a:ln w="19050">
+            <a:solidFill>
+              <a:srgbClr val="DB2777"/>
+            </a:solidFill>
+            <a:prstDash val="solid"/>
+          </a:ln>
+          <a:effectLst>
+            <a:outerShdw sx="100000" sy="100000" kx="0" ky="0" algn="bl" rotWithShape="0" blurRad="101600" dist="38100" dir="8100000">
+              <a:srgbClr val="000000">
+                <a:alpha val="12000"/>
+              </a:srgbClr>
+            </a:outerShdw>
+          </a:effectLst>
+        </p:spPr>
+      </p:sp>
+      <p:sp>
+        <p:nvSpPr>
+          <p:cNvPr id="27" name="Text 25"/>
+          <p:cNvSpPr/>
+          <p:nvPr/>
+        </p:nvSpPr>
+        <p:spPr>
+          <a:xfrm>
+            <a:off x="6998818" y="2258568"/>
+            <a:ext cx="1581912" cy="292608"/>
+          </a:xfrm>
+          <a:prstGeom prst="rect">
+            <a:avLst/>
+          </a:prstGeom>
+          <a:noFill/>
+          <a:ln/>
+        </p:spPr>
+        <p:txBody>
+          <a:bodyPr wrap="square" lIns="0" tIns="0" rIns="0" bIns="0" rtlCol="0" anchor="ctr"/>
+          <a:lstStyle/>
+          <a:p>
+            <a:pPr algn="ctr" indent="0" marL="0">
+              <a:buNone/>
+            </a:pPr>
+            <a:r>
+              <a:rPr lang="en-US" sz="1300" b="1" dirty="0">
+                <a:solidFill>
+                  <a:srgbClr val="9D174D"/>
+                </a:solidFill>
+                <a:latin typeface="Trebuchet MS" pitchFamily="34" charset="0"/>
+                <a:ea typeface="Trebuchet MS" pitchFamily="34" charset="-122"/>
+                <a:cs typeface="Trebuchet MS" pitchFamily="34" charset="-120"/>
+              </a:rPr>
+              <a:t>ed</a:t>
+            </a:r>
+            <a:endParaRPr lang="en-US" sz="1300" dirty="0"/>
+          </a:p>
+        </p:txBody>
+      </p:sp>
+      <p:sp>
+        <p:nvSpPr>
+          <p:cNvPr id="28" name="Text 26"/>
+          <p:cNvSpPr/>
+          <p:nvPr/>
+        </p:nvSpPr>
+        <p:spPr>
+          <a:xfrm>
+            <a:off x="6998818" y="2569464"/>
+            <a:ext cx="1581912" cy="201168"/>
+          </a:xfrm>
+          <a:prstGeom prst="rect">
+            <a:avLst/>
+          </a:prstGeom>
+          <a:noFill/>
+          <a:ln/>
+        </p:spPr>
+        <p:txBody>
+          <a:bodyPr wrap="square" lIns="0" tIns="0" rIns="0" bIns="0" rtlCol="0" anchor="t"/>
+          <a:lstStyle/>
+          <a:p>
+            <a:pPr algn="ctr" indent="0" marL="0">
+              <a:buNone/>
+            </a:pPr>
+            <a:r>
+              <a:rPr lang="en-US" sz="850" dirty="0">
+                <a:solidFill>
+                  <a:srgbClr val="475569"/>
+                </a:solidFill>
+                <a:latin typeface="Calibri" pitchFamily="34" charset="0"/>
+                <a:ea typeface="Calibri" pitchFamily="34" charset="-122"/>
+                <a:cs typeface="Calibri" pitchFamily="34" charset="-120"/>
+              </a:rPr>
+              <a:t>in the past</a:t>
+            </a:r>
+            <a:endParaRPr lang="en-US" sz="850" dirty="0"/>
+          </a:p>
+        </p:txBody>
+      </p:sp>
+      <p:sp>
+        <p:nvSpPr>
+          <p:cNvPr id="29" name="Shape 27"/>
           <p:cNvSpPr/>
           <p:nvPr/>
         </p:nvSpPr>
@@ -15098,7 +15887,7 @@
       </p:sp>
       <p:sp>
         <p:nvSpPr>
-          <p:cNvPr id="23" name="Text 21"/>
+          <p:cNvPr id="30" name="Text 28"/>
           <p:cNvSpPr/>
           <p:nvPr/>
         </p:nvSpPr>
@@ -15137,7 +15926,7 @@
       </p:sp>
       <p:sp>
         <p:nvSpPr>
-          <p:cNvPr id="24" name="Shape 22"/>
+          <p:cNvPr id="31" name="Shape 29"/>
           <p:cNvSpPr/>
           <p:nvPr/>
         </p:nvSpPr>
@@ -15164,7 +15953,7 @@
       </p:sp>
       <p:sp>
         <p:nvSpPr>
-          <p:cNvPr id="25" name="Shape 23"/>
+          <p:cNvPr id="32" name="Shape 30"/>
           <p:cNvSpPr/>
           <p:nvPr/>
         </p:nvSpPr>
@@ -15191,7 +15980,7 @@
       </p:sp>
       <p:sp>
         <p:nvSpPr>
-          <p:cNvPr id="26" name="Text 24"/>
+          <p:cNvPr id="33" name="Text 31"/>
           <p:cNvSpPr/>
           <p:nvPr/>
         </p:nvSpPr>
@@ -15222,7 +16011,7 @@
                 <a:ea typeface="Trebuchet MS" pitchFamily="34" charset="-122"/>
                 <a:cs typeface="Trebuchet MS" pitchFamily="34" charset="-120"/>
               </a:rPr>
-              <a:t>ex</a:t>
+              <a:t>un</a:t>
             </a:r>
             <a:endParaRPr lang="en-US" sz="1400" dirty="0"/>
           </a:p>
@@ -15230,7 +16019,7 @@
       </p:sp>
       <p:sp>
         <p:nvSpPr>
-          <p:cNvPr id="27" name="Text 25"/>
+          <p:cNvPr id="34" name="Text 32"/>
           <p:cNvSpPr/>
           <p:nvPr/>
         </p:nvSpPr>
@@ -15269,7 +16058,7 @@
       </p:sp>
       <p:sp>
         <p:nvSpPr>
-          <p:cNvPr id="28" name="Shape 26"/>
+          <p:cNvPr id="35" name="Shape 33"/>
           <p:cNvSpPr/>
           <p:nvPr/>
         </p:nvSpPr>
@@ -15296,7 +16085,7 @@
       </p:sp>
       <p:sp>
         <p:nvSpPr>
-          <p:cNvPr id="29" name="Text 27"/>
+          <p:cNvPr id="36" name="Text 34"/>
           <p:cNvSpPr/>
           <p:nvPr/>
         </p:nvSpPr>
@@ -15327,7 +16116,7 @@
                 <a:ea typeface="Trebuchet MS" pitchFamily="34" charset="-122"/>
                 <a:cs typeface="Trebuchet MS" pitchFamily="34" charset="-120"/>
               </a:rPr>
-              <a:t>plain</a:t>
+              <a:t>planned</a:t>
             </a:r>
             <a:endParaRPr lang="en-US" sz="1400" dirty="0"/>
           </a:p>
@@ -15335,7 +16124,7 @@
       </p:sp>
       <p:sp>
         <p:nvSpPr>
-          <p:cNvPr id="30" name="Shape 28"/>
+          <p:cNvPr id="37" name="Shape 35"/>
           <p:cNvSpPr/>
           <p:nvPr/>
         </p:nvSpPr>
@@ -15362,7 +16151,7 @@
       </p:sp>
       <p:sp>
         <p:nvSpPr>
-          <p:cNvPr id="31" name="Text 29"/>
+          <p:cNvPr id="38" name="Text 36"/>
           <p:cNvSpPr/>
           <p:nvPr/>
         </p:nvSpPr>
@@ -15401,7 +16190,7 @@
       </p:sp>
       <p:sp>
         <p:nvSpPr>
-          <p:cNvPr id="32" name="Shape 30"/>
+          <p:cNvPr id="39" name="Shape 37"/>
           <p:cNvSpPr/>
           <p:nvPr/>
         </p:nvSpPr>
@@ -15428,13 +16217,13 @@
       </p:sp>
       <p:sp>
         <p:nvSpPr>
-          <p:cNvPr id="33" name="Shape 31"/>
-          <p:cNvSpPr/>
-          <p:nvPr/>
-        </p:nvSpPr>
-        <p:spPr>
-          <a:xfrm>
-            <a:off x="2427732" y="4169664"/>
+          <p:cNvPr id="40" name="Shape 38"/>
+          <p:cNvSpPr/>
+          <p:nvPr/>
+        </p:nvSpPr>
+        <p:spPr>
+          <a:xfrm>
+            <a:off x="2254649" y="4169664"/>
             <a:ext cx="685800" cy="475488"/>
           </a:xfrm>
           <a:prstGeom prst="rect">
@@ -15455,13 +16244,13 @@
       </p:sp>
       <p:sp>
         <p:nvSpPr>
-          <p:cNvPr id="34" name="Text 32"/>
-          <p:cNvSpPr/>
-          <p:nvPr/>
-        </p:nvSpPr>
-        <p:spPr>
-          <a:xfrm>
-            <a:off x="2427732" y="4169664"/>
+          <p:cNvPr id="41" name="Text 39"/>
+          <p:cNvSpPr/>
+          <p:nvPr/>
+        </p:nvSpPr>
+        <p:spPr>
+          <a:xfrm>
+            <a:off x="2254649" y="4169664"/>
             <a:ext cx="685800" cy="475488"/>
           </a:xfrm>
           <a:prstGeom prst="rect">
@@ -15486,7 +16275,7 @@
                 <a:ea typeface="Trebuchet MS" pitchFamily="34" charset="-122"/>
                 <a:cs typeface="Trebuchet MS" pitchFamily="34" charset="-120"/>
               </a:rPr>
-              <a:t>e</a:t>
+              <a:t>u</a:t>
             </a:r>
             <a:endParaRPr lang="en-US" sz="900" dirty="0"/>
           </a:p>
@@ -15494,13 +16283,13 @@
       </p:sp>
       <p:sp>
         <p:nvSpPr>
-          <p:cNvPr id="35" name="Shape 33"/>
-          <p:cNvSpPr/>
-          <p:nvPr/>
-        </p:nvSpPr>
-        <p:spPr>
-          <a:xfrm>
-            <a:off x="3639312" y="4169664"/>
+          <p:cNvPr id="42" name="Shape 40"/>
+          <p:cNvSpPr/>
+          <p:nvPr/>
+        </p:nvSpPr>
+        <p:spPr>
+          <a:xfrm>
+            <a:off x="3293146" y="4169664"/>
             <a:ext cx="685800" cy="475488"/>
           </a:xfrm>
           <a:prstGeom prst="rect">
@@ -15521,13 +16310,13 @@
       </p:sp>
       <p:sp>
         <p:nvSpPr>
-          <p:cNvPr id="36" name="Text 34"/>
-          <p:cNvSpPr/>
-          <p:nvPr/>
-        </p:nvSpPr>
-        <p:spPr>
-          <a:xfrm>
-            <a:off x="3639312" y="4169664"/>
+          <p:cNvPr id="43" name="Text 41"/>
+          <p:cNvSpPr/>
+          <p:nvPr/>
+        </p:nvSpPr>
+        <p:spPr>
+          <a:xfrm>
+            <a:off x="3293146" y="4169664"/>
             <a:ext cx="685800" cy="475488"/>
           </a:xfrm>
           <a:prstGeom prst="rect">
@@ -15552,7 +16341,7 @@
                 <a:ea typeface="Trebuchet MS" pitchFamily="34" charset="-122"/>
                 <a:cs typeface="Trebuchet MS" pitchFamily="34" charset="-120"/>
               </a:rPr>
-              <a:t>x</a:t>
+              <a:t>n</a:t>
             </a:r>
             <a:endParaRPr lang="en-US" sz="900" dirty="0"/>
           </a:p>
@@ -15560,13 +16349,13 @@
       </p:sp>
       <p:sp>
         <p:nvSpPr>
-          <p:cNvPr id="37" name="Shape 35"/>
-          <p:cNvSpPr/>
-          <p:nvPr/>
-        </p:nvSpPr>
-        <p:spPr>
-          <a:xfrm>
-            <a:off x="4850892" y="4169664"/>
+          <p:cNvPr id="44" name="Shape 42"/>
+          <p:cNvSpPr/>
+          <p:nvPr/>
+        </p:nvSpPr>
+        <p:spPr>
+          <a:xfrm>
+            <a:off x="4331643" y="4169664"/>
             <a:ext cx="685800" cy="475488"/>
           </a:xfrm>
           <a:prstGeom prst="rect">
@@ -15587,13 +16376,13 @@
       </p:sp>
       <p:sp>
         <p:nvSpPr>
-          <p:cNvPr id="38" name="Text 36"/>
-          <p:cNvSpPr/>
-          <p:nvPr/>
-        </p:nvSpPr>
-        <p:spPr>
-          <a:xfrm>
-            <a:off x="4850892" y="4169664"/>
+          <p:cNvPr id="45" name="Text 43"/>
+          <p:cNvSpPr/>
+          <p:nvPr/>
+        </p:nvSpPr>
+        <p:spPr>
+          <a:xfrm>
+            <a:off x="4331643" y="4169664"/>
             <a:ext cx="685800" cy="475488"/>
           </a:xfrm>
           <a:prstGeom prst="rect">
@@ -15626,13 +16415,13 @@
       </p:sp>
       <p:sp>
         <p:nvSpPr>
-          <p:cNvPr id="39" name="Shape 37"/>
-          <p:cNvSpPr/>
-          <p:nvPr/>
-        </p:nvSpPr>
-        <p:spPr>
-          <a:xfrm>
-            <a:off x="6062472" y="4169664"/>
+          <p:cNvPr id="46" name="Shape 44"/>
+          <p:cNvSpPr/>
+          <p:nvPr/>
+        </p:nvSpPr>
+        <p:spPr>
+          <a:xfrm>
+            <a:off x="5370141" y="4169664"/>
             <a:ext cx="685800" cy="475488"/>
           </a:xfrm>
           <a:prstGeom prst="rect">
@@ -15653,13 +16442,13 @@
       </p:sp>
       <p:sp>
         <p:nvSpPr>
-          <p:cNvPr id="40" name="Text 38"/>
-          <p:cNvSpPr/>
-          <p:nvPr/>
-        </p:nvSpPr>
-        <p:spPr>
-          <a:xfrm>
-            <a:off x="6062472" y="4169664"/>
+          <p:cNvPr id="47" name="Text 45"/>
+          <p:cNvSpPr/>
+          <p:nvPr/>
+        </p:nvSpPr>
+        <p:spPr>
+          <a:xfrm>
+            <a:off x="5370141" y="4169664"/>
             <a:ext cx="685800" cy="475488"/>
           </a:xfrm>
           <a:prstGeom prst="rect">
@@ -15684,7 +16473,7 @@
                 <a:ea typeface="Trebuchet MS" pitchFamily="34" charset="-122"/>
                 <a:cs typeface="Trebuchet MS" pitchFamily="34" charset="-120"/>
               </a:rPr>
-              <a:t>ai</a:t>
+              <a:t>a</a:t>
             </a:r>
             <a:endParaRPr lang="en-US" sz="900" dirty="0"/>
           </a:p>
@@ -15692,13 +16481,13 @@
       </p:sp>
       <p:sp>
         <p:nvSpPr>
-          <p:cNvPr id="41" name="Shape 39"/>
-          <p:cNvSpPr/>
-          <p:nvPr/>
-        </p:nvSpPr>
-        <p:spPr>
-          <a:xfrm>
-            <a:off x="7274052" y="4169664"/>
+          <p:cNvPr id="48" name="Shape 46"/>
+          <p:cNvSpPr/>
+          <p:nvPr/>
+        </p:nvSpPr>
+        <p:spPr>
+          <a:xfrm>
+            <a:off x="6408638" y="4169664"/>
             <a:ext cx="685800" cy="475488"/>
           </a:xfrm>
           <a:prstGeom prst="rect">
@@ -15719,13 +16508,13 @@
       </p:sp>
       <p:sp>
         <p:nvSpPr>
-          <p:cNvPr id="42" name="Text 40"/>
-          <p:cNvSpPr/>
-          <p:nvPr/>
-        </p:nvSpPr>
-        <p:spPr>
-          <a:xfrm>
-            <a:off x="7274052" y="4169664"/>
+          <p:cNvPr id="49" name="Text 47"/>
+          <p:cNvSpPr/>
+          <p:nvPr/>
+        </p:nvSpPr>
+        <p:spPr>
+          <a:xfrm>
+            <a:off x="6408638" y="4169664"/>
             <a:ext cx="685800" cy="475488"/>
           </a:xfrm>
           <a:prstGeom prst="rect">
@@ -15750,7 +16539,73 @@
                 <a:ea typeface="Trebuchet MS" pitchFamily="34" charset="-122"/>
                 <a:cs typeface="Trebuchet MS" pitchFamily="34" charset="-120"/>
               </a:rPr>
-              <a:t>n</a:t>
+              <a:t>nn</a:t>
+            </a:r>
+            <a:endParaRPr lang="en-US" sz="900" dirty="0"/>
+          </a:p>
+        </p:txBody>
+      </p:sp>
+      <p:sp>
+        <p:nvSpPr>
+          <p:cNvPr id="50" name="Shape 48"/>
+          <p:cNvSpPr/>
+          <p:nvPr/>
+        </p:nvSpPr>
+        <p:spPr>
+          <a:xfrm>
+            <a:off x="7447135" y="4169664"/>
+            <a:ext cx="685800" cy="475488"/>
+          </a:xfrm>
+          <a:prstGeom prst="rect">
+            <a:avLst>
+              <a:gd name="adj" fmla="val 7692"/>
+            </a:avLst>
+          </a:prstGeom>
+          <a:solidFill>
+            <a:srgbClr val="FFFFFF"/>
+          </a:solidFill>
+          <a:ln w="12700">
+            <a:solidFill>
+              <a:srgbClr val="DB2777"/>
+            </a:solidFill>
+            <a:prstDash val="solid"/>
+          </a:ln>
+        </p:spPr>
+      </p:sp>
+      <p:sp>
+        <p:nvSpPr>
+          <p:cNvPr id="51" name="Text 49"/>
+          <p:cNvSpPr/>
+          <p:nvPr/>
+        </p:nvSpPr>
+        <p:spPr>
+          <a:xfrm>
+            <a:off x="7447135" y="4169664"/>
+            <a:ext cx="685800" cy="475488"/>
+          </a:xfrm>
+          <a:prstGeom prst="rect">
+            <a:avLst/>
+          </a:prstGeom>
+          <a:noFill/>
+          <a:ln/>
+        </p:spPr>
+        <p:txBody>
+          <a:bodyPr wrap="square" lIns="0" tIns="0" rIns="0" bIns="0" rtlCol="0" anchor="ctr"/>
+          <a:lstStyle/>
+          <a:p>
+            <a:pPr algn="ctr" indent="0" marL="0">
+              <a:buNone/>
+            </a:pPr>
+            <a:r>
+              <a:rPr lang="en-US" sz="900" b="1" dirty="0">
+                <a:solidFill>
+                  <a:srgbClr val="9D174D"/>
+                </a:solidFill>
+                <a:latin typeface="Trebuchet MS" pitchFamily="34" charset="0"/>
+                <a:ea typeface="Trebuchet MS" pitchFamily="34" charset="-122"/>
+                <a:cs typeface="Trebuchet MS" pitchFamily="34" charset="-120"/>
+              </a:rPr>
+              <a:t>ed</a:t>
             </a:r>
             <a:endParaRPr lang="en-US" sz="900" dirty="0"/>
           </a:p>
@@ -16324,7 +17179,7 @@
                 <a:ea typeface="Calibri" pitchFamily="34" charset="-122"/>
                 <a:cs typeface="Calibri" pitchFamily="34" charset="-120"/>
               </a:rPr>
-              <a:t>Word Labs  •  wordlabs.app  •  Root: 'plan' = arrange, design, flat surface</a:t>
+              <a:t>Word Labs  •  wordlabs.app  •  Root: 'plan' = a scheme or flat surface</a:t>
             </a:r>
             <a:endParaRPr lang="en-US" sz="800" dirty="0"/>
           </a:p>
@@ -16658,7 +17513,7 @@
                 <a:ea typeface="Trebuchet MS" pitchFamily="34" charset="-122"/>
                 <a:cs typeface="Trebuchet MS" pitchFamily="34" charset="-120"/>
               </a:rPr>
-              <a:t>1</a:t>
+              <a:t>2</a:t>
             </a:r>
             <a:pPr algn="ctr" indent="0" marL="0">
               <a:buNone/>
@@ -16672,7 +17527,7 @@
                 <a:ea typeface="Trebuchet MS" pitchFamily="34" charset="-122"/>
                 <a:cs typeface="Trebuchet MS" pitchFamily="34" charset="-120"/>
               </a:rPr>
-              <a:t>  punctuation mark</a:t>
+              <a:t>  punctuation marks</a:t>
             </a:r>
             <a:endParaRPr lang="en-US" sz="2800" dirty="0"/>
           </a:p>
@@ -16964,7 +17819,7 @@
                 <a:ea typeface="Calibri" pitchFamily="34" charset="-122"/>
                 <a:cs typeface="Calibri" pitchFamily="34" charset="-120"/>
               </a:rPr>
-              <a:t>Word Labs  •  wordlabs.app  •  Root: 'plan' = arrange, design, flat surface</a:t>
+              <a:t>Word Labs  •  wordlabs.app  •  Root: 'plan' = a scheme or flat surface</a:t>
             </a:r>
             <a:endParaRPr lang="en-US" sz="800" dirty="0"/>
           </a:p>
@@ -17076,7 +17931,7 @@
                 <a:ea typeface="Calibri" pitchFamily="34" charset="-122"/>
                 <a:cs typeface="Calibri" pitchFamily="34" charset="-120"/>
               </a:rPr>
-              <a:t>The </a:t>
+              <a:t>She was busy </a:t>
             </a:r>
             <a:pPr algn="l" indent="0" marL="0">
               <a:buNone/>
@@ -17107,7 +17962,7 @@
                 <a:ea typeface="Calibri" pitchFamily="34" charset="-122"/>
                 <a:cs typeface="Calibri" pitchFamily="34" charset="-120"/>
               </a:rPr>
-              <a:t> was going well, but she needed to </a:t>
+              <a:t> the trip, but her </a:t>
             </a:r>
             <a:pPr algn="l" indent="0" marL="0">
               <a:buNone/>
@@ -17124,7 +17979,7 @@
                 <a:ea typeface="Calibri" pitchFamily="34" charset="-122"/>
                 <a:cs typeface="Calibri" pitchFamily="34" charset="-120"/>
               </a:rPr>
-              <a:t>explain</a:t>
+              <a:t>replanned</a:t>
             </a:r>
             <a:pPr algn="l" indent="0" marL="0">
               <a:buNone/>
@@ -17138,7 +17993,7 @@
                 <a:ea typeface="Calibri" pitchFamily="34" charset="-122"/>
                 <a:cs typeface="Calibri" pitchFamily="34" charset="-120"/>
               </a:rPr>
-              <a:t> the </a:t>
+              <a:t> schedule still needed a full </a:t>
             </a:r>
             <a:pPr algn="l" indent="0" marL="0">
               <a:buNone/>
@@ -17155,7 +18010,7 @@
                 <a:ea typeface="Calibri" pitchFamily="34" charset="-122"/>
                 <a:cs typeface="Calibri" pitchFamily="34" charset="-120"/>
               </a:rPr>
-              <a:t>biplane</a:t>
+              <a:t>explanation</a:t>
             </a:r>
             <a:pPr algn="l" indent="0" marL="0">
               <a:buNone/>
@@ -17169,7 +18024,7 @@
                 <a:ea typeface="Calibri" pitchFamily="34" charset="-122"/>
                 <a:cs typeface="Calibri" pitchFamily="34" charset="-120"/>
               </a:rPr>
-              <a:t> diagram more clearly.</a:t>
+              <a:t>.</a:t>
             </a:r>
             <a:endParaRPr lang="en-US" sz="1800" dirty="0"/>
           </a:p>
@@ -17452,7 +18307,7 @@
                 <a:ea typeface="Trebuchet MS" pitchFamily="34" charset="-122"/>
                 <a:cs typeface="Trebuchet MS" pitchFamily="34" charset="-120"/>
               </a:rPr>
-              <a:t>explain</a:t>
+              <a:t>replanned</a:t>
             </a:r>
             <a:endParaRPr lang="en-US" sz="1400" dirty="0"/>
           </a:p>
@@ -17580,7 +18435,7 @@
                 <a:ea typeface="Trebuchet MS" pitchFamily="34" charset="-122"/>
                 <a:cs typeface="Trebuchet MS" pitchFamily="34" charset="-120"/>
               </a:rPr>
-              <a:t>biplane</a:t>
+              <a:t>explanation</a:t>
             </a:r>
             <a:endParaRPr lang="en-US" sz="1400" dirty="0"/>
           </a:p>
@@ -17911,7 +18766,7 @@
                 <a:ea typeface="Calibri" pitchFamily="34" charset="-122"/>
                 <a:cs typeface="Calibri" pitchFamily="34" charset="-120"/>
               </a:rPr>
-              <a:t>Word Labs  •  wordlabs.app  •  Root: 'plan' = arrange, design, flat surface</a:t>
+              <a:t>Word Labs  •  wordlabs.app  •  Root: 'plan' = a scheme or flat surface</a:t>
             </a:r>
             <a:endParaRPr lang="en-US" sz="800" dirty="0"/>
           </a:p>
@@ -18738,7 +19593,7 @@
                 <a:ea typeface="Calibri" pitchFamily="34" charset="-122"/>
                 <a:cs typeface="Calibri" pitchFamily="34" charset="-120"/>
               </a:rPr>
-              <a:t>Word Labs  •  wordlabs.app  •  Root: 'plan' = arrange, design, flat surface</a:t>
+              <a:t>Word Labs  •  wordlabs.app  •  Root: 'plan' = a scheme or flat surface</a:t>
             </a:r>
             <a:endParaRPr lang="en-US" sz="800" dirty="0"/>
           </a:p>
@@ -19055,7 +19910,7 @@
                 <a:ea typeface="Calibri" pitchFamily="34" charset="-122"/>
                 <a:cs typeface="Calibri" pitchFamily="34" charset="-120"/>
               </a:rPr>
-              <a:t>design, arrange</a:t>
+              <a:t>a scheme or design</a:t>
             </a:r>
             <a:endParaRPr lang="en-US" sz="850" dirty="0"/>
           </a:p>
@@ -19874,7 +20729,7 @@
                 <a:ea typeface="Calibri" pitchFamily="34" charset="-122"/>
                 <a:cs typeface="Calibri" pitchFamily="34" charset="-120"/>
               </a:rPr>
-              <a:t>Word Labs  •  wordlabs.app  •  Root: 'plan' = arrange, design, flat surface</a:t>
+              <a:t>Word Labs  •  wordlabs.app  •  Root: 'plan' = a scheme or flat surface</a:t>
             </a:r>
             <a:endParaRPr lang="en-US" sz="800" dirty="0"/>
           </a:p>
@@ -20191,7 +21046,7 @@
                 <a:ea typeface="Calibri" pitchFamily="34" charset="-122"/>
                 <a:cs typeface="Calibri" pitchFamily="34" charset="-120"/>
               </a:rPr>
-              <a:t>design, arrange</a:t>
+              <a:t>a scheme or design</a:t>
             </a:r>
             <a:endParaRPr lang="en-US" sz="850" dirty="0"/>
           </a:p>
@@ -21142,7 +21997,7 @@
                 <a:ea typeface="Calibri" pitchFamily="34" charset="-122"/>
                 <a:cs typeface="Calibri" pitchFamily="34" charset="-120"/>
               </a:rPr>
-              <a:t>Word Labs  •  wordlabs.app  •  Root: 'plan' = arrange, design, flat surface</a:t>
+              <a:t>Word Labs  •  wordlabs.app  •  Root: 'plan' = a scheme or flat surface</a:t>
             </a:r>
             <a:endParaRPr lang="en-US" sz="800" dirty="0"/>
           </a:p>
@@ -21459,7 +22314,7 @@
                 <a:ea typeface="Calibri" pitchFamily="34" charset="-122"/>
                 <a:cs typeface="Calibri" pitchFamily="34" charset="-120"/>
               </a:rPr>
-              <a:t>design, arrange</a:t>
+              <a:t>a scheme or design</a:t>
             </a:r>
             <a:endParaRPr lang="en-US" sz="850" dirty="0"/>
           </a:p>
@@ -22701,7 +23556,7 @@
                 <a:ea typeface="Calibri" pitchFamily="34" charset="-122"/>
                 <a:cs typeface="Calibri" pitchFamily="34" charset="-120"/>
               </a:rPr>
-              <a:t>Word Labs  •  wordlabs.app  •  Root: 'plan' = arrange, design, flat surface</a:t>
+              <a:t>Word Labs  •  wordlabs.app  •  Root: 'plan' = a scheme or flat surface</a:t>
             </a:r>
             <a:endParaRPr lang="en-US" sz="800" dirty="0"/>
           </a:p>
@@ -22840,7 +23695,7 @@
                 <a:ea typeface="Trebuchet MS" pitchFamily="34" charset="-122"/>
                 <a:cs typeface="Trebuchet MS" pitchFamily="34" charset="-120"/>
               </a:rPr>
-              <a:t>explain</a:t>
+              <a:t>replanned</a:t>
             </a:r>
             <a:endParaRPr lang="en-US" sz="2800" dirty="0"/>
           </a:p>
@@ -23528,7 +24383,7 @@
                 <a:ea typeface="Calibri" pitchFamily="34" charset="-122"/>
                 <a:cs typeface="Calibri" pitchFamily="34" charset="-120"/>
               </a:rPr>
-              <a:t>Word Labs  •  wordlabs.app  •  Root: 'plan' = arrange, design, flat surface</a:t>
+              <a:t>Word Labs  •  wordlabs.app  •  Root: 'plan' = a scheme or flat surface</a:t>
             </a:r>
             <a:endParaRPr lang="en-US" sz="800" dirty="0"/>
           </a:p>
@@ -23667,7 +24522,7 @@
                 <a:ea typeface="Trebuchet MS" pitchFamily="34" charset="-122"/>
                 <a:cs typeface="Trebuchet MS" pitchFamily="34" charset="-120"/>
               </a:rPr>
-              <a:t>explain</a:t>
+              <a:t>replanned</a:t>
             </a:r>
             <a:endParaRPr lang="en-US" sz="2800" dirty="0"/>
           </a:p>
@@ -23747,8 +24602,8 @@
         </p:nvSpPr>
         <p:spPr>
           <a:xfrm>
-            <a:off x="2938272" y="2258568"/>
-            <a:ext cx="1828800" cy="292608"/>
+            <a:off x="1989734" y="2258568"/>
+            <a:ext cx="1581912" cy="292608"/>
           </a:xfrm>
           <a:prstGeom prst="rect">
             <a:avLst>
@@ -23781,8 +24636,8 @@
         </p:nvSpPr>
         <p:spPr>
           <a:xfrm>
-            <a:off x="2938272" y="2258568"/>
-            <a:ext cx="1828800" cy="292608"/>
+            <a:off x="1989734" y="2258568"/>
+            <a:ext cx="1581912" cy="292608"/>
           </a:xfrm>
           <a:prstGeom prst="rect">
             <a:avLst/>
@@ -23806,7 +24661,7 @@
                 <a:ea typeface="Trebuchet MS" pitchFamily="34" charset="-122"/>
                 <a:cs typeface="Trebuchet MS" pitchFamily="34" charset="-120"/>
               </a:rPr>
-              <a:t>ex</a:t>
+              <a:t>re</a:t>
             </a:r>
             <a:endParaRPr lang="en-US" sz="1300" dirty="0"/>
           </a:p>
@@ -23820,8 +24675,8 @@
         </p:nvSpPr>
         <p:spPr>
           <a:xfrm>
-            <a:off x="2938272" y="2569464"/>
-            <a:ext cx="1828800" cy="201168"/>
+            <a:off x="1989734" y="2569464"/>
+            <a:ext cx="1581912" cy="201168"/>
           </a:xfrm>
           <a:prstGeom prst="rect">
             <a:avLst/>
@@ -23845,7 +24700,7 @@
                 <a:ea typeface="Calibri" pitchFamily="34" charset="-122"/>
                 <a:cs typeface="Calibri" pitchFamily="34" charset="-120"/>
               </a:rPr>
-              <a:t>out, away from</a:t>
+              <a:t>again</a:t>
             </a:r>
             <a:endParaRPr lang="en-US" sz="850" dirty="0"/>
           </a:p>
@@ -23859,8 +24714,8 @@
         </p:nvSpPr>
         <p:spPr>
           <a:xfrm>
-            <a:off x="5803392" y="2258568"/>
-            <a:ext cx="1828800" cy="292608"/>
+            <a:off x="3659429" y="2258568"/>
+            <a:ext cx="1581912" cy="292608"/>
           </a:xfrm>
           <a:prstGeom prst="rect">
             <a:avLst>
@@ -23868,11 +24723,11 @@
             </a:avLst>
           </a:prstGeom>
           <a:solidFill>
-            <a:srgbClr val="FCE7F3"/>
+            <a:srgbClr val="CCFBF1"/>
           </a:solidFill>
           <a:ln w="19050">
             <a:solidFill>
-              <a:srgbClr val="DB2777"/>
+              <a:srgbClr val="0D9488"/>
             </a:solidFill>
             <a:prstDash val="solid"/>
           </a:ln>
@@ -23893,8 +24748,8 @@
         </p:nvSpPr>
         <p:spPr>
           <a:xfrm>
-            <a:off x="5803392" y="2258568"/>
-            <a:ext cx="1828800" cy="292608"/>
+            <a:off x="3659429" y="2258568"/>
+            <a:ext cx="1581912" cy="292608"/>
           </a:xfrm>
           <a:prstGeom prst="rect">
             <a:avLst/>
@@ -23912,13 +24767,13 @@
             <a:r>
               <a:rPr lang="en-US" sz="1300" b="1" dirty="0">
                 <a:solidFill>
-                  <a:srgbClr val="9D174D"/>
+                  <a:srgbClr val="0F766E"/>
                 </a:solidFill>
                 <a:latin typeface="Trebuchet MS" pitchFamily="34" charset="0"/>
                 <a:ea typeface="Trebuchet MS" pitchFamily="34" charset="-122"/>
                 <a:cs typeface="Trebuchet MS" pitchFamily="34" charset="-120"/>
               </a:rPr>
-              <a:t>plain</a:t>
+              <a:t>plan</a:t>
             </a:r>
             <a:endParaRPr lang="en-US" sz="1300" dirty="0"/>
           </a:p>
@@ -23932,8 +24787,8 @@
         </p:nvSpPr>
         <p:spPr>
           <a:xfrm>
-            <a:off x="5803392" y="2569464"/>
-            <a:ext cx="1828800" cy="201168"/>
+            <a:off x="3659429" y="2569464"/>
+            <a:ext cx="1581912" cy="201168"/>
           </a:xfrm>
           <a:prstGeom prst="rect">
             <a:avLst/>
@@ -23957,7 +24812,7 @@
                 <a:ea typeface="Calibri" pitchFamily="34" charset="-122"/>
                 <a:cs typeface="Calibri" pitchFamily="34" charset="-120"/>
               </a:rPr>
-              <a:t>flat, clear, make clear</a:t>
+              <a:t>a scheme or design</a:t>
             </a:r>
             <a:endParaRPr lang="en-US" sz="850" dirty="0"/>
           </a:p>
@@ -23966,6 +24821,269 @@
       <p:sp>
         <p:nvSpPr>
           <p:cNvPr id="22" name="Shape 20"/>
+          <p:cNvSpPr/>
+          <p:nvPr/>
+        </p:nvSpPr>
+        <p:spPr>
+          <a:xfrm>
+            <a:off x="5329123" y="2258568"/>
+            <a:ext cx="1581912" cy="292608"/>
+          </a:xfrm>
+          <a:prstGeom prst="rect">
+            <a:avLst>
+              <a:gd name="adj" fmla="val 25000"/>
+            </a:avLst>
+          </a:prstGeom>
+          <a:solidFill>
+            <a:srgbClr val="FCE7F3"/>
+          </a:solidFill>
+          <a:ln w="19050">
+            <a:solidFill>
+              <a:srgbClr val="DB2777"/>
+            </a:solidFill>
+            <a:prstDash val="solid"/>
+          </a:ln>
+          <a:effectLst>
+            <a:outerShdw sx="100000" sy="100000" kx="0" ky="0" algn="bl" rotWithShape="0" blurRad="101600" dist="38100" dir="8100000">
+              <a:srgbClr val="000000">
+                <a:alpha val="12000"/>
+              </a:srgbClr>
+            </a:outerShdw>
+          </a:effectLst>
+        </p:spPr>
+      </p:sp>
+      <p:sp>
+        <p:nvSpPr>
+          <p:cNvPr id="23" name="Text 21"/>
+          <p:cNvSpPr/>
+          <p:nvPr/>
+        </p:nvSpPr>
+        <p:spPr>
+          <a:xfrm>
+            <a:off x="5329123" y="2258568"/>
+            <a:ext cx="1581912" cy="292608"/>
+          </a:xfrm>
+          <a:prstGeom prst="rect">
+            <a:avLst/>
+          </a:prstGeom>
+          <a:noFill/>
+          <a:ln/>
+        </p:spPr>
+        <p:txBody>
+          <a:bodyPr wrap="square" lIns="0" tIns="0" rIns="0" bIns="0" rtlCol="0" anchor="ctr"/>
+          <a:lstStyle/>
+          <a:p>
+            <a:pPr algn="ctr" indent="0" marL="0">
+              <a:buNone/>
+            </a:pPr>
+            <a:r>
+              <a:rPr lang="en-US" sz="1300" b="1" dirty="0">
+                <a:solidFill>
+                  <a:srgbClr val="9D174D"/>
+                </a:solidFill>
+                <a:latin typeface="Trebuchet MS" pitchFamily="34" charset="0"/>
+                <a:ea typeface="Trebuchet MS" pitchFamily="34" charset="-122"/>
+                <a:cs typeface="Trebuchet MS" pitchFamily="34" charset="-120"/>
+              </a:rPr>
+              <a:t>n</a:t>
+            </a:r>
+            <a:endParaRPr lang="en-US" sz="1300" dirty="0"/>
+          </a:p>
+        </p:txBody>
+      </p:sp>
+      <p:sp>
+        <p:nvSpPr>
+          <p:cNvPr id="24" name="Text 22"/>
+          <p:cNvSpPr/>
+          <p:nvPr/>
+        </p:nvSpPr>
+        <p:spPr>
+          <a:xfrm>
+            <a:off x="5329123" y="2569464"/>
+            <a:ext cx="1581912" cy="201168"/>
+          </a:xfrm>
+          <a:prstGeom prst="rect">
+            <a:avLst/>
+          </a:prstGeom>
+          <a:noFill/>
+          <a:ln/>
+        </p:spPr>
+        <p:txBody>
+          <a:bodyPr wrap="square" lIns="0" tIns="0" rIns="0" bIns="0" rtlCol="0" anchor="t"/>
+          <a:lstStyle/>
+          <a:p>
+            <a:pPr algn="ctr" indent="0" marL="0">
+              <a:buNone/>
+            </a:pPr>
+            <a:r>
+              <a:rPr lang="en-US" sz="850" dirty="0">
+                <a:solidFill>
+                  <a:srgbClr val="475569"/>
+                </a:solidFill>
+                <a:latin typeface="Calibri" pitchFamily="34" charset="0"/>
+                <a:ea typeface="Calibri" pitchFamily="34" charset="-122"/>
+                <a:cs typeface="Calibri" pitchFamily="34" charset="-120"/>
+              </a:rPr>
+              <a:t>double consonant before suffix</a:t>
+            </a:r>
+            <a:endParaRPr lang="en-US" sz="850" dirty="0"/>
+          </a:p>
+        </p:txBody>
+      </p:sp>
+      <p:sp>
+        <p:nvSpPr>
+          <p:cNvPr id="25" name="Text 23"/>
+          <p:cNvSpPr/>
+          <p:nvPr/>
+        </p:nvSpPr>
+        <p:spPr>
+          <a:xfrm>
+            <a:off x="5329123" y="2752344"/>
+            <a:ext cx="1581912" cy="182880"/>
+          </a:xfrm>
+          <a:prstGeom prst="rect">
+            <a:avLst/>
+          </a:prstGeom>
+          <a:noFill/>
+          <a:ln/>
+        </p:spPr>
+        <p:txBody>
+          <a:bodyPr wrap="square" lIns="0" tIns="0" rIns="0" bIns="0" rtlCol="0" anchor="t"/>
+          <a:lstStyle/>
+          <a:p>
+            <a:pPr algn="ctr" indent="0" marL="0">
+              <a:buNone/>
+            </a:pPr>
+            <a:r>
+              <a:rPr lang="en-US" sz="700" i="1" dirty="0">
+                <a:solidFill>
+                  <a:srgbClr val="94A3B8"/>
+                </a:solidFill>
+                <a:latin typeface="Calibri" pitchFamily="34" charset="0"/>
+                <a:ea typeface="Calibri" pitchFamily="34" charset="-122"/>
+                <a:cs typeface="Calibri" pitchFamily="34" charset="-120"/>
+              </a:rPr>
+              <a:t>final consonant doubled before vowel suffix</a:t>
+            </a:r>
+            <a:endParaRPr lang="en-US" sz="700" dirty="0"/>
+          </a:p>
+        </p:txBody>
+      </p:sp>
+      <p:sp>
+        <p:nvSpPr>
+          <p:cNvPr id="26" name="Shape 24"/>
+          <p:cNvSpPr/>
+          <p:nvPr/>
+        </p:nvSpPr>
+        <p:spPr>
+          <a:xfrm>
+            <a:off x="6998818" y="2258568"/>
+            <a:ext cx="1581912" cy="292608"/>
+          </a:xfrm>
+          <a:prstGeom prst="rect">
+            <a:avLst>
+              <a:gd name="adj" fmla="val 25000"/>
+            </a:avLst>
+          </a:prstGeom>
+          <a:solidFill>
+            <a:srgbClr val="FCE7F3"/>
+          </a:solidFill>
+          <a:ln w="19050">
+            <a:solidFill>
+              <a:srgbClr val="DB2777"/>
+            </a:solidFill>
+            <a:prstDash val="solid"/>
+          </a:ln>
+          <a:effectLst>
+            <a:outerShdw sx="100000" sy="100000" kx="0" ky="0" algn="bl" rotWithShape="0" blurRad="101600" dist="38100" dir="8100000">
+              <a:srgbClr val="000000">
+                <a:alpha val="12000"/>
+              </a:srgbClr>
+            </a:outerShdw>
+          </a:effectLst>
+        </p:spPr>
+      </p:sp>
+      <p:sp>
+        <p:nvSpPr>
+          <p:cNvPr id="27" name="Text 25"/>
+          <p:cNvSpPr/>
+          <p:nvPr/>
+        </p:nvSpPr>
+        <p:spPr>
+          <a:xfrm>
+            <a:off x="6998818" y="2258568"/>
+            <a:ext cx="1581912" cy="292608"/>
+          </a:xfrm>
+          <a:prstGeom prst="rect">
+            <a:avLst/>
+          </a:prstGeom>
+          <a:noFill/>
+          <a:ln/>
+        </p:spPr>
+        <p:txBody>
+          <a:bodyPr wrap="square" lIns="0" tIns="0" rIns="0" bIns="0" rtlCol="0" anchor="ctr"/>
+          <a:lstStyle/>
+          <a:p>
+            <a:pPr algn="ctr" indent="0" marL="0">
+              <a:buNone/>
+            </a:pPr>
+            <a:r>
+              <a:rPr lang="en-US" sz="1300" b="1" dirty="0">
+                <a:solidFill>
+                  <a:srgbClr val="9D174D"/>
+                </a:solidFill>
+                <a:latin typeface="Trebuchet MS" pitchFamily="34" charset="0"/>
+                <a:ea typeface="Trebuchet MS" pitchFamily="34" charset="-122"/>
+                <a:cs typeface="Trebuchet MS" pitchFamily="34" charset="-120"/>
+              </a:rPr>
+              <a:t>ed</a:t>
+            </a:r>
+            <a:endParaRPr lang="en-US" sz="1300" dirty="0"/>
+          </a:p>
+        </p:txBody>
+      </p:sp>
+      <p:sp>
+        <p:nvSpPr>
+          <p:cNvPr id="28" name="Text 26"/>
+          <p:cNvSpPr/>
+          <p:nvPr/>
+        </p:nvSpPr>
+        <p:spPr>
+          <a:xfrm>
+            <a:off x="6998818" y="2569464"/>
+            <a:ext cx="1581912" cy="201168"/>
+          </a:xfrm>
+          <a:prstGeom prst="rect">
+            <a:avLst/>
+          </a:prstGeom>
+          <a:noFill/>
+          <a:ln/>
+        </p:spPr>
+        <p:txBody>
+          <a:bodyPr wrap="square" lIns="0" tIns="0" rIns="0" bIns="0" rtlCol="0" anchor="t"/>
+          <a:lstStyle/>
+          <a:p>
+            <a:pPr algn="ctr" indent="0" marL="0">
+              <a:buNone/>
+            </a:pPr>
+            <a:r>
+              <a:rPr lang="en-US" sz="850" dirty="0">
+                <a:solidFill>
+                  <a:srgbClr val="475569"/>
+                </a:solidFill>
+                <a:latin typeface="Calibri" pitchFamily="34" charset="0"/>
+                <a:ea typeface="Calibri" pitchFamily="34" charset="-122"/>
+                <a:cs typeface="Calibri" pitchFamily="34" charset="-120"/>
+              </a:rPr>
+              <a:t>in the past</a:t>
+            </a:r>
+            <a:endParaRPr lang="en-US" sz="850" dirty="0"/>
+          </a:p>
+        </p:txBody>
+      </p:sp>
+      <p:sp>
+        <p:nvSpPr>
+          <p:cNvPr id="29" name="Shape 27"/>
           <p:cNvSpPr/>
           <p:nvPr/>
         </p:nvSpPr>
@@ -23992,7 +25110,7 @@
       </p:sp>
       <p:sp>
         <p:nvSpPr>
-          <p:cNvPr id="23" name="Text 21"/>
+          <p:cNvPr id="30" name="Text 28"/>
           <p:cNvSpPr/>
           <p:nvPr/>
         </p:nvSpPr>
@@ -24031,7 +25149,7 @@
       </p:sp>
       <p:sp>
         <p:nvSpPr>
-          <p:cNvPr id="24" name="Shape 22"/>
+          <p:cNvPr id="31" name="Shape 29"/>
           <p:cNvSpPr/>
           <p:nvPr/>
         </p:nvSpPr>
@@ -24058,7 +25176,7 @@
       </p:sp>
       <p:sp>
         <p:nvSpPr>
-          <p:cNvPr id="25" name="Text 23"/>
+          <p:cNvPr id="32" name="Text 30"/>
           <p:cNvSpPr/>
           <p:nvPr/>
         </p:nvSpPr>
@@ -24097,7 +25215,7 @@
       </p:sp>
       <p:sp>
         <p:nvSpPr>
-          <p:cNvPr id="26" name="Shape 24"/>
+          <p:cNvPr id="33" name="Shape 31"/>
           <p:cNvSpPr/>
           <p:nvPr/>
         </p:nvSpPr>
@@ -24124,7 +25242,7 @@
       </p:sp>
       <p:sp>
         <p:nvSpPr>
-          <p:cNvPr id="27" name="Text 25"/>
+          <p:cNvPr id="34" name="Text 32"/>
           <p:cNvSpPr/>
           <p:nvPr/>
         </p:nvSpPr>
@@ -24163,7 +25281,7 @@
       </p:sp>
       <p:sp>
         <p:nvSpPr>
-          <p:cNvPr id="28" name="Shape 26"/>
+          <p:cNvPr id="35" name="Shape 33"/>
           <p:cNvSpPr/>
           <p:nvPr/>
         </p:nvSpPr>
@@ -24190,7 +25308,7 @@
       </p:sp>
       <p:sp>
         <p:nvSpPr>
-          <p:cNvPr id="29" name="Text 27"/>
+          <p:cNvPr id="36" name="Text 34"/>
           <p:cNvSpPr/>
           <p:nvPr/>
         </p:nvSpPr>
@@ -24513,7 +25631,7 @@
                 <a:ea typeface="Calibri" pitchFamily="34" charset="-122"/>
                 <a:cs typeface="Calibri" pitchFamily="34" charset="-120"/>
               </a:rPr>
-              <a:t>Word Labs  •  wordlabs.app  •  Root: 'plan' = arrange, design, flat surface</a:t>
+              <a:t>Word Labs  •  wordlabs.app  •  Root: 'plan' = a scheme or flat surface</a:t>
             </a:r>
             <a:endParaRPr lang="en-US" sz="800" dirty="0"/>
           </a:p>
@@ -24586,7 +25704,7 @@
                 <a:ea typeface="Trebuchet MS" pitchFamily="34" charset="-122"/>
                 <a:cs typeface="Trebuchet MS" pitchFamily="34" charset="-120"/>
               </a:rPr>
-              <a:t>We are learning that the root 'plan' means 'arrange, design, flat surface'.</a:t>
+              <a:t>We are learning that the root 'plan' means 'a scheme or flat surface'.</a:t>
             </a:r>
             <a:endParaRPr lang="en-US" sz="2000" dirty="0"/>
           </a:p>
@@ -25232,7 +26350,7 @@
                 <a:ea typeface="Calibri" pitchFamily="34" charset="-122"/>
                 <a:cs typeface="Calibri" pitchFamily="34" charset="-120"/>
               </a:rPr>
-              <a:t>Word Labs  •  wordlabs.app  •  Root: 'plan' = arrange, design, flat surface</a:t>
+              <a:t>Word Labs  •  wordlabs.app  •  Root: 'plan' = a scheme or flat surface</a:t>
             </a:r>
             <a:endParaRPr lang="en-US" sz="800" dirty="0"/>
           </a:p>
@@ -25371,7 +26489,7 @@
                 <a:ea typeface="Trebuchet MS" pitchFamily="34" charset="-122"/>
                 <a:cs typeface="Trebuchet MS" pitchFamily="34" charset="-120"/>
               </a:rPr>
-              <a:t>explain</a:t>
+              <a:t>replanned</a:t>
             </a:r>
             <a:endParaRPr lang="en-US" sz="2800" dirty="0"/>
           </a:p>
@@ -25451,8 +26569,8 @@
         </p:nvSpPr>
         <p:spPr>
           <a:xfrm>
-            <a:off x="2938272" y="2258568"/>
-            <a:ext cx="1828800" cy="292608"/>
+            <a:off x="1989734" y="2258568"/>
+            <a:ext cx="1581912" cy="292608"/>
           </a:xfrm>
           <a:prstGeom prst="rect">
             <a:avLst>
@@ -25485,8 +26603,8 @@
         </p:nvSpPr>
         <p:spPr>
           <a:xfrm>
-            <a:off x="2938272" y="2258568"/>
-            <a:ext cx="1828800" cy="292608"/>
+            <a:off x="1989734" y="2258568"/>
+            <a:ext cx="1581912" cy="292608"/>
           </a:xfrm>
           <a:prstGeom prst="rect">
             <a:avLst/>
@@ -25510,7 +26628,7 @@
                 <a:ea typeface="Trebuchet MS" pitchFamily="34" charset="-122"/>
                 <a:cs typeface="Trebuchet MS" pitchFamily="34" charset="-120"/>
               </a:rPr>
-              <a:t>ex</a:t>
+              <a:t>re</a:t>
             </a:r>
             <a:endParaRPr lang="en-US" sz="1300" dirty="0"/>
           </a:p>
@@ -25524,8 +26642,8 @@
         </p:nvSpPr>
         <p:spPr>
           <a:xfrm>
-            <a:off x="2938272" y="2569464"/>
-            <a:ext cx="1828800" cy="201168"/>
+            <a:off x="1989734" y="2569464"/>
+            <a:ext cx="1581912" cy="201168"/>
           </a:xfrm>
           <a:prstGeom prst="rect">
             <a:avLst/>
@@ -25549,7 +26667,7 @@
                 <a:ea typeface="Calibri" pitchFamily="34" charset="-122"/>
                 <a:cs typeface="Calibri" pitchFamily="34" charset="-120"/>
               </a:rPr>
-              <a:t>out, away from</a:t>
+              <a:t>again</a:t>
             </a:r>
             <a:endParaRPr lang="en-US" sz="850" dirty="0"/>
           </a:p>
@@ -25563,8 +26681,8 @@
         </p:nvSpPr>
         <p:spPr>
           <a:xfrm>
-            <a:off x="5803392" y="2258568"/>
-            <a:ext cx="1828800" cy="292608"/>
+            <a:off x="3659429" y="2258568"/>
+            <a:ext cx="1581912" cy="292608"/>
           </a:xfrm>
           <a:prstGeom prst="rect">
             <a:avLst>
@@ -25572,11 +26690,11 @@
             </a:avLst>
           </a:prstGeom>
           <a:solidFill>
-            <a:srgbClr val="FCE7F3"/>
+            <a:srgbClr val="CCFBF1"/>
           </a:solidFill>
           <a:ln w="19050">
             <a:solidFill>
-              <a:srgbClr val="DB2777"/>
+              <a:srgbClr val="0D9488"/>
             </a:solidFill>
             <a:prstDash val="solid"/>
           </a:ln>
@@ -25597,8 +26715,8 @@
         </p:nvSpPr>
         <p:spPr>
           <a:xfrm>
-            <a:off x="5803392" y="2258568"/>
-            <a:ext cx="1828800" cy="292608"/>
+            <a:off x="3659429" y="2258568"/>
+            <a:ext cx="1581912" cy="292608"/>
           </a:xfrm>
           <a:prstGeom prst="rect">
             <a:avLst/>
@@ -25616,13 +26734,13 @@
             <a:r>
               <a:rPr lang="en-US" sz="1300" b="1" dirty="0">
                 <a:solidFill>
-                  <a:srgbClr val="9D174D"/>
+                  <a:srgbClr val="0F766E"/>
                 </a:solidFill>
                 <a:latin typeface="Trebuchet MS" pitchFamily="34" charset="0"/>
                 <a:ea typeface="Trebuchet MS" pitchFamily="34" charset="-122"/>
                 <a:cs typeface="Trebuchet MS" pitchFamily="34" charset="-120"/>
               </a:rPr>
-              <a:t>plain</a:t>
+              <a:t>plan</a:t>
             </a:r>
             <a:endParaRPr lang="en-US" sz="1300" dirty="0"/>
           </a:p>
@@ -25636,8 +26754,8 @@
         </p:nvSpPr>
         <p:spPr>
           <a:xfrm>
-            <a:off x="5803392" y="2569464"/>
-            <a:ext cx="1828800" cy="201168"/>
+            <a:off x="3659429" y="2569464"/>
+            <a:ext cx="1581912" cy="201168"/>
           </a:xfrm>
           <a:prstGeom prst="rect">
             <a:avLst/>
@@ -25661,7 +26779,7 @@
                 <a:ea typeface="Calibri" pitchFamily="34" charset="-122"/>
                 <a:cs typeface="Calibri" pitchFamily="34" charset="-120"/>
               </a:rPr>
-              <a:t>flat, clear, make clear</a:t>
+              <a:t>a scheme or design</a:t>
             </a:r>
             <a:endParaRPr lang="en-US" sz="850" dirty="0"/>
           </a:p>
@@ -25670,6 +26788,269 @@
       <p:sp>
         <p:nvSpPr>
           <p:cNvPr id="22" name="Shape 20"/>
+          <p:cNvSpPr/>
+          <p:nvPr/>
+        </p:nvSpPr>
+        <p:spPr>
+          <a:xfrm>
+            <a:off x="5329123" y="2258568"/>
+            <a:ext cx="1581912" cy="292608"/>
+          </a:xfrm>
+          <a:prstGeom prst="rect">
+            <a:avLst>
+              <a:gd name="adj" fmla="val 25000"/>
+            </a:avLst>
+          </a:prstGeom>
+          <a:solidFill>
+            <a:srgbClr val="FCE7F3"/>
+          </a:solidFill>
+          <a:ln w="19050">
+            <a:solidFill>
+              <a:srgbClr val="DB2777"/>
+            </a:solidFill>
+            <a:prstDash val="solid"/>
+          </a:ln>
+          <a:effectLst>
+            <a:outerShdw sx="100000" sy="100000" kx="0" ky="0" algn="bl" rotWithShape="0" blurRad="101600" dist="38100" dir="8100000">
+              <a:srgbClr val="000000">
+                <a:alpha val="12000"/>
+              </a:srgbClr>
+            </a:outerShdw>
+          </a:effectLst>
+        </p:spPr>
+      </p:sp>
+      <p:sp>
+        <p:nvSpPr>
+          <p:cNvPr id="23" name="Text 21"/>
+          <p:cNvSpPr/>
+          <p:nvPr/>
+        </p:nvSpPr>
+        <p:spPr>
+          <a:xfrm>
+            <a:off x="5329123" y="2258568"/>
+            <a:ext cx="1581912" cy="292608"/>
+          </a:xfrm>
+          <a:prstGeom prst="rect">
+            <a:avLst/>
+          </a:prstGeom>
+          <a:noFill/>
+          <a:ln/>
+        </p:spPr>
+        <p:txBody>
+          <a:bodyPr wrap="square" lIns="0" tIns="0" rIns="0" bIns="0" rtlCol="0" anchor="ctr"/>
+          <a:lstStyle/>
+          <a:p>
+            <a:pPr algn="ctr" indent="0" marL="0">
+              <a:buNone/>
+            </a:pPr>
+            <a:r>
+              <a:rPr lang="en-US" sz="1300" b="1" dirty="0">
+                <a:solidFill>
+                  <a:srgbClr val="9D174D"/>
+                </a:solidFill>
+                <a:latin typeface="Trebuchet MS" pitchFamily="34" charset="0"/>
+                <a:ea typeface="Trebuchet MS" pitchFamily="34" charset="-122"/>
+                <a:cs typeface="Trebuchet MS" pitchFamily="34" charset="-120"/>
+              </a:rPr>
+              <a:t>n</a:t>
+            </a:r>
+            <a:endParaRPr lang="en-US" sz="1300" dirty="0"/>
+          </a:p>
+        </p:txBody>
+      </p:sp>
+      <p:sp>
+        <p:nvSpPr>
+          <p:cNvPr id="24" name="Text 22"/>
+          <p:cNvSpPr/>
+          <p:nvPr/>
+        </p:nvSpPr>
+        <p:spPr>
+          <a:xfrm>
+            <a:off x="5329123" y="2569464"/>
+            <a:ext cx="1581912" cy="201168"/>
+          </a:xfrm>
+          <a:prstGeom prst="rect">
+            <a:avLst/>
+          </a:prstGeom>
+          <a:noFill/>
+          <a:ln/>
+        </p:spPr>
+        <p:txBody>
+          <a:bodyPr wrap="square" lIns="0" tIns="0" rIns="0" bIns="0" rtlCol="0" anchor="t"/>
+          <a:lstStyle/>
+          <a:p>
+            <a:pPr algn="ctr" indent="0" marL="0">
+              <a:buNone/>
+            </a:pPr>
+            <a:r>
+              <a:rPr lang="en-US" sz="850" dirty="0">
+                <a:solidFill>
+                  <a:srgbClr val="475569"/>
+                </a:solidFill>
+                <a:latin typeface="Calibri" pitchFamily="34" charset="0"/>
+                <a:ea typeface="Calibri" pitchFamily="34" charset="-122"/>
+                <a:cs typeface="Calibri" pitchFamily="34" charset="-120"/>
+              </a:rPr>
+              <a:t>double consonant before suffix</a:t>
+            </a:r>
+            <a:endParaRPr lang="en-US" sz="850" dirty="0"/>
+          </a:p>
+        </p:txBody>
+      </p:sp>
+      <p:sp>
+        <p:nvSpPr>
+          <p:cNvPr id="25" name="Text 23"/>
+          <p:cNvSpPr/>
+          <p:nvPr/>
+        </p:nvSpPr>
+        <p:spPr>
+          <a:xfrm>
+            <a:off x="5329123" y="2752344"/>
+            <a:ext cx="1581912" cy="182880"/>
+          </a:xfrm>
+          <a:prstGeom prst="rect">
+            <a:avLst/>
+          </a:prstGeom>
+          <a:noFill/>
+          <a:ln/>
+        </p:spPr>
+        <p:txBody>
+          <a:bodyPr wrap="square" lIns="0" tIns="0" rIns="0" bIns="0" rtlCol="0" anchor="t"/>
+          <a:lstStyle/>
+          <a:p>
+            <a:pPr algn="ctr" indent="0" marL="0">
+              <a:buNone/>
+            </a:pPr>
+            <a:r>
+              <a:rPr lang="en-US" sz="700" i="1" dirty="0">
+                <a:solidFill>
+                  <a:srgbClr val="94A3B8"/>
+                </a:solidFill>
+                <a:latin typeface="Calibri" pitchFamily="34" charset="0"/>
+                <a:ea typeface="Calibri" pitchFamily="34" charset="-122"/>
+                <a:cs typeface="Calibri" pitchFamily="34" charset="-120"/>
+              </a:rPr>
+              <a:t>final consonant doubled before vowel suffix</a:t>
+            </a:r>
+            <a:endParaRPr lang="en-US" sz="700" dirty="0"/>
+          </a:p>
+        </p:txBody>
+      </p:sp>
+      <p:sp>
+        <p:nvSpPr>
+          <p:cNvPr id="26" name="Shape 24"/>
+          <p:cNvSpPr/>
+          <p:nvPr/>
+        </p:nvSpPr>
+        <p:spPr>
+          <a:xfrm>
+            <a:off x="6998818" y="2258568"/>
+            <a:ext cx="1581912" cy="292608"/>
+          </a:xfrm>
+          <a:prstGeom prst="rect">
+            <a:avLst>
+              <a:gd name="adj" fmla="val 25000"/>
+            </a:avLst>
+          </a:prstGeom>
+          <a:solidFill>
+            <a:srgbClr val="FCE7F3"/>
+          </a:solidFill>
+          <a:ln w="19050">
+            <a:solidFill>
+              <a:srgbClr val="DB2777"/>
+            </a:solidFill>
+            <a:prstDash val="solid"/>
+          </a:ln>
+          <a:effectLst>
+            <a:outerShdw sx="100000" sy="100000" kx="0" ky="0" algn="bl" rotWithShape="0" blurRad="101600" dist="38100" dir="8100000">
+              <a:srgbClr val="000000">
+                <a:alpha val="12000"/>
+              </a:srgbClr>
+            </a:outerShdw>
+          </a:effectLst>
+        </p:spPr>
+      </p:sp>
+      <p:sp>
+        <p:nvSpPr>
+          <p:cNvPr id="27" name="Text 25"/>
+          <p:cNvSpPr/>
+          <p:nvPr/>
+        </p:nvSpPr>
+        <p:spPr>
+          <a:xfrm>
+            <a:off x="6998818" y="2258568"/>
+            <a:ext cx="1581912" cy="292608"/>
+          </a:xfrm>
+          <a:prstGeom prst="rect">
+            <a:avLst/>
+          </a:prstGeom>
+          <a:noFill/>
+          <a:ln/>
+        </p:spPr>
+        <p:txBody>
+          <a:bodyPr wrap="square" lIns="0" tIns="0" rIns="0" bIns="0" rtlCol="0" anchor="ctr"/>
+          <a:lstStyle/>
+          <a:p>
+            <a:pPr algn="ctr" indent="0" marL="0">
+              <a:buNone/>
+            </a:pPr>
+            <a:r>
+              <a:rPr lang="en-US" sz="1300" b="1" dirty="0">
+                <a:solidFill>
+                  <a:srgbClr val="9D174D"/>
+                </a:solidFill>
+                <a:latin typeface="Trebuchet MS" pitchFamily="34" charset="0"/>
+                <a:ea typeface="Trebuchet MS" pitchFamily="34" charset="-122"/>
+                <a:cs typeface="Trebuchet MS" pitchFamily="34" charset="-120"/>
+              </a:rPr>
+              <a:t>ed</a:t>
+            </a:r>
+            <a:endParaRPr lang="en-US" sz="1300" dirty="0"/>
+          </a:p>
+        </p:txBody>
+      </p:sp>
+      <p:sp>
+        <p:nvSpPr>
+          <p:cNvPr id="28" name="Text 26"/>
+          <p:cNvSpPr/>
+          <p:nvPr/>
+        </p:nvSpPr>
+        <p:spPr>
+          <a:xfrm>
+            <a:off x="6998818" y="2569464"/>
+            <a:ext cx="1581912" cy="201168"/>
+          </a:xfrm>
+          <a:prstGeom prst="rect">
+            <a:avLst/>
+          </a:prstGeom>
+          <a:noFill/>
+          <a:ln/>
+        </p:spPr>
+        <p:txBody>
+          <a:bodyPr wrap="square" lIns="0" tIns="0" rIns="0" bIns="0" rtlCol="0" anchor="t"/>
+          <a:lstStyle/>
+          <a:p>
+            <a:pPr algn="ctr" indent="0" marL="0">
+              <a:buNone/>
+            </a:pPr>
+            <a:r>
+              <a:rPr lang="en-US" sz="850" dirty="0">
+                <a:solidFill>
+                  <a:srgbClr val="475569"/>
+                </a:solidFill>
+                <a:latin typeface="Calibri" pitchFamily="34" charset="0"/>
+                <a:ea typeface="Calibri" pitchFamily="34" charset="-122"/>
+                <a:cs typeface="Calibri" pitchFamily="34" charset="-120"/>
+              </a:rPr>
+              <a:t>in the past</a:t>
+            </a:r>
+            <a:endParaRPr lang="en-US" sz="850" dirty="0"/>
+          </a:p>
+        </p:txBody>
+      </p:sp>
+      <p:sp>
+        <p:nvSpPr>
+          <p:cNvPr id="29" name="Shape 27"/>
           <p:cNvSpPr/>
           <p:nvPr/>
         </p:nvSpPr>
@@ -25696,7 +27077,7 @@
       </p:sp>
       <p:sp>
         <p:nvSpPr>
-          <p:cNvPr id="23" name="Text 21"/>
+          <p:cNvPr id="30" name="Text 28"/>
           <p:cNvSpPr/>
           <p:nvPr/>
         </p:nvSpPr>
@@ -25735,7 +27116,7 @@
       </p:sp>
       <p:sp>
         <p:nvSpPr>
-          <p:cNvPr id="24" name="Shape 22"/>
+          <p:cNvPr id="31" name="Shape 29"/>
           <p:cNvSpPr/>
           <p:nvPr/>
         </p:nvSpPr>
@@ -25762,7 +27143,7 @@
       </p:sp>
       <p:sp>
         <p:nvSpPr>
-          <p:cNvPr id="25" name="Shape 23"/>
+          <p:cNvPr id="32" name="Shape 30"/>
           <p:cNvSpPr/>
           <p:nvPr/>
         </p:nvSpPr>
@@ -25789,7 +27170,7 @@
       </p:sp>
       <p:sp>
         <p:nvSpPr>
-          <p:cNvPr id="26" name="Text 24"/>
+          <p:cNvPr id="33" name="Text 31"/>
           <p:cNvSpPr/>
           <p:nvPr/>
         </p:nvSpPr>
@@ -25820,7 +27201,7 @@
                 <a:ea typeface="Trebuchet MS" pitchFamily="34" charset="-122"/>
                 <a:cs typeface="Trebuchet MS" pitchFamily="34" charset="-120"/>
               </a:rPr>
-              <a:t>ex</a:t>
+              <a:t>re</a:t>
             </a:r>
             <a:endParaRPr lang="en-US" sz="1400" dirty="0"/>
           </a:p>
@@ -25828,7 +27209,7 @@
       </p:sp>
       <p:sp>
         <p:nvSpPr>
-          <p:cNvPr id="27" name="Text 25"/>
+          <p:cNvPr id="34" name="Text 32"/>
           <p:cNvSpPr/>
           <p:nvPr/>
         </p:nvSpPr>
@@ -25867,7 +27248,7 @@
       </p:sp>
       <p:sp>
         <p:nvSpPr>
-          <p:cNvPr id="28" name="Shape 26"/>
+          <p:cNvPr id="35" name="Shape 33"/>
           <p:cNvSpPr/>
           <p:nvPr/>
         </p:nvSpPr>
@@ -25894,7 +27275,7 @@
       </p:sp>
       <p:sp>
         <p:nvSpPr>
-          <p:cNvPr id="29" name="Text 27"/>
+          <p:cNvPr id="36" name="Text 34"/>
           <p:cNvSpPr/>
           <p:nvPr/>
         </p:nvSpPr>
@@ -25925,7 +27306,7 @@
                 <a:ea typeface="Trebuchet MS" pitchFamily="34" charset="-122"/>
                 <a:cs typeface="Trebuchet MS" pitchFamily="34" charset="-120"/>
               </a:rPr>
-              <a:t>plain</a:t>
+              <a:t>planned</a:t>
             </a:r>
             <a:endParaRPr lang="en-US" sz="1400" dirty="0"/>
           </a:p>
@@ -25933,7 +27314,7 @@
       </p:sp>
       <p:sp>
         <p:nvSpPr>
-          <p:cNvPr id="30" name="Shape 28"/>
+          <p:cNvPr id="37" name="Shape 35"/>
           <p:cNvSpPr/>
           <p:nvPr/>
         </p:nvSpPr>
@@ -25960,7 +27341,7 @@
       </p:sp>
       <p:sp>
         <p:nvSpPr>
-          <p:cNvPr id="31" name="Text 29"/>
+          <p:cNvPr id="38" name="Text 36"/>
           <p:cNvSpPr/>
           <p:nvPr/>
         </p:nvSpPr>
@@ -25999,7 +27380,7 @@
       </p:sp>
       <p:sp>
         <p:nvSpPr>
-          <p:cNvPr id="32" name="Shape 30"/>
+          <p:cNvPr id="39" name="Shape 37"/>
           <p:cNvSpPr/>
           <p:nvPr/>
         </p:nvSpPr>
@@ -26026,7 +27407,7 @@
       </p:sp>
       <p:sp>
         <p:nvSpPr>
-          <p:cNvPr id="33" name="Text 31"/>
+          <p:cNvPr id="40" name="Text 38"/>
           <p:cNvSpPr/>
           <p:nvPr/>
         </p:nvSpPr>
@@ -26349,7 +27730,7 @@
                 <a:ea typeface="Calibri" pitchFamily="34" charset="-122"/>
                 <a:cs typeface="Calibri" pitchFamily="34" charset="-120"/>
               </a:rPr>
-              <a:t>Word Labs  •  wordlabs.app  •  Root: 'plan' = arrange, design, flat surface</a:t>
+              <a:t>Word Labs  •  wordlabs.app  •  Root: 'plan' = a scheme or flat surface</a:t>
             </a:r>
             <a:endParaRPr lang="en-US" sz="800" dirty="0"/>
           </a:p>
@@ -26488,7 +27869,7 @@
                 <a:ea typeface="Trebuchet MS" pitchFamily="34" charset="-122"/>
                 <a:cs typeface="Trebuchet MS" pitchFamily="34" charset="-120"/>
               </a:rPr>
-              <a:t>explain</a:t>
+              <a:t>replanned</a:t>
             </a:r>
             <a:endParaRPr lang="en-US" sz="2800" dirty="0"/>
           </a:p>
@@ -26568,8 +27949,8 @@
         </p:nvSpPr>
         <p:spPr>
           <a:xfrm>
-            <a:off x="2938272" y="2258568"/>
-            <a:ext cx="1828800" cy="292608"/>
+            <a:off x="1989734" y="2258568"/>
+            <a:ext cx="1581912" cy="292608"/>
           </a:xfrm>
           <a:prstGeom prst="rect">
             <a:avLst>
@@ -26602,8 +27983,8 @@
         </p:nvSpPr>
         <p:spPr>
           <a:xfrm>
-            <a:off x="2938272" y="2258568"/>
-            <a:ext cx="1828800" cy="292608"/>
+            <a:off x="1989734" y="2258568"/>
+            <a:ext cx="1581912" cy="292608"/>
           </a:xfrm>
           <a:prstGeom prst="rect">
             <a:avLst/>
@@ -26627,7 +28008,7 @@
                 <a:ea typeface="Trebuchet MS" pitchFamily="34" charset="-122"/>
                 <a:cs typeface="Trebuchet MS" pitchFamily="34" charset="-120"/>
               </a:rPr>
-              <a:t>ex</a:t>
+              <a:t>re</a:t>
             </a:r>
             <a:endParaRPr lang="en-US" sz="1300" dirty="0"/>
           </a:p>
@@ -26641,8 +28022,8 @@
         </p:nvSpPr>
         <p:spPr>
           <a:xfrm>
-            <a:off x="2938272" y="2569464"/>
-            <a:ext cx="1828800" cy="201168"/>
+            <a:off x="1989734" y="2569464"/>
+            <a:ext cx="1581912" cy="201168"/>
           </a:xfrm>
           <a:prstGeom prst="rect">
             <a:avLst/>
@@ -26666,7 +28047,7 @@
                 <a:ea typeface="Calibri" pitchFamily="34" charset="-122"/>
                 <a:cs typeface="Calibri" pitchFamily="34" charset="-120"/>
               </a:rPr>
-              <a:t>out, away from</a:t>
+              <a:t>again</a:t>
             </a:r>
             <a:endParaRPr lang="en-US" sz="850" dirty="0"/>
           </a:p>
@@ -26680,8 +28061,8 @@
         </p:nvSpPr>
         <p:spPr>
           <a:xfrm>
-            <a:off x="5803392" y="2258568"/>
-            <a:ext cx="1828800" cy="292608"/>
+            <a:off x="3659429" y="2258568"/>
+            <a:ext cx="1581912" cy="292608"/>
           </a:xfrm>
           <a:prstGeom prst="rect">
             <a:avLst>
@@ -26689,11 +28070,11 @@
             </a:avLst>
           </a:prstGeom>
           <a:solidFill>
-            <a:srgbClr val="FCE7F3"/>
+            <a:srgbClr val="CCFBF1"/>
           </a:solidFill>
           <a:ln w="19050">
             <a:solidFill>
-              <a:srgbClr val="DB2777"/>
+              <a:srgbClr val="0D9488"/>
             </a:solidFill>
             <a:prstDash val="solid"/>
           </a:ln>
@@ -26714,8 +28095,8 @@
         </p:nvSpPr>
         <p:spPr>
           <a:xfrm>
-            <a:off x="5803392" y="2258568"/>
-            <a:ext cx="1828800" cy="292608"/>
+            <a:off x="3659429" y="2258568"/>
+            <a:ext cx="1581912" cy="292608"/>
           </a:xfrm>
           <a:prstGeom prst="rect">
             <a:avLst/>
@@ -26733,13 +28114,13 @@
             <a:r>
               <a:rPr lang="en-US" sz="1300" b="1" dirty="0">
                 <a:solidFill>
-                  <a:srgbClr val="9D174D"/>
+                  <a:srgbClr val="0F766E"/>
                 </a:solidFill>
                 <a:latin typeface="Trebuchet MS" pitchFamily="34" charset="0"/>
                 <a:ea typeface="Trebuchet MS" pitchFamily="34" charset="-122"/>
                 <a:cs typeface="Trebuchet MS" pitchFamily="34" charset="-120"/>
               </a:rPr>
-              <a:t>plain</a:t>
+              <a:t>plan</a:t>
             </a:r>
             <a:endParaRPr lang="en-US" sz="1300" dirty="0"/>
           </a:p>
@@ -26753,8 +28134,8 @@
         </p:nvSpPr>
         <p:spPr>
           <a:xfrm>
-            <a:off x="5803392" y="2569464"/>
-            <a:ext cx="1828800" cy="201168"/>
+            <a:off x="3659429" y="2569464"/>
+            <a:ext cx="1581912" cy="201168"/>
           </a:xfrm>
           <a:prstGeom prst="rect">
             <a:avLst/>
@@ -26778,7 +28159,7 @@
                 <a:ea typeface="Calibri" pitchFamily="34" charset="-122"/>
                 <a:cs typeface="Calibri" pitchFamily="34" charset="-120"/>
               </a:rPr>
-              <a:t>flat, clear, make clear</a:t>
+              <a:t>a scheme or design</a:t>
             </a:r>
             <a:endParaRPr lang="en-US" sz="850" dirty="0"/>
           </a:p>
@@ -26787,6 +28168,269 @@
       <p:sp>
         <p:nvSpPr>
           <p:cNvPr id="22" name="Shape 20"/>
+          <p:cNvSpPr/>
+          <p:nvPr/>
+        </p:nvSpPr>
+        <p:spPr>
+          <a:xfrm>
+            <a:off x="5329123" y="2258568"/>
+            <a:ext cx="1581912" cy="292608"/>
+          </a:xfrm>
+          <a:prstGeom prst="rect">
+            <a:avLst>
+              <a:gd name="adj" fmla="val 25000"/>
+            </a:avLst>
+          </a:prstGeom>
+          <a:solidFill>
+            <a:srgbClr val="FCE7F3"/>
+          </a:solidFill>
+          <a:ln w="19050">
+            <a:solidFill>
+              <a:srgbClr val="DB2777"/>
+            </a:solidFill>
+            <a:prstDash val="solid"/>
+          </a:ln>
+          <a:effectLst>
+            <a:outerShdw sx="100000" sy="100000" kx="0" ky="0" algn="bl" rotWithShape="0" blurRad="101600" dist="38100" dir="8100000">
+              <a:srgbClr val="000000">
+                <a:alpha val="12000"/>
+              </a:srgbClr>
+            </a:outerShdw>
+          </a:effectLst>
+        </p:spPr>
+      </p:sp>
+      <p:sp>
+        <p:nvSpPr>
+          <p:cNvPr id="23" name="Text 21"/>
+          <p:cNvSpPr/>
+          <p:nvPr/>
+        </p:nvSpPr>
+        <p:spPr>
+          <a:xfrm>
+            <a:off x="5329123" y="2258568"/>
+            <a:ext cx="1581912" cy="292608"/>
+          </a:xfrm>
+          <a:prstGeom prst="rect">
+            <a:avLst/>
+          </a:prstGeom>
+          <a:noFill/>
+          <a:ln/>
+        </p:spPr>
+        <p:txBody>
+          <a:bodyPr wrap="square" lIns="0" tIns="0" rIns="0" bIns="0" rtlCol="0" anchor="ctr"/>
+          <a:lstStyle/>
+          <a:p>
+            <a:pPr algn="ctr" indent="0" marL="0">
+              <a:buNone/>
+            </a:pPr>
+            <a:r>
+              <a:rPr lang="en-US" sz="1300" b="1" dirty="0">
+                <a:solidFill>
+                  <a:srgbClr val="9D174D"/>
+                </a:solidFill>
+                <a:latin typeface="Trebuchet MS" pitchFamily="34" charset="0"/>
+                <a:ea typeface="Trebuchet MS" pitchFamily="34" charset="-122"/>
+                <a:cs typeface="Trebuchet MS" pitchFamily="34" charset="-120"/>
+              </a:rPr>
+              <a:t>n</a:t>
+            </a:r>
+            <a:endParaRPr lang="en-US" sz="1300" dirty="0"/>
+          </a:p>
+        </p:txBody>
+      </p:sp>
+      <p:sp>
+        <p:nvSpPr>
+          <p:cNvPr id="24" name="Text 22"/>
+          <p:cNvSpPr/>
+          <p:nvPr/>
+        </p:nvSpPr>
+        <p:spPr>
+          <a:xfrm>
+            <a:off x="5329123" y="2569464"/>
+            <a:ext cx="1581912" cy="201168"/>
+          </a:xfrm>
+          <a:prstGeom prst="rect">
+            <a:avLst/>
+          </a:prstGeom>
+          <a:noFill/>
+          <a:ln/>
+        </p:spPr>
+        <p:txBody>
+          <a:bodyPr wrap="square" lIns="0" tIns="0" rIns="0" bIns="0" rtlCol="0" anchor="t"/>
+          <a:lstStyle/>
+          <a:p>
+            <a:pPr algn="ctr" indent="0" marL="0">
+              <a:buNone/>
+            </a:pPr>
+            <a:r>
+              <a:rPr lang="en-US" sz="850" dirty="0">
+                <a:solidFill>
+                  <a:srgbClr val="475569"/>
+                </a:solidFill>
+                <a:latin typeface="Calibri" pitchFamily="34" charset="0"/>
+                <a:ea typeface="Calibri" pitchFamily="34" charset="-122"/>
+                <a:cs typeface="Calibri" pitchFamily="34" charset="-120"/>
+              </a:rPr>
+              <a:t>double consonant before suffix</a:t>
+            </a:r>
+            <a:endParaRPr lang="en-US" sz="850" dirty="0"/>
+          </a:p>
+        </p:txBody>
+      </p:sp>
+      <p:sp>
+        <p:nvSpPr>
+          <p:cNvPr id="25" name="Text 23"/>
+          <p:cNvSpPr/>
+          <p:nvPr/>
+        </p:nvSpPr>
+        <p:spPr>
+          <a:xfrm>
+            <a:off x="5329123" y="2752344"/>
+            <a:ext cx="1581912" cy="182880"/>
+          </a:xfrm>
+          <a:prstGeom prst="rect">
+            <a:avLst/>
+          </a:prstGeom>
+          <a:noFill/>
+          <a:ln/>
+        </p:spPr>
+        <p:txBody>
+          <a:bodyPr wrap="square" lIns="0" tIns="0" rIns="0" bIns="0" rtlCol="0" anchor="t"/>
+          <a:lstStyle/>
+          <a:p>
+            <a:pPr algn="ctr" indent="0" marL="0">
+              <a:buNone/>
+            </a:pPr>
+            <a:r>
+              <a:rPr lang="en-US" sz="700" i="1" dirty="0">
+                <a:solidFill>
+                  <a:srgbClr val="94A3B8"/>
+                </a:solidFill>
+                <a:latin typeface="Calibri" pitchFamily="34" charset="0"/>
+                <a:ea typeface="Calibri" pitchFamily="34" charset="-122"/>
+                <a:cs typeface="Calibri" pitchFamily="34" charset="-120"/>
+              </a:rPr>
+              <a:t>final consonant doubled before vowel suffix</a:t>
+            </a:r>
+            <a:endParaRPr lang="en-US" sz="700" dirty="0"/>
+          </a:p>
+        </p:txBody>
+      </p:sp>
+      <p:sp>
+        <p:nvSpPr>
+          <p:cNvPr id="26" name="Shape 24"/>
+          <p:cNvSpPr/>
+          <p:nvPr/>
+        </p:nvSpPr>
+        <p:spPr>
+          <a:xfrm>
+            <a:off x="6998818" y="2258568"/>
+            <a:ext cx="1581912" cy="292608"/>
+          </a:xfrm>
+          <a:prstGeom prst="rect">
+            <a:avLst>
+              <a:gd name="adj" fmla="val 25000"/>
+            </a:avLst>
+          </a:prstGeom>
+          <a:solidFill>
+            <a:srgbClr val="FCE7F3"/>
+          </a:solidFill>
+          <a:ln w="19050">
+            <a:solidFill>
+              <a:srgbClr val="DB2777"/>
+            </a:solidFill>
+            <a:prstDash val="solid"/>
+          </a:ln>
+          <a:effectLst>
+            <a:outerShdw sx="100000" sy="100000" kx="0" ky="0" algn="bl" rotWithShape="0" blurRad="101600" dist="38100" dir="8100000">
+              <a:srgbClr val="000000">
+                <a:alpha val="12000"/>
+              </a:srgbClr>
+            </a:outerShdw>
+          </a:effectLst>
+        </p:spPr>
+      </p:sp>
+      <p:sp>
+        <p:nvSpPr>
+          <p:cNvPr id="27" name="Text 25"/>
+          <p:cNvSpPr/>
+          <p:nvPr/>
+        </p:nvSpPr>
+        <p:spPr>
+          <a:xfrm>
+            <a:off x="6998818" y="2258568"/>
+            <a:ext cx="1581912" cy="292608"/>
+          </a:xfrm>
+          <a:prstGeom prst="rect">
+            <a:avLst/>
+          </a:prstGeom>
+          <a:noFill/>
+          <a:ln/>
+        </p:spPr>
+        <p:txBody>
+          <a:bodyPr wrap="square" lIns="0" tIns="0" rIns="0" bIns="0" rtlCol="0" anchor="ctr"/>
+          <a:lstStyle/>
+          <a:p>
+            <a:pPr algn="ctr" indent="0" marL="0">
+              <a:buNone/>
+            </a:pPr>
+            <a:r>
+              <a:rPr lang="en-US" sz="1300" b="1" dirty="0">
+                <a:solidFill>
+                  <a:srgbClr val="9D174D"/>
+                </a:solidFill>
+                <a:latin typeface="Trebuchet MS" pitchFamily="34" charset="0"/>
+                <a:ea typeface="Trebuchet MS" pitchFamily="34" charset="-122"/>
+                <a:cs typeface="Trebuchet MS" pitchFamily="34" charset="-120"/>
+              </a:rPr>
+              <a:t>ed</a:t>
+            </a:r>
+            <a:endParaRPr lang="en-US" sz="1300" dirty="0"/>
+          </a:p>
+        </p:txBody>
+      </p:sp>
+      <p:sp>
+        <p:nvSpPr>
+          <p:cNvPr id="28" name="Text 26"/>
+          <p:cNvSpPr/>
+          <p:nvPr/>
+        </p:nvSpPr>
+        <p:spPr>
+          <a:xfrm>
+            <a:off x="6998818" y="2569464"/>
+            <a:ext cx="1581912" cy="201168"/>
+          </a:xfrm>
+          <a:prstGeom prst="rect">
+            <a:avLst/>
+          </a:prstGeom>
+          <a:noFill/>
+          <a:ln/>
+        </p:spPr>
+        <p:txBody>
+          <a:bodyPr wrap="square" lIns="0" tIns="0" rIns="0" bIns="0" rtlCol="0" anchor="t"/>
+          <a:lstStyle/>
+          <a:p>
+            <a:pPr algn="ctr" indent="0" marL="0">
+              <a:buNone/>
+            </a:pPr>
+            <a:r>
+              <a:rPr lang="en-US" sz="850" dirty="0">
+                <a:solidFill>
+                  <a:srgbClr val="475569"/>
+                </a:solidFill>
+                <a:latin typeface="Calibri" pitchFamily="34" charset="0"/>
+                <a:ea typeface="Calibri" pitchFamily="34" charset="-122"/>
+                <a:cs typeface="Calibri" pitchFamily="34" charset="-120"/>
+              </a:rPr>
+              <a:t>in the past</a:t>
+            </a:r>
+            <a:endParaRPr lang="en-US" sz="850" dirty="0"/>
+          </a:p>
+        </p:txBody>
+      </p:sp>
+      <p:sp>
+        <p:nvSpPr>
+          <p:cNvPr id="29" name="Shape 27"/>
           <p:cNvSpPr/>
           <p:nvPr/>
         </p:nvSpPr>
@@ -26813,7 +28457,7 @@
       </p:sp>
       <p:sp>
         <p:nvSpPr>
-          <p:cNvPr id="23" name="Text 21"/>
+          <p:cNvPr id="30" name="Text 28"/>
           <p:cNvSpPr/>
           <p:nvPr/>
         </p:nvSpPr>
@@ -26852,7 +28496,7 @@
       </p:sp>
       <p:sp>
         <p:nvSpPr>
-          <p:cNvPr id="24" name="Shape 22"/>
+          <p:cNvPr id="31" name="Shape 29"/>
           <p:cNvSpPr/>
           <p:nvPr/>
         </p:nvSpPr>
@@ -26879,7 +28523,7 @@
       </p:sp>
       <p:sp>
         <p:nvSpPr>
-          <p:cNvPr id="25" name="Shape 23"/>
+          <p:cNvPr id="32" name="Shape 30"/>
           <p:cNvSpPr/>
           <p:nvPr/>
         </p:nvSpPr>
@@ -26906,7 +28550,7 @@
       </p:sp>
       <p:sp>
         <p:nvSpPr>
-          <p:cNvPr id="26" name="Text 24"/>
+          <p:cNvPr id="33" name="Text 31"/>
           <p:cNvSpPr/>
           <p:nvPr/>
         </p:nvSpPr>
@@ -26937,7 +28581,7 @@
                 <a:ea typeface="Trebuchet MS" pitchFamily="34" charset="-122"/>
                 <a:cs typeface="Trebuchet MS" pitchFamily="34" charset="-120"/>
               </a:rPr>
-              <a:t>ex</a:t>
+              <a:t>re</a:t>
             </a:r>
             <a:endParaRPr lang="en-US" sz="1400" dirty="0"/>
           </a:p>
@@ -26945,7 +28589,7 @@
       </p:sp>
       <p:sp>
         <p:nvSpPr>
-          <p:cNvPr id="27" name="Text 25"/>
+          <p:cNvPr id="34" name="Text 32"/>
           <p:cNvSpPr/>
           <p:nvPr/>
         </p:nvSpPr>
@@ -26984,7 +28628,7 @@
       </p:sp>
       <p:sp>
         <p:nvSpPr>
-          <p:cNvPr id="28" name="Shape 26"/>
+          <p:cNvPr id="35" name="Shape 33"/>
           <p:cNvSpPr/>
           <p:nvPr/>
         </p:nvSpPr>
@@ -27011,7 +28655,7 @@
       </p:sp>
       <p:sp>
         <p:nvSpPr>
-          <p:cNvPr id="29" name="Text 27"/>
+          <p:cNvPr id="36" name="Text 34"/>
           <p:cNvSpPr/>
           <p:nvPr/>
         </p:nvSpPr>
@@ -27042,7 +28686,7 @@
                 <a:ea typeface="Trebuchet MS" pitchFamily="34" charset="-122"/>
                 <a:cs typeface="Trebuchet MS" pitchFamily="34" charset="-120"/>
               </a:rPr>
-              <a:t>plain</a:t>
+              <a:t>planned</a:t>
             </a:r>
             <a:endParaRPr lang="en-US" sz="1400" dirty="0"/>
           </a:p>
@@ -27050,7 +28694,7 @@
       </p:sp>
       <p:sp>
         <p:nvSpPr>
-          <p:cNvPr id="30" name="Shape 28"/>
+          <p:cNvPr id="37" name="Shape 35"/>
           <p:cNvSpPr/>
           <p:nvPr/>
         </p:nvSpPr>
@@ -27077,7 +28721,7 @@
       </p:sp>
       <p:sp>
         <p:nvSpPr>
-          <p:cNvPr id="31" name="Text 29"/>
+          <p:cNvPr id="38" name="Text 36"/>
           <p:cNvSpPr/>
           <p:nvPr/>
         </p:nvSpPr>
@@ -27116,7 +28760,7 @@
       </p:sp>
       <p:sp>
         <p:nvSpPr>
-          <p:cNvPr id="32" name="Shape 30"/>
+          <p:cNvPr id="39" name="Shape 37"/>
           <p:cNvSpPr/>
           <p:nvPr/>
         </p:nvSpPr>
@@ -27143,13 +28787,13 @@
       </p:sp>
       <p:sp>
         <p:nvSpPr>
-          <p:cNvPr id="33" name="Shape 31"/>
-          <p:cNvSpPr/>
-          <p:nvPr/>
-        </p:nvSpPr>
-        <p:spPr>
-          <a:xfrm>
-            <a:off x="2427732" y="4169664"/>
+          <p:cNvPr id="40" name="Shape 38"/>
+          <p:cNvSpPr/>
+          <p:nvPr/>
+        </p:nvSpPr>
+        <p:spPr>
+          <a:xfrm>
+            <a:off x="2254649" y="4169664"/>
             <a:ext cx="685800" cy="475488"/>
           </a:xfrm>
           <a:prstGeom prst="rect">
@@ -27170,13 +28814,13 @@
       </p:sp>
       <p:sp>
         <p:nvSpPr>
-          <p:cNvPr id="34" name="Text 32"/>
-          <p:cNvSpPr/>
-          <p:nvPr/>
-        </p:nvSpPr>
-        <p:spPr>
-          <a:xfrm>
-            <a:off x="2427732" y="4169664"/>
+          <p:cNvPr id="41" name="Text 39"/>
+          <p:cNvSpPr/>
+          <p:nvPr/>
+        </p:nvSpPr>
+        <p:spPr>
+          <a:xfrm>
+            <a:off x="2254649" y="4169664"/>
             <a:ext cx="685800" cy="475488"/>
           </a:xfrm>
           <a:prstGeom prst="rect">
@@ -27201,7 +28845,7 @@
                 <a:ea typeface="Trebuchet MS" pitchFamily="34" charset="-122"/>
                 <a:cs typeface="Trebuchet MS" pitchFamily="34" charset="-120"/>
               </a:rPr>
-              <a:t>e</a:t>
+              <a:t>r</a:t>
             </a:r>
             <a:endParaRPr lang="en-US" sz="900" dirty="0"/>
           </a:p>
@@ -27209,13 +28853,13 @@
       </p:sp>
       <p:sp>
         <p:nvSpPr>
-          <p:cNvPr id="35" name="Shape 33"/>
-          <p:cNvSpPr/>
-          <p:nvPr/>
-        </p:nvSpPr>
-        <p:spPr>
-          <a:xfrm>
-            <a:off x="3639312" y="4169664"/>
+          <p:cNvPr id="42" name="Shape 40"/>
+          <p:cNvSpPr/>
+          <p:nvPr/>
+        </p:nvSpPr>
+        <p:spPr>
+          <a:xfrm>
+            <a:off x="3293146" y="4169664"/>
             <a:ext cx="685800" cy="475488"/>
           </a:xfrm>
           <a:prstGeom prst="rect">
@@ -27236,13 +28880,13 @@
       </p:sp>
       <p:sp>
         <p:nvSpPr>
-          <p:cNvPr id="36" name="Text 34"/>
-          <p:cNvSpPr/>
-          <p:nvPr/>
-        </p:nvSpPr>
-        <p:spPr>
-          <a:xfrm>
-            <a:off x="3639312" y="4169664"/>
+          <p:cNvPr id="43" name="Text 41"/>
+          <p:cNvSpPr/>
+          <p:nvPr/>
+        </p:nvSpPr>
+        <p:spPr>
+          <a:xfrm>
+            <a:off x="3293146" y="4169664"/>
             <a:ext cx="685800" cy="475488"/>
           </a:xfrm>
           <a:prstGeom prst="rect">
@@ -27267,7 +28911,7 @@
                 <a:ea typeface="Trebuchet MS" pitchFamily="34" charset="-122"/>
                 <a:cs typeface="Trebuchet MS" pitchFamily="34" charset="-120"/>
               </a:rPr>
-              <a:t>x</a:t>
+              <a:t>e</a:t>
             </a:r>
             <a:endParaRPr lang="en-US" sz="900" dirty="0"/>
           </a:p>
@@ -27275,13 +28919,13 @@
       </p:sp>
       <p:sp>
         <p:nvSpPr>
-          <p:cNvPr id="37" name="Shape 35"/>
-          <p:cNvSpPr/>
-          <p:nvPr/>
-        </p:nvSpPr>
-        <p:spPr>
-          <a:xfrm>
-            <a:off x="4850892" y="4169664"/>
+          <p:cNvPr id="44" name="Shape 42"/>
+          <p:cNvSpPr/>
+          <p:nvPr/>
+        </p:nvSpPr>
+        <p:spPr>
+          <a:xfrm>
+            <a:off x="4331643" y="4169664"/>
             <a:ext cx="685800" cy="475488"/>
           </a:xfrm>
           <a:prstGeom prst="rect">
@@ -27302,13 +28946,13 @@
       </p:sp>
       <p:sp>
         <p:nvSpPr>
-          <p:cNvPr id="38" name="Text 36"/>
-          <p:cNvSpPr/>
-          <p:nvPr/>
-        </p:nvSpPr>
-        <p:spPr>
-          <a:xfrm>
-            <a:off x="4850892" y="4169664"/>
+          <p:cNvPr id="45" name="Text 43"/>
+          <p:cNvSpPr/>
+          <p:nvPr/>
+        </p:nvSpPr>
+        <p:spPr>
+          <a:xfrm>
+            <a:off x="4331643" y="4169664"/>
             <a:ext cx="685800" cy="475488"/>
           </a:xfrm>
           <a:prstGeom prst="rect">
@@ -27341,13 +28985,13 @@
       </p:sp>
       <p:sp>
         <p:nvSpPr>
-          <p:cNvPr id="39" name="Shape 37"/>
-          <p:cNvSpPr/>
-          <p:nvPr/>
-        </p:nvSpPr>
-        <p:spPr>
-          <a:xfrm>
-            <a:off x="6062472" y="4169664"/>
+          <p:cNvPr id="46" name="Shape 44"/>
+          <p:cNvSpPr/>
+          <p:nvPr/>
+        </p:nvSpPr>
+        <p:spPr>
+          <a:xfrm>
+            <a:off x="5370141" y="4169664"/>
             <a:ext cx="685800" cy="475488"/>
           </a:xfrm>
           <a:prstGeom prst="rect">
@@ -27368,13 +29012,13 @@
       </p:sp>
       <p:sp>
         <p:nvSpPr>
-          <p:cNvPr id="40" name="Text 38"/>
-          <p:cNvSpPr/>
-          <p:nvPr/>
-        </p:nvSpPr>
-        <p:spPr>
-          <a:xfrm>
-            <a:off x="6062472" y="4169664"/>
+          <p:cNvPr id="47" name="Text 45"/>
+          <p:cNvSpPr/>
+          <p:nvPr/>
+        </p:nvSpPr>
+        <p:spPr>
+          <a:xfrm>
+            <a:off x="5370141" y="4169664"/>
             <a:ext cx="685800" cy="475488"/>
           </a:xfrm>
           <a:prstGeom prst="rect">
@@ -27399,7 +29043,7 @@
                 <a:ea typeface="Trebuchet MS" pitchFamily="34" charset="-122"/>
                 <a:cs typeface="Trebuchet MS" pitchFamily="34" charset="-120"/>
               </a:rPr>
-              <a:t>ai</a:t>
+              <a:t>a</a:t>
             </a:r>
             <a:endParaRPr lang="en-US" sz="900" dirty="0"/>
           </a:p>
@@ -27407,13 +29051,13 @@
       </p:sp>
       <p:sp>
         <p:nvSpPr>
-          <p:cNvPr id="41" name="Shape 39"/>
-          <p:cNvSpPr/>
-          <p:nvPr/>
-        </p:nvSpPr>
-        <p:spPr>
-          <a:xfrm>
-            <a:off x="7274052" y="4169664"/>
+          <p:cNvPr id="48" name="Shape 46"/>
+          <p:cNvSpPr/>
+          <p:nvPr/>
+        </p:nvSpPr>
+        <p:spPr>
+          <a:xfrm>
+            <a:off x="6408638" y="4169664"/>
             <a:ext cx="685800" cy="475488"/>
           </a:xfrm>
           <a:prstGeom prst="rect">
@@ -27434,13 +29078,13 @@
       </p:sp>
       <p:sp>
         <p:nvSpPr>
-          <p:cNvPr id="42" name="Text 40"/>
-          <p:cNvSpPr/>
-          <p:nvPr/>
-        </p:nvSpPr>
-        <p:spPr>
-          <a:xfrm>
-            <a:off x="7274052" y="4169664"/>
+          <p:cNvPr id="49" name="Text 47"/>
+          <p:cNvSpPr/>
+          <p:nvPr/>
+        </p:nvSpPr>
+        <p:spPr>
+          <a:xfrm>
+            <a:off x="6408638" y="4169664"/>
             <a:ext cx="685800" cy="475488"/>
           </a:xfrm>
           <a:prstGeom prst="rect">
@@ -27465,7 +29109,73 @@
                 <a:ea typeface="Trebuchet MS" pitchFamily="34" charset="-122"/>
                 <a:cs typeface="Trebuchet MS" pitchFamily="34" charset="-120"/>
               </a:rPr>
-              <a:t>n</a:t>
+              <a:t>nn</a:t>
+            </a:r>
+            <a:endParaRPr lang="en-US" sz="900" dirty="0"/>
+          </a:p>
+        </p:txBody>
+      </p:sp>
+      <p:sp>
+        <p:nvSpPr>
+          <p:cNvPr id="50" name="Shape 48"/>
+          <p:cNvSpPr/>
+          <p:nvPr/>
+        </p:nvSpPr>
+        <p:spPr>
+          <a:xfrm>
+            <a:off x="7447135" y="4169664"/>
+            <a:ext cx="685800" cy="475488"/>
+          </a:xfrm>
+          <a:prstGeom prst="rect">
+            <a:avLst>
+              <a:gd name="adj" fmla="val 7692"/>
+            </a:avLst>
+          </a:prstGeom>
+          <a:solidFill>
+            <a:srgbClr val="FFFFFF"/>
+          </a:solidFill>
+          <a:ln w="12700">
+            <a:solidFill>
+              <a:srgbClr val="DB2777"/>
+            </a:solidFill>
+            <a:prstDash val="solid"/>
+          </a:ln>
+        </p:spPr>
+      </p:sp>
+      <p:sp>
+        <p:nvSpPr>
+          <p:cNvPr id="51" name="Text 49"/>
+          <p:cNvSpPr/>
+          <p:nvPr/>
+        </p:nvSpPr>
+        <p:spPr>
+          <a:xfrm>
+            <a:off x="7447135" y="4169664"/>
+            <a:ext cx="685800" cy="475488"/>
+          </a:xfrm>
+          <a:prstGeom prst="rect">
+            <a:avLst/>
+          </a:prstGeom>
+          <a:noFill/>
+          <a:ln/>
+        </p:spPr>
+        <p:txBody>
+          <a:bodyPr wrap="square" lIns="0" tIns="0" rIns="0" bIns="0" rtlCol="0" anchor="ctr"/>
+          <a:lstStyle/>
+          <a:p>
+            <a:pPr algn="ctr" indent="0" marL="0">
+              <a:buNone/>
+            </a:pPr>
+            <a:r>
+              <a:rPr lang="en-US" sz="900" b="1" dirty="0">
+                <a:solidFill>
+                  <a:srgbClr val="9D174D"/>
+                </a:solidFill>
+                <a:latin typeface="Trebuchet MS" pitchFamily="34" charset="0"/>
+                <a:ea typeface="Trebuchet MS" pitchFamily="34" charset="-122"/>
+                <a:cs typeface="Trebuchet MS" pitchFamily="34" charset="-120"/>
+              </a:rPr>
+              <a:t>ed</a:t>
             </a:r>
             <a:endParaRPr lang="en-US" sz="900" dirty="0"/>
           </a:p>
@@ -27757,7 +29467,7 @@
                 <a:ea typeface="Calibri" pitchFamily="34" charset="-122"/>
                 <a:cs typeface="Calibri" pitchFamily="34" charset="-120"/>
               </a:rPr>
-              <a:t>Word Labs  •  wordlabs.app  •  Root: 'plan' = arrange, design, flat surface</a:t>
+              <a:t>Word Labs  •  wordlabs.app  •  Root: 'plan' = a scheme or flat surface</a:t>
             </a:r>
             <a:endParaRPr lang="en-US" sz="800" dirty="0"/>
           </a:p>
@@ -27896,7 +29606,7 @@
                 <a:ea typeface="Trebuchet MS" pitchFamily="34" charset="-122"/>
                 <a:cs typeface="Trebuchet MS" pitchFamily="34" charset="-120"/>
               </a:rPr>
-              <a:t>biplane</a:t>
+              <a:t>explanation</a:t>
             </a:r>
             <a:endParaRPr lang="en-US" sz="2800" dirty="0"/>
           </a:p>
@@ -28584,7 +30294,7 @@
                 <a:ea typeface="Calibri" pitchFamily="34" charset="-122"/>
                 <a:cs typeface="Calibri" pitchFamily="34" charset="-120"/>
               </a:rPr>
-              <a:t>Word Labs  •  wordlabs.app  •  Root: 'plan' = arrange, design, flat surface</a:t>
+              <a:t>Word Labs  •  wordlabs.app  •  Root: 'plan' = a scheme or flat surface</a:t>
             </a:r>
             <a:endParaRPr lang="en-US" sz="800" dirty="0"/>
           </a:p>
@@ -28723,7 +30433,7 @@
                 <a:ea typeface="Trebuchet MS" pitchFamily="34" charset="-122"/>
                 <a:cs typeface="Trebuchet MS" pitchFamily="34" charset="-120"/>
               </a:rPr>
-              <a:t>biplane</a:t>
+              <a:t>explanation</a:t>
             </a:r>
             <a:endParaRPr lang="en-US" sz="2800" dirty="0"/>
           </a:p>
@@ -28803,8 +30513,8 @@
         </p:nvSpPr>
         <p:spPr>
           <a:xfrm>
-            <a:off x="2938272" y="2258568"/>
-            <a:ext cx="1828800" cy="292608"/>
+            <a:off x="1989734" y="2258568"/>
+            <a:ext cx="1581912" cy="292608"/>
           </a:xfrm>
           <a:prstGeom prst="rect">
             <a:avLst>
@@ -28837,8 +30547,8 @@
         </p:nvSpPr>
         <p:spPr>
           <a:xfrm>
-            <a:off x="2938272" y="2258568"/>
-            <a:ext cx="1828800" cy="292608"/>
+            <a:off x="1989734" y="2258568"/>
+            <a:ext cx="1581912" cy="292608"/>
           </a:xfrm>
           <a:prstGeom prst="rect">
             <a:avLst/>
@@ -28862,7 +30572,7 @@
                 <a:ea typeface="Trebuchet MS" pitchFamily="34" charset="-122"/>
                 <a:cs typeface="Trebuchet MS" pitchFamily="34" charset="-120"/>
               </a:rPr>
-              <a:t>bi</a:t>
+              <a:t>ex</a:t>
             </a:r>
             <a:endParaRPr lang="en-US" sz="1300" dirty="0"/>
           </a:p>
@@ -28876,8 +30586,8 @@
         </p:nvSpPr>
         <p:spPr>
           <a:xfrm>
-            <a:off x="2938272" y="2569464"/>
-            <a:ext cx="1828800" cy="201168"/>
+            <a:off x="1989734" y="2569464"/>
+            <a:ext cx="1581912" cy="201168"/>
           </a:xfrm>
           <a:prstGeom prst="rect">
             <a:avLst/>
@@ -28901,7 +30611,7 @@
                 <a:ea typeface="Calibri" pitchFamily="34" charset="-122"/>
                 <a:cs typeface="Calibri" pitchFamily="34" charset="-120"/>
               </a:rPr>
-              <a:t>two</a:t>
+              <a:t>out or thoroughly</a:t>
             </a:r>
             <a:endParaRPr lang="en-US" sz="850" dirty="0"/>
           </a:p>
@@ -28915,8 +30625,8 @@
         </p:nvSpPr>
         <p:spPr>
           <a:xfrm>
-            <a:off x="5803392" y="2258568"/>
-            <a:ext cx="1828800" cy="292608"/>
+            <a:off x="3659429" y="2258568"/>
+            <a:ext cx="1581912" cy="292608"/>
           </a:xfrm>
           <a:prstGeom prst="rect">
             <a:avLst>
@@ -28924,11 +30634,11 @@
             </a:avLst>
           </a:prstGeom>
           <a:solidFill>
-            <a:srgbClr val="FCE7F3"/>
+            <a:srgbClr val="CCFBF1"/>
           </a:solidFill>
           <a:ln w="19050">
             <a:solidFill>
-              <a:srgbClr val="DB2777"/>
+              <a:srgbClr val="0D9488"/>
             </a:solidFill>
             <a:prstDash val="solid"/>
           </a:ln>
@@ -28949,8 +30659,8 @@
         </p:nvSpPr>
         <p:spPr>
           <a:xfrm>
-            <a:off x="5803392" y="2258568"/>
-            <a:ext cx="1828800" cy="292608"/>
+            <a:off x="3659429" y="2258568"/>
+            <a:ext cx="1581912" cy="292608"/>
           </a:xfrm>
           <a:prstGeom prst="rect">
             <a:avLst/>
@@ -28968,13 +30678,13 @@
             <a:r>
               <a:rPr lang="en-US" sz="1300" b="1" dirty="0">
                 <a:solidFill>
-                  <a:srgbClr val="9D174D"/>
+                  <a:srgbClr val="0F766E"/>
                 </a:solidFill>
                 <a:latin typeface="Trebuchet MS" pitchFamily="34" charset="0"/>
                 <a:ea typeface="Trebuchet MS" pitchFamily="34" charset="-122"/>
                 <a:cs typeface="Trebuchet MS" pitchFamily="34" charset="-120"/>
               </a:rPr>
-              <a:t>plane</a:t>
+              <a:t>plan</a:t>
             </a:r>
             <a:endParaRPr lang="en-US" sz="1300" dirty="0"/>
           </a:p>
@@ -28988,8 +30698,8 @@
         </p:nvSpPr>
         <p:spPr>
           <a:xfrm>
-            <a:off x="5803392" y="2569464"/>
-            <a:ext cx="1828800" cy="201168"/>
+            <a:off x="3659429" y="2569464"/>
+            <a:ext cx="1581912" cy="201168"/>
           </a:xfrm>
           <a:prstGeom prst="rect">
             <a:avLst/>
@@ -29013,7 +30723,7 @@
                 <a:ea typeface="Calibri" pitchFamily="34" charset="-122"/>
                 <a:cs typeface="Calibri" pitchFamily="34" charset="-120"/>
               </a:rPr>
-              <a:t>flat surface, level</a:t>
+              <a:t>a scheme or flat surface</a:t>
             </a:r>
             <a:endParaRPr lang="en-US" sz="850" dirty="0"/>
           </a:p>
@@ -29022,6 +30732,308 @@
       <p:sp>
         <p:nvSpPr>
           <p:cNvPr id="22" name="Shape 20"/>
+          <p:cNvSpPr/>
+          <p:nvPr/>
+        </p:nvSpPr>
+        <p:spPr>
+          <a:xfrm>
+            <a:off x="5329123" y="2258568"/>
+            <a:ext cx="1581912" cy="292608"/>
+          </a:xfrm>
+          <a:prstGeom prst="rect">
+            <a:avLst>
+              <a:gd name="adj" fmla="val 25000"/>
+            </a:avLst>
+          </a:prstGeom>
+          <a:solidFill>
+            <a:srgbClr val="FCE7F3"/>
+          </a:solidFill>
+          <a:ln w="19050">
+            <a:solidFill>
+              <a:srgbClr val="DB2777"/>
+            </a:solidFill>
+            <a:prstDash val="solid"/>
+          </a:ln>
+          <a:effectLst>
+            <a:outerShdw sx="100000" sy="100000" kx="0" ky="0" algn="bl" rotWithShape="0" blurRad="101600" dist="38100" dir="8100000">
+              <a:srgbClr val="000000">
+                <a:alpha val="12000"/>
+              </a:srgbClr>
+            </a:outerShdw>
+          </a:effectLst>
+        </p:spPr>
+      </p:sp>
+      <p:sp>
+        <p:nvSpPr>
+          <p:cNvPr id="23" name="Text 21"/>
+          <p:cNvSpPr/>
+          <p:nvPr/>
+        </p:nvSpPr>
+        <p:spPr>
+          <a:xfrm>
+            <a:off x="5329123" y="2258568"/>
+            <a:ext cx="1581912" cy="292608"/>
+          </a:xfrm>
+          <a:prstGeom prst="rect">
+            <a:avLst/>
+          </a:prstGeom>
+          <a:noFill/>
+          <a:ln/>
+        </p:spPr>
+        <p:txBody>
+          <a:bodyPr wrap="square" lIns="0" tIns="0" rIns="0" bIns="0" rtlCol="0" anchor="ctr"/>
+          <a:lstStyle/>
+          <a:p>
+            <a:pPr algn="ctr" indent="0" marL="0">
+              <a:buNone/>
+            </a:pPr>
+            <a:r>
+              <a:rPr lang="en-US" sz="1300" b="1" dirty="0">
+                <a:solidFill>
+                  <a:srgbClr val="9D174D"/>
+                </a:solidFill>
+                <a:latin typeface="Trebuchet MS" pitchFamily="34" charset="0"/>
+                <a:ea typeface="Trebuchet MS" pitchFamily="34" charset="-122"/>
+                <a:cs typeface="Trebuchet MS" pitchFamily="34" charset="-120"/>
+              </a:rPr>
+              <a:t>a</a:t>
+            </a:r>
+            <a:endParaRPr lang="en-US" sz="1300" dirty="0"/>
+          </a:p>
+        </p:txBody>
+      </p:sp>
+      <p:sp>
+        <p:nvSpPr>
+          <p:cNvPr id="24" name="Text 22"/>
+          <p:cNvSpPr/>
+          <p:nvPr/>
+        </p:nvSpPr>
+        <p:spPr>
+          <a:xfrm>
+            <a:off x="5329123" y="2569464"/>
+            <a:ext cx="1581912" cy="201168"/>
+          </a:xfrm>
+          <a:prstGeom prst="rect">
+            <a:avLst/>
+          </a:prstGeom>
+          <a:noFill/>
+          <a:ln/>
+        </p:spPr>
+        <p:txBody>
+          <a:bodyPr wrap="square" lIns="0" tIns="0" rIns="0" bIns="0" rtlCol="0" anchor="t"/>
+          <a:lstStyle/>
+          <a:p>
+            <a:pPr algn="ctr" indent="0" marL="0">
+              <a:buNone/>
+            </a:pPr>
+            <a:r>
+              <a:rPr lang="en-US" sz="850" dirty="0">
+                <a:solidFill>
+                  <a:srgbClr val="475569"/>
+                </a:solidFill>
+                <a:latin typeface="Calibri" pitchFamily="34" charset="0"/>
+                <a:ea typeface="Calibri" pitchFamily="34" charset="-122"/>
+                <a:cs typeface="Calibri" pitchFamily="34" charset="-120"/>
+              </a:rPr>
+              <a:t>connecting vowel</a:t>
+            </a:r>
+            <a:endParaRPr lang="en-US" sz="850" dirty="0"/>
+          </a:p>
+        </p:txBody>
+      </p:sp>
+      <p:sp>
+        <p:nvSpPr>
+          <p:cNvPr id="25" name="Text 23"/>
+          <p:cNvSpPr/>
+          <p:nvPr/>
+        </p:nvSpPr>
+        <p:spPr>
+          <a:xfrm>
+            <a:off x="5329123" y="2752344"/>
+            <a:ext cx="1581912" cy="182880"/>
+          </a:xfrm>
+          <a:prstGeom prst="rect">
+            <a:avLst/>
+          </a:prstGeom>
+          <a:noFill/>
+          <a:ln/>
+        </p:spPr>
+        <p:txBody>
+          <a:bodyPr wrap="square" lIns="0" tIns="0" rIns="0" bIns="0" rtlCol="0" anchor="t"/>
+          <a:lstStyle/>
+          <a:p>
+            <a:pPr algn="ctr" indent="0" marL="0">
+              <a:buNone/>
+            </a:pPr>
+            <a:r>
+              <a:rPr lang="en-US" sz="700" i="1" dirty="0">
+                <a:solidFill>
+                  <a:srgbClr val="94A3B8"/>
+                </a:solidFill>
+                <a:latin typeface="Calibri" pitchFamily="34" charset="0"/>
+                <a:ea typeface="Calibri" pitchFamily="34" charset="-122"/>
+                <a:cs typeface="Calibri" pitchFamily="34" charset="-120"/>
+              </a:rPr>
+              <a:t>links base to suffix</a:t>
+            </a:r>
+            <a:endParaRPr lang="en-US" sz="700" dirty="0"/>
+          </a:p>
+        </p:txBody>
+      </p:sp>
+      <p:sp>
+        <p:nvSpPr>
+          <p:cNvPr id="26" name="Shape 24"/>
+          <p:cNvSpPr/>
+          <p:nvPr/>
+        </p:nvSpPr>
+        <p:spPr>
+          <a:xfrm>
+            <a:off x="6998818" y="2258568"/>
+            <a:ext cx="1581912" cy="292608"/>
+          </a:xfrm>
+          <a:prstGeom prst="rect">
+            <a:avLst>
+              <a:gd name="adj" fmla="val 25000"/>
+            </a:avLst>
+          </a:prstGeom>
+          <a:solidFill>
+            <a:srgbClr val="FCE7F3"/>
+          </a:solidFill>
+          <a:ln w="19050">
+            <a:solidFill>
+              <a:srgbClr val="DB2777"/>
+            </a:solidFill>
+            <a:prstDash val="solid"/>
+          </a:ln>
+          <a:effectLst>
+            <a:outerShdw sx="100000" sy="100000" kx="0" ky="0" algn="bl" rotWithShape="0" blurRad="101600" dist="38100" dir="8100000">
+              <a:srgbClr val="000000">
+                <a:alpha val="12000"/>
+              </a:srgbClr>
+            </a:outerShdw>
+          </a:effectLst>
+        </p:spPr>
+      </p:sp>
+      <p:sp>
+        <p:nvSpPr>
+          <p:cNvPr id="27" name="Text 25"/>
+          <p:cNvSpPr/>
+          <p:nvPr/>
+        </p:nvSpPr>
+        <p:spPr>
+          <a:xfrm>
+            <a:off x="6998818" y="2258568"/>
+            <a:ext cx="1581912" cy="292608"/>
+          </a:xfrm>
+          <a:prstGeom prst="rect">
+            <a:avLst/>
+          </a:prstGeom>
+          <a:noFill/>
+          <a:ln/>
+        </p:spPr>
+        <p:txBody>
+          <a:bodyPr wrap="square" lIns="0" tIns="0" rIns="0" bIns="0" rtlCol="0" anchor="ctr"/>
+          <a:lstStyle/>
+          <a:p>
+            <a:pPr algn="ctr" indent="0" marL="0">
+              <a:buNone/>
+            </a:pPr>
+            <a:r>
+              <a:rPr lang="en-US" sz="1300" b="1" dirty="0">
+                <a:solidFill>
+                  <a:srgbClr val="9D174D"/>
+                </a:solidFill>
+                <a:latin typeface="Trebuchet MS" pitchFamily="34" charset="0"/>
+                <a:ea typeface="Trebuchet MS" pitchFamily="34" charset="-122"/>
+                <a:cs typeface="Trebuchet MS" pitchFamily="34" charset="-120"/>
+              </a:rPr>
+              <a:t>tion</a:t>
+            </a:r>
+            <a:endParaRPr lang="en-US" sz="1300" dirty="0"/>
+          </a:p>
+        </p:txBody>
+      </p:sp>
+      <p:sp>
+        <p:nvSpPr>
+          <p:cNvPr id="28" name="Text 26"/>
+          <p:cNvSpPr/>
+          <p:nvPr/>
+        </p:nvSpPr>
+        <p:spPr>
+          <a:xfrm>
+            <a:off x="6998818" y="2569464"/>
+            <a:ext cx="1581912" cy="201168"/>
+          </a:xfrm>
+          <a:prstGeom prst="rect">
+            <a:avLst/>
+          </a:prstGeom>
+          <a:noFill/>
+          <a:ln/>
+        </p:spPr>
+        <p:txBody>
+          <a:bodyPr wrap="square" lIns="0" tIns="0" rIns="0" bIns="0" rtlCol="0" anchor="t"/>
+          <a:lstStyle/>
+          <a:p>
+            <a:pPr algn="ctr" indent="0" marL="0">
+              <a:buNone/>
+            </a:pPr>
+            <a:r>
+              <a:rPr lang="en-US" sz="850" dirty="0">
+                <a:solidFill>
+                  <a:srgbClr val="475569"/>
+                </a:solidFill>
+                <a:latin typeface="Calibri" pitchFamily="34" charset="0"/>
+                <a:ea typeface="Calibri" pitchFamily="34" charset="-122"/>
+                <a:cs typeface="Calibri" pitchFamily="34" charset="-120"/>
+              </a:rPr>
+              <a:t>the act or result of</a:t>
+            </a:r>
+            <a:endParaRPr lang="en-US" sz="850" dirty="0"/>
+          </a:p>
+        </p:txBody>
+      </p:sp>
+      <p:sp>
+        <p:nvSpPr>
+          <p:cNvPr id="29" name="Text 27"/>
+          <p:cNvSpPr/>
+          <p:nvPr/>
+        </p:nvSpPr>
+        <p:spPr>
+          <a:xfrm>
+            <a:off x="6998818" y="2752344"/>
+            <a:ext cx="1581912" cy="182880"/>
+          </a:xfrm>
+          <a:prstGeom prst="rect">
+            <a:avLst/>
+          </a:prstGeom>
+          <a:noFill/>
+          <a:ln/>
+        </p:spPr>
+        <p:txBody>
+          <a:bodyPr wrap="square" lIns="0" tIns="0" rIns="0" bIns="0" rtlCol="0" anchor="t"/>
+          <a:lstStyle/>
+          <a:p>
+            <a:pPr algn="ctr" indent="0" marL="0">
+              <a:buNone/>
+            </a:pPr>
+            <a:r>
+              <a:rPr lang="en-US" sz="700" i="1" dirty="0">
+                <a:solidFill>
+                  <a:srgbClr val="94A3B8"/>
+                </a:solidFill>
+                <a:latin typeface="Calibri" pitchFamily="34" charset="0"/>
+                <a:ea typeface="Calibri" pitchFamily="34" charset="-122"/>
+                <a:cs typeface="Calibri" pitchFamily="34" charset="-120"/>
+              </a:rPr>
+              <a:t>ti makes /sh/ sound</a:t>
+            </a:r>
+            <a:endParaRPr lang="en-US" sz="700" dirty="0"/>
+          </a:p>
+        </p:txBody>
+      </p:sp>
+      <p:sp>
+        <p:nvSpPr>
+          <p:cNvPr id="30" name="Shape 28"/>
           <p:cNvSpPr/>
           <p:nvPr/>
         </p:nvSpPr>
@@ -29048,7 +31060,7 @@
       </p:sp>
       <p:sp>
         <p:nvSpPr>
-          <p:cNvPr id="23" name="Text 21"/>
+          <p:cNvPr id="31" name="Text 29"/>
           <p:cNvSpPr/>
           <p:nvPr/>
         </p:nvSpPr>
@@ -29087,7 +31099,7 @@
       </p:sp>
       <p:sp>
         <p:nvSpPr>
-          <p:cNvPr id="24" name="Shape 22"/>
+          <p:cNvPr id="32" name="Shape 30"/>
           <p:cNvSpPr/>
           <p:nvPr/>
         </p:nvSpPr>
@@ -29114,7 +31126,7 @@
       </p:sp>
       <p:sp>
         <p:nvSpPr>
-          <p:cNvPr id="25" name="Text 23"/>
+          <p:cNvPr id="33" name="Text 31"/>
           <p:cNvSpPr/>
           <p:nvPr/>
         </p:nvSpPr>
@@ -29153,7 +31165,7 @@
       </p:sp>
       <p:sp>
         <p:nvSpPr>
-          <p:cNvPr id="26" name="Shape 24"/>
+          <p:cNvPr id="34" name="Shape 32"/>
           <p:cNvSpPr/>
           <p:nvPr/>
         </p:nvSpPr>
@@ -29180,7 +31192,7 @@
       </p:sp>
       <p:sp>
         <p:nvSpPr>
-          <p:cNvPr id="27" name="Text 25"/>
+          <p:cNvPr id="35" name="Text 33"/>
           <p:cNvSpPr/>
           <p:nvPr/>
         </p:nvSpPr>
@@ -29219,7 +31231,7 @@
       </p:sp>
       <p:sp>
         <p:nvSpPr>
-          <p:cNvPr id="28" name="Shape 26"/>
+          <p:cNvPr id="36" name="Shape 34"/>
           <p:cNvSpPr/>
           <p:nvPr/>
         </p:nvSpPr>
@@ -29246,7 +31258,7 @@
       </p:sp>
       <p:sp>
         <p:nvSpPr>
-          <p:cNvPr id="29" name="Text 27"/>
+          <p:cNvPr id="37" name="Text 35"/>
           <p:cNvSpPr/>
           <p:nvPr/>
         </p:nvSpPr>
@@ -29569,7 +31581,7 @@
                 <a:ea typeface="Calibri" pitchFamily="34" charset="-122"/>
                 <a:cs typeface="Calibri" pitchFamily="34" charset="-120"/>
               </a:rPr>
-              <a:t>Word Labs  •  wordlabs.app  •  Root: 'plan' = arrange, design, flat surface</a:t>
+              <a:t>Word Labs  •  wordlabs.app  •  Root: 'plan' = a scheme or flat surface</a:t>
             </a:r>
             <a:endParaRPr lang="en-US" sz="800" dirty="0"/>
           </a:p>
@@ -29708,7 +31720,7 @@
                 <a:ea typeface="Trebuchet MS" pitchFamily="34" charset="-122"/>
                 <a:cs typeface="Trebuchet MS" pitchFamily="34" charset="-120"/>
               </a:rPr>
-              <a:t>biplane</a:t>
+              <a:t>explanation</a:t>
             </a:r>
             <a:endParaRPr lang="en-US" sz="2800" dirty="0"/>
           </a:p>
@@ -29788,8 +31800,8 @@
         </p:nvSpPr>
         <p:spPr>
           <a:xfrm>
-            <a:off x="2938272" y="2258568"/>
-            <a:ext cx="1828800" cy="292608"/>
+            <a:off x="1989734" y="2258568"/>
+            <a:ext cx="1581912" cy="292608"/>
           </a:xfrm>
           <a:prstGeom prst="rect">
             <a:avLst>
@@ -29822,8 +31834,8 @@
         </p:nvSpPr>
         <p:spPr>
           <a:xfrm>
-            <a:off x="2938272" y="2258568"/>
-            <a:ext cx="1828800" cy="292608"/>
+            <a:off x="1989734" y="2258568"/>
+            <a:ext cx="1581912" cy="292608"/>
           </a:xfrm>
           <a:prstGeom prst="rect">
             <a:avLst/>
@@ -29847,7 +31859,7 @@
                 <a:ea typeface="Trebuchet MS" pitchFamily="34" charset="-122"/>
                 <a:cs typeface="Trebuchet MS" pitchFamily="34" charset="-120"/>
               </a:rPr>
-              <a:t>bi</a:t>
+              <a:t>ex</a:t>
             </a:r>
             <a:endParaRPr lang="en-US" sz="1300" dirty="0"/>
           </a:p>
@@ -29861,8 +31873,8 @@
         </p:nvSpPr>
         <p:spPr>
           <a:xfrm>
-            <a:off x="2938272" y="2569464"/>
-            <a:ext cx="1828800" cy="201168"/>
+            <a:off x="1989734" y="2569464"/>
+            <a:ext cx="1581912" cy="201168"/>
           </a:xfrm>
           <a:prstGeom prst="rect">
             <a:avLst/>
@@ -29886,7 +31898,7 @@
                 <a:ea typeface="Calibri" pitchFamily="34" charset="-122"/>
                 <a:cs typeface="Calibri" pitchFamily="34" charset="-120"/>
               </a:rPr>
-              <a:t>two</a:t>
+              <a:t>out or thoroughly</a:t>
             </a:r>
             <a:endParaRPr lang="en-US" sz="850" dirty="0"/>
           </a:p>
@@ -29900,8 +31912,8 @@
         </p:nvSpPr>
         <p:spPr>
           <a:xfrm>
-            <a:off x="5803392" y="2258568"/>
-            <a:ext cx="1828800" cy="292608"/>
+            <a:off x="3659429" y="2258568"/>
+            <a:ext cx="1581912" cy="292608"/>
           </a:xfrm>
           <a:prstGeom prst="rect">
             <a:avLst>
@@ -29909,11 +31921,11 @@
             </a:avLst>
           </a:prstGeom>
           <a:solidFill>
-            <a:srgbClr val="FCE7F3"/>
+            <a:srgbClr val="CCFBF1"/>
           </a:solidFill>
           <a:ln w="19050">
             <a:solidFill>
-              <a:srgbClr val="DB2777"/>
+              <a:srgbClr val="0D9488"/>
             </a:solidFill>
             <a:prstDash val="solid"/>
           </a:ln>
@@ -29934,8 +31946,8 @@
         </p:nvSpPr>
         <p:spPr>
           <a:xfrm>
-            <a:off x="5803392" y="2258568"/>
-            <a:ext cx="1828800" cy="292608"/>
+            <a:off x="3659429" y="2258568"/>
+            <a:ext cx="1581912" cy="292608"/>
           </a:xfrm>
           <a:prstGeom prst="rect">
             <a:avLst/>
@@ -29953,13 +31965,13 @@
             <a:r>
               <a:rPr lang="en-US" sz="1300" b="1" dirty="0">
                 <a:solidFill>
-                  <a:srgbClr val="9D174D"/>
+                  <a:srgbClr val="0F766E"/>
                 </a:solidFill>
                 <a:latin typeface="Trebuchet MS" pitchFamily="34" charset="0"/>
                 <a:ea typeface="Trebuchet MS" pitchFamily="34" charset="-122"/>
                 <a:cs typeface="Trebuchet MS" pitchFamily="34" charset="-120"/>
               </a:rPr>
-              <a:t>plane</a:t>
+              <a:t>plan</a:t>
             </a:r>
             <a:endParaRPr lang="en-US" sz="1300" dirty="0"/>
           </a:p>
@@ -29973,8 +31985,8 @@
         </p:nvSpPr>
         <p:spPr>
           <a:xfrm>
-            <a:off x="5803392" y="2569464"/>
-            <a:ext cx="1828800" cy="201168"/>
+            <a:off x="3659429" y="2569464"/>
+            <a:ext cx="1581912" cy="201168"/>
           </a:xfrm>
           <a:prstGeom prst="rect">
             <a:avLst/>
@@ -29998,7 +32010,7 @@
                 <a:ea typeface="Calibri" pitchFamily="34" charset="-122"/>
                 <a:cs typeface="Calibri" pitchFamily="34" charset="-120"/>
               </a:rPr>
-              <a:t>flat surface, level</a:t>
+              <a:t>a scheme or flat surface</a:t>
             </a:r>
             <a:endParaRPr lang="en-US" sz="850" dirty="0"/>
           </a:p>
@@ -30007,6 +32019,308 @@
       <p:sp>
         <p:nvSpPr>
           <p:cNvPr id="22" name="Shape 20"/>
+          <p:cNvSpPr/>
+          <p:nvPr/>
+        </p:nvSpPr>
+        <p:spPr>
+          <a:xfrm>
+            <a:off x="5329123" y="2258568"/>
+            <a:ext cx="1581912" cy="292608"/>
+          </a:xfrm>
+          <a:prstGeom prst="rect">
+            <a:avLst>
+              <a:gd name="adj" fmla="val 25000"/>
+            </a:avLst>
+          </a:prstGeom>
+          <a:solidFill>
+            <a:srgbClr val="FCE7F3"/>
+          </a:solidFill>
+          <a:ln w="19050">
+            <a:solidFill>
+              <a:srgbClr val="DB2777"/>
+            </a:solidFill>
+            <a:prstDash val="solid"/>
+          </a:ln>
+          <a:effectLst>
+            <a:outerShdw sx="100000" sy="100000" kx="0" ky="0" algn="bl" rotWithShape="0" blurRad="101600" dist="38100" dir="8100000">
+              <a:srgbClr val="000000">
+                <a:alpha val="12000"/>
+              </a:srgbClr>
+            </a:outerShdw>
+          </a:effectLst>
+        </p:spPr>
+      </p:sp>
+      <p:sp>
+        <p:nvSpPr>
+          <p:cNvPr id="23" name="Text 21"/>
+          <p:cNvSpPr/>
+          <p:nvPr/>
+        </p:nvSpPr>
+        <p:spPr>
+          <a:xfrm>
+            <a:off x="5329123" y="2258568"/>
+            <a:ext cx="1581912" cy="292608"/>
+          </a:xfrm>
+          <a:prstGeom prst="rect">
+            <a:avLst/>
+          </a:prstGeom>
+          <a:noFill/>
+          <a:ln/>
+        </p:spPr>
+        <p:txBody>
+          <a:bodyPr wrap="square" lIns="0" tIns="0" rIns="0" bIns="0" rtlCol="0" anchor="ctr"/>
+          <a:lstStyle/>
+          <a:p>
+            <a:pPr algn="ctr" indent="0" marL="0">
+              <a:buNone/>
+            </a:pPr>
+            <a:r>
+              <a:rPr lang="en-US" sz="1300" b="1" dirty="0">
+                <a:solidFill>
+                  <a:srgbClr val="9D174D"/>
+                </a:solidFill>
+                <a:latin typeface="Trebuchet MS" pitchFamily="34" charset="0"/>
+                <a:ea typeface="Trebuchet MS" pitchFamily="34" charset="-122"/>
+                <a:cs typeface="Trebuchet MS" pitchFamily="34" charset="-120"/>
+              </a:rPr>
+              <a:t>a</a:t>
+            </a:r>
+            <a:endParaRPr lang="en-US" sz="1300" dirty="0"/>
+          </a:p>
+        </p:txBody>
+      </p:sp>
+      <p:sp>
+        <p:nvSpPr>
+          <p:cNvPr id="24" name="Text 22"/>
+          <p:cNvSpPr/>
+          <p:nvPr/>
+        </p:nvSpPr>
+        <p:spPr>
+          <a:xfrm>
+            <a:off x="5329123" y="2569464"/>
+            <a:ext cx="1581912" cy="201168"/>
+          </a:xfrm>
+          <a:prstGeom prst="rect">
+            <a:avLst/>
+          </a:prstGeom>
+          <a:noFill/>
+          <a:ln/>
+        </p:spPr>
+        <p:txBody>
+          <a:bodyPr wrap="square" lIns="0" tIns="0" rIns="0" bIns="0" rtlCol="0" anchor="t"/>
+          <a:lstStyle/>
+          <a:p>
+            <a:pPr algn="ctr" indent="0" marL="0">
+              <a:buNone/>
+            </a:pPr>
+            <a:r>
+              <a:rPr lang="en-US" sz="850" dirty="0">
+                <a:solidFill>
+                  <a:srgbClr val="475569"/>
+                </a:solidFill>
+                <a:latin typeface="Calibri" pitchFamily="34" charset="0"/>
+                <a:ea typeface="Calibri" pitchFamily="34" charset="-122"/>
+                <a:cs typeface="Calibri" pitchFamily="34" charset="-120"/>
+              </a:rPr>
+              <a:t>connecting vowel</a:t>
+            </a:r>
+            <a:endParaRPr lang="en-US" sz="850" dirty="0"/>
+          </a:p>
+        </p:txBody>
+      </p:sp>
+      <p:sp>
+        <p:nvSpPr>
+          <p:cNvPr id="25" name="Text 23"/>
+          <p:cNvSpPr/>
+          <p:nvPr/>
+        </p:nvSpPr>
+        <p:spPr>
+          <a:xfrm>
+            <a:off x="5329123" y="2752344"/>
+            <a:ext cx="1581912" cy="182880"/>
+          </a:xfrm>
+          <a:prstGeom prst="rect">
+            <a:avLst/>
+          </a:prstGeom>
+          <a:noFill/>
+          <a:ln/>
+        </p:spPr>
+        <p:txBody>
+          <a:bodyPr wrap="square" lIns="0" tIns="0" rIns="0" bIns="0" rtlCol="0" anchor="t"/>
+          <a:lstStyle/>
+          <a:p>
+            <a:pPr algn="ctr" indent="0" marL="0">
+              <a:buNone/>
+            </a:pPr>
+            <a:r>
+              <a:rPr lang="en-US" sz="700" i="1" dirty="0">
+                <a:solidFill>
+                  <a:srgbClr val="94A3B8"/>
+                </a:solidFill>
+                <a:latin typeface="Calibri" pitchFamily="34" charset="0"/>
+                <a:ea typeface="Calibri" pitchFamily="34" charset="-122"/>
+                <a:cs typeface="Calibri" pitchFamily="34" charset="-120"/>
+              </a:rPr>
+              <a:t>links base to suffix</a:t>
+            </a:r>
+            <a:endParaRPr lang="en-US" sz="700" dirty="0"/>
+          </a:p>
+        </p:txBody>
+      </p:sp>
+      <p:sp>
+        <p:nvSpPr>
+          <p:cNvPr id="26" name="Shape 24"/>
+          <p:cNvSpPr/>
+          <p:nvPr/>
+        </p:nvSpPr>
+        <p:spPr>
+          <a:xfrm>
+            <a:off x="6998818" y="2258568"/>
+            <a:ext cx="1581912" cy="292608"/>
+          </a:xfrm>
+          <a:prstGeom prst="rect">
+            <a:avLst>
+              <a:gd name="adj" fmla="val 25000"/>
+            </a:avLst>
+          </a:prstGeom>
+          <a:solidFill>
+            <a:srgbClr val="FCE7F3"/>
+          </a:solidFill>
+          <a:ln w="19050">
+            <a:solidFill>
+              <a:srgbClr val="DB2777"/>
+            </a:solidFill>
+            <a:prstDash val="solid"/>
+          </a:ln>
+          <a:effectLst>
+            <a:outerShdw sx="100000" sy="100000" kx="0" ky="0" algn="bl" rotWithShape="0" blurRad="101600" dist="38100" dir="8100000">
+              <a:srgbClr val="000000">
+                <a:alpha val="12000"/>
+              </a:srgbClr>
+            </a:outerShdw>
+          </a:effectLst>
+        </p:spPr>
+      </p:sp>
+      <p:sp>
+        <p:nvSpPr>
+          <p:cNvPr id="27" name="Text 25"/>
+          <p:cNvSpPr/>
+          <p:nvPr/>
+        </p:nvSpPr>
+        <p:spPr>
+          <a:xfrm>
+            <a:off x="6998818" y="2258568"/>
+            <a:ext cx="1581912" cy="292608"/>
+          </a:xfrm>
+          <a:prstGeom prst="rect">
+            <a:avLst/>
+          </a:prstGeom>
+          <a:noFill/>
+          <a:ln/>
+        </p:spPr>
+        <p:txBody>
+          <a:bodyPr wrap="square" lIns="0" tIns="0" rIns="0" bIns="0" rtlCol="0" anchor="ctr"/>
+          <a:lstStyle/>
+          <a:p>
+            <a:pPr algn="ctr" indent="0" marL="0">
+              <a:buNone/>
+            </a:pPr>
+            <a:r>
+              <a:rPr lang="en-US" sz="1300" b="1" dirty="0">
+                <a:solidFill>
+                  <a:srgbClr val="9D174D"/>
+                </a:solidFill>
+                <a:latin typeface="Trebuchet MS" pitchFamily="34" charset="0"/>
+                <a:ea typeface="Trebuchet MS" pitchFamily="34" charset="-122"/>
+                <a:cs typeface="Trebuchet MS" pitchFamily="34" charset="-120"/>
+              </a:rPr>
+              <a:t>tion</a:t>
+            </a:r>
+            <a:endParaRPr lang="en-US" sz="1300" dirty="0"/>
+          </a:p>
+        </p:txBody>
+      </p:sp>
+      <p:sp>
+        <p:nvSpPr>
+          <p:cNvPr id="28" name="Text 26"/>
+          <p:cNvSpPr/>
+          <p:nvPr/>
+        </p:nvSpPr>
+        <p:spPr>
+          <a:xfrm>
+            <a:off x="6998818" y="2569464"/>
+            <a:ext cx="1581912" cy="201168"/>
+          </a:xfrm>
+          <a:prstGeom prst="rect">
+            <a:avLst/>
+          </a:prstGeom>
+          <a:noFill/>
+          <a:ln/>
+        </p:spPr>
+        <p:txBody>
+          <a:bodyPr wrap="square" lIns="0" tIns="0" rIns="0" bIns="0" rtlCol="0" anchor="t"/>
+          <a:lstStyle/>
+          <a:p>
+            <a:pPr algn="ctr" indent="0" marL="0">
+              <a:buNone/>
+            </a:pPr>
+            <a:r>
+              <a:rPr lang="en-US" sz="850" dirty="0">
+                <a:solidFill>
+                  <a:srgbClr val="475569"/>
+                </a:solidFill>
+                <a:latin typeface="Calibri" pitchFamily="34" charset="0"/>
+                <a:ea typeface="Calibri" pitchFamily="34" charset="-122"/>
+                <a:cs typeface="Calibri" pitchFamily="34" charset="-120"/>
+              </a:rPr>
+              <a:t>the act or result of</a:t>
+            </a:r>
+            <a:endParaRPr lang="en-US" sz="850" dirty="0"/>
+          </a:p>
+        </p:txBody>
+      </p:sp>
+      <p:sp>
+        <p:nvSpPr>
+          <p:cNvPr id="29" name="Text 27"/>
+          <p:cNvSpPr/>
+          <p:nvPr/>
+        </p:nvSpPr>
+        <p:spPr>
+          <a:xfrm>
+            <a:off x="6998818" y="2752344"/>
+            <a:ext cx="1581912" cy="182880"/>
+          </a:xfrm>
+          <a:prstGeom prst="rect">
+            <a:avLst/>
+          </a:prstGeom>
+          <a:noFill/>
+          <a:ln/>
+        </p:spPr>
+        <p:txBody>
+          <a:bodyPr wrap="square" lIns="0" tIns="0" rIns="0" bIns="0" rtlCol="0" anchor="t"/>
+          <a:lstStyle/>
+          <a:p>
+            <a:pPr algn="ctr" indent="0" marL="0">
+              <a:buNone/>
+            </a:pPr>
+            <a:r>
+              <a:rPr lang="en-US" sz="700" i="1" dirty="0">
+                <a:solidFill>
+                  <a:srgbClr val="94A3B8"/>
+                </a:solidFill>
+                <a:latin typeface="Calibri" pitchFamily="34" charset="0"/>
+                <a:ea typeface="Calibri" pitchFamily="34" charset="-122"/>
+                <a:cs typeface="Calibri" pitchFamily="34" charset="-120"/>
+              </a:rPr>
+              <a:t>ti makes /sh/ sound</a:t>
+            </a:r>
+            <a:endParaRPr lang="en-US" sz="700" dirty="0"/>
+          </a:p>
+        </p:txBody>
+      </p:sp>
+      <p:sp>
+        <p:nvSpPr>
+          <p:cNvPr id="30" name="Shape 28"/>
           <p:cNvSpPr/>
           <p:nvPr/>
         </p:nvSpPr>
@@ -30033,7 +32347,7 @@
       </p:sp>
       <p:sp>
         <p:nvSpPr>
-          <p:cNvPr id="23" name="Text 21"/>
+          <p:cNvPr id="31" name="Text 29"/>
           <p:cNvSpPr/>
           <p:nvPr/>
         </p:nvSpPr>
@@ -30072,7 +32386,7 @@
       </p:sp>
       <p:sp>
         <p:nvSpPr>
-          <p:cNvPr id="24" name="Shape 22"/>
+          <p:cNvPr id="32" name="Shape 30"/>
           <p:cNvSpPr/>
           <p:nvPr/>
         </p:nvSpPr>
@@ -30099,14 +32413,14 @@
       </p:sp>
       <p:sp>
         <p:nvSpPr>
-          <p:cNvPr id="25" name="Shape 23"/>
-          <p:cNvSpPr/>
-          <p:nvPr/>
-        </p:nvSpPr>
-        <p:spPr>
-          <a:xfrm>
-            <a:off x="2999232" y="3364992"/>
-            <a:ext cx="1645920" cy="475488"/>
+          <p:cNvPr id="33" name="Shape 31"/>
+          <p:cNvSpPr/>
+          <p:nvPr/>
+        </p:nvSpPr>
+        <p:spPr>
+          <a:xfrm>
+            <a:off x="1975104" y="3364992"/>
+            <a:ext cx="1554480" cy="475488"/>
           </a:xfrm>
           <a:prstGeom prst="rect">
             <a:avLst>
@@ -30126,14 +32440,14 @@
       </p:sp>
       <p:sp>
         <p:nvSpPr>
-          <p:cNvPr id="26" name="Text 24"/>
-          <p:cNvSpPr/>
-          <p:nvPr/>
-        </p:nvSpPr>
-        <p:spPr>
-          <a:xfrm>
-            <a:off x="2999232" y="3364992"/>
-            <a:ext cx="1645920" cy="475488"/>
+          <p:cNvPr id="34" name="Text 32"/>
+          <p:cNvSpPr/>
+          <p:nvPr/>
+        </p:nvSpPr>
+        <p:spPr>
+          <a:xfrm>
+            <a:off x="1975104" y="3364992"/>
+            <a:ext cx="1554480" cy="475488"/>
           </a:xfrm>
           <a:prstGeom prst="rect">
             <a:avLst/>
@@ -30157,7 +32471,7 @@
                 <a:ea typeface="Trebuchet MS" pitchFamily="34" charset="-122"/>
                 <a:cs typeface="Trebuchet MS" pitchFamily="34" charset="-120"/>
               </a:rPr>
-              <a:t>bi</a:t>
+              <a:t>ex</a:t>
             </a:r>
             <a:endParaRPr lang="en-US" sz="1400" dirty="0"/>
           </a:p>
@@ -30165,14 +32479,14 @@
       </p:sp>
       <p:sp>
         <p:nvSpPr>
-          <p:cNvPr id="27" name="Text 25"/>
-          <p:cNvSpPr/>
-          <p:nvPr/>
-        </p:nvSpPr>
-        <p:spPr>
-          <a:xfrm>
-            <a:off x="4645152" y="3364992"/>
-            <a:ext cx="1097280" cy="475488"/>
+          <p:cNvPr id="35" name="Text 33"/>
+          <p:cNvSpPr/>
+          <p:nvPr/>
+        </p:nvSpPr>
+        <p:spPr>
+          <a:xfrm>
+            <a:off x="3529584" y="3364992"/>
+            <a:ext cx="73152" cy="475488"/>
           </a:xfrm>
           <a:prstGeom prst="rect">
             <a:avLst/>
@@ -30204,14 +32518,14 @@
       </p:sp>
       <p:sp>
         <p:nvSpPr>
-          <p:cNvPr id="28" name="Shape 26"/>
-          <p:cNvSpPr/>
-          <p:nvPr/>
-        </p:nvSpPr>
-        <p:spPr>
-          <a:xfrm>
-            <a:off x="5742432" y="3364992"/>
-            <a:ext cx="1645920" cy="475488"/>
+          <p:cNvPr id="36" name="Shape 34"/>
+          <p:cNvSpPr/>
+          <p:nvPr/>
+        </p:nvSpPr>
+        <p:spPr>
+          <a:xfrm>
+            <a:off x="3602736" y="3364992"/>
+            <a:ext cx="1554480" cy="475488"/>
           </a:xfrm>
           <a:prstGeom prst="rect">
             <a:avLst>
@@ -30231,14 +32545,14 @@
       </p:sp>
       <p:sp>
         <p:nvSpPr>
-          <p:cNvPr id="29" name="Text 27"/>
-          <p:cNvSpPr/>
-          <p:nvPr/>
-        </p:nvSpPr>
-        <p:spPr>
-          <a:xfrm>
-            <a:off x="5742432" y="3364992"/>
-            <a:ext cx="1645920" cy="475488"/>
+          <p:cNvPr id="37" name="Text 35"/>
+          <p:cNvSpPr/>
+          <p:nvPr/>
+        </p:nvSpPr>
+        <p:spPr>
+          <a:xfrm>
+            <a:off x="3602736" y="3364992"/>
+            <a:ext cx="1554480" cy="475488"/>
           </a:xfrm>
           <a:prstGeom prst="rect">
             <a:avLst/>
@@ -30262,7 +32576,7 @@
                 <a:ea typeface="Trebuchet MS" pitchFamily="34" charset="-122"/>
                 <a:cs typeface="Trebuchet MS" pitchFamily="34" charset="-120"/>
               </a:rPr>
-              <a:t>plane</a:t>
+              <a:t>plan</a:t>
             </a:r>
             <a:endParaRPr lang="en-US" sz="1400" dirty="0"/>
           </a:p>
@@ -30270,7 +32584,217 @@
       </p:sp>
       <p:sp>
         <p:nvSpPr>
-          <p:cNvPr id="30" name="Shape 28"/>
+          <p:cNvPr id="38" name="Text 36"/>
+          <p:cNvSpPr/>
+          <p:nvPr/>
+        </p:nvSpPr>
+        <p:spPr>
+          <a:xfrm>
+            <a:off x="5157216" y="3364992"/>
+            <a:ext cx="73152" cy="475488"/>
+          </a:xfrm>
+          <a:prstGeom prst="rect">
+            <a:avLst/>
+          </a:prstGeom>
+          <a:noFill/>
+          <a:ln/>
+        </p:spPr>
+        <p:txBody>
+          <a:bodyPr wrap="square" lIns="0" tIns="0" rIns="0" bIns="0" rtlCol="0" anchor="ctr"/>
+          <a:lstStyle/>
+          <a:p>
+            <a:pPr algn="ctr" indent="0" marL="0">
+              <a:buNone/>
+            </a:pPr>
+            <a:r>
+              <a:rPr lang="en-US" sz="1600" b="1" dirty="0">
+                <a:solidFill>
+                  <a:srgbClr val="0D9488"/>
+                </a:solidFill>
+                <a:latin typeface="Trebuchet MS" pitchFamily="34" charset="0"/>
+                <a:ea typeface="Trebuchet MS" pitchFamily="34" charset="-122"/>
+                <a:cs typeface="Trebuchet MS" pitchFamily="34" charset="-120"/>
+              </a:rPr>
+              <a:t>·</a:t>
+            </a:r>
+            <a:endParaRPr lang="en-US" sz="1600" dirty="0"/>
+          </a:p>
+        </p:txBody>
+      </p:sp>
+      <p:sp>
+        <p:nvSpPr>
+          <p:cNvPr id="39" name="Shape 37"/>
+          <p:cNvSpPr/>
+          <p:nvPr/>
+        </p:nvSpPr>
+        <p:spPr>
+          <a:xfrm>
+            <a:off x="5230368" y="3364992"/>
+            <a:ext cx="1554480" cy="475488"/>
+          </a:xfrm>
+          <a:prstGeom prst="rect">
+            <a:avLst>
+              <a:gd name="adj" fmla="val 9615"/>
+            </a:avLst>
+          </a:prstGeom>
+          <a:solidFill>
+            <a:srgbClr val="FFFFFF"/>
+          </a:solidFill>
+          <a:ln w="12700">
+            <a:solidFill>
+              <a:srgbClr val="0D9488"/>
+            </a:solidFill>
+            <a:prstDash val="solid"/>
+          </a:ln>
+        </p:spPr>
+      </p:sp>
+      <p:sp>
+        <p:nvSpPr>
+          <p:cNvPr id="40" name="Text 38"/>
+          <p:cNvSpPr/>
+          <p:nvPr/>
+        </p:nvSpPr>
+        <p:spPr>
+          <a:xfrm>
+            <a:off x="5230368" y="3364992"/>
+            <a:ext cx="1554480" cy="475488"/>
+          </a:xfrm>
+          <a:prstGeom prst="rect">
+            <a:avLst/>
+          </a:prstGeom>
+          <a:noFill/>
+          <a:ln/>
+        </p:spPr>
+        <p:txBody>
+          <a:bodyPr wrap="square" lIns="0" tIns="0" rIns="0" bIns="0" rtlCol="0" anchor="ctr"/>
+          <a:lstStyle/>
+          <a:p>
+            <a:pPr algn="ctr" indent="0" marL="0">
+              <a:buNone/>
+            </a:pPr>
+            <a:r>
+              <a:rPr lang="en-US" sz="1400" b="1" dirty="0">
+                <a:solidFill>
+                  <a:srgbClr val="0D9488"/>
+                </a:solidFill>
+                <a:latin typeface="Trebuchet MS" pitchFamily="34" charset="0"/>
+                <a:ea typeface="Trebuchet MS" pitchFamily="34" charset="-122"/>
+                <a:cs typeface="Trebuchet MS" pitchFamily="34" charset="-120"/>
+              </a:rPr>
+              <a:t>a</a:t>
+            </a:r>
+            <a:endParaRPr lang="en-US" sz="1400" dirty="0"/>
+          </a:p>
+        </p:txBody>
+      </p:sp>
+      <p:sp>
+        <p:nvSpPr>
+          <p:cNvPr id="41" name="Text 39"/>
+          <p:cNvSpPr/>
+          <p:nvPr/>
+        </p:nvSpPr>
+        <p:spPr>
+          <a:xfrm>
+            <a:off x="6784848" y="3364992"/>
+            <a:ext cx="73152" cy="475488"/>
+          </a:xfrm>
+          <a:prstGeom prst="rect">
+            <a:avLst/>
+          </a:prstGeom>
+          <a:noFill/>
+          <a:ln/>
+        </p:spPr>
+        <p:txBody>
+          <a:bodyPr wrap="square" lIns="0" tIns="0" rIns="0" bIns="0" rtlCol="0" anchor="ctr"/>
+          <a:lstStyle/>
+          <a:p>
+            <a:pPr algn="ctr" indent="0" marL="0">
+              <a:buNone/>
+            </a:pPr>
+            <a:r>
+              <a:rPr lang="en-US" sz="1600" b="1" dirty="0">
+                <a:solidFill>
+                  <a:srgbClr val="0D9488"/>
+                </a:solidFill>
+                <a:latin typeface="Trebuchet MS" pitchFamily="34" charset="0"/>
+                <a:ea typeface="Trebuchet MS" pitchFamily="34" charset="-122"/>
+                <a:cs typeface="Trebuchet MS" pitchFamily="34" charset="-120"/>
+              </a:rPr>
+              <a:t>·</a:t>
+            </a:r>
+            <a:endParaRPr lang="en-US" sz="1600" dirty="0"/>
+          </a:p>
+        </p:txBody>
+      </p:sp>
+      <p:sp>
+        <p:nvSpPr>
+          <p:cNvPr id="42" name="Shape 40"/>
+          <p:cNvSpPr/>
+          <p:nvPr/>
+        </p:nvSpPr>
+        <p:spPr>
+          <a:xfrm>
+            <a:off x="6858000" y="3364992"/>
+            <a:ext cx="1554480" cy="475488"/>
+          </a:xfrm>
+          <a:prstGeom prst="rect">
+            <a:avLst>
+              <a:gd name="adj" fmla="val 9615"/>
+            </a:avLst>
+          </a:prstGeom>
+          <a:solidFill>
+            <a:srgbClr val="FFFFFF"/>
+          </a:solidFill>
+          <a:ln w="12700">
+            <a:solidFill>
+              <a:srgbClr val="0D9488"/>
+            </a:solidFill>
+            <a:prstDash val="solid"/>
+          </a:ln>
+        </p:spPr>
+      </p:sp>
+      <p:sp>
+        <p:nvSpPr>
+          <p:cNvPr id="43" name="Text 41"/>
+          <p:cNvSpPr/>
+          <p:nvPr/>
+        </p:nvSpPr>
+        <p:spPr>
+          <a:xfrm>
+            <a:off x="6858000" y="3364992"/>
+            <a:ext cx="1554480" cy="475488"/>
+          </a:xfrm>
+          <a:prstGeom prst="rect">
+            <a:avLst/>
+          </a:prstGeom>
+          <a:noFill/>
+          <a:ln/>
+        </p:spPr>
+        <p:txBody>
+          <a:bodyPr wrap="square" lIns="0" tIns="0" rIns="0" bIns="0" rtlCol="0" anchor="ctr"/>
+          <a:lstStyle/>
+          <a:p>
+            <a:pPr algn="ctr" indent="0" marL="0">
+              <a:buNone/>
+            </a:pPr>
+            <a:r>
+              <a:rPr lang="en-US" sz="1400" b="1" dirty="0">
+                <a:solidFill>
+                  <a:srgbClr val="0D9488"/>
+                </a:solidFill>
+                <a:latin typeface="Trebuchet MS" pitchFamily="34" charset="0"/>
+                <a:ea typeface="Trebuchet MS" pitchFamily="34" charset="-122"/>
+                <a:cs typeface="Trebuchet MS" pitchFamily="34" charset="-120"/>
+              </a:rPr>
+              <a:t>tion</a:t>
+            </a:r>
+            <a:endParaRPr lang="en-US" sz="1400" dirty="0"/>
+          </a:p>
+        </p:txBody>
+      </p:sp>
+      <p:sp>
+        <p:nvSpPr>
+          <p:cNvPr id="44" name="Shape 42"/>
           <p:cNvSpPr/>
           <p:nvPr/>
         </p:nvSpPr>
@@ -30297,7 +32821,7 @@
       </p:sp>
       <p:sp>
         <p:nvSpPr>
-          <p:cNvPr id="31" name="Text 29"/>
+          <p:cNvPr id="45" name="Text 43"/>
           <p:cNvSpPr/>
           <p:nvPr/>
         </p:nvSpPr>
@@ -30336,7 +32860,7 @@
       </p:sp>
       <p:sp>
         <p:nvSpPr>
-          <p:cNvPr id="32" name="Shape 30"/>
+          <p:cNvPr id="46" name="Shape 44"/>
           <p:cNvSpPr/>
           <p:nvPr/>
         </p:nvSpPr>
@@ -30363,7 +32887,7 @@
       </p:sp>
       <p:sp>
         <p:nvSpPr>
-          <p:cNvPr id="33" name="Text 31"/>
+          <p:cNvPr id="47" name="Text 45"/>
           <p:cNvSpPr/>
           <p:nvPr/>
         </p:nvSpPr>
@@ -30686,7 +33210,7 @@
                 <a:ea typeface="Calibri" pitchFamily="34" charset="-122"/>
                 <a:cs typeface="Calibri" pitchFamily="34" charset="-120"/>
               </a:rPr>
-              <a:t>Word Labs  •  wordlabs.app  •  Root: 'plan' = arrange, design, flat surface</a:t>
+              <a:t>Word Labs  •  wordlabs.app  •  Root: 'plan' = a scheme or flat surface</a:t>
             </a:r>
             <a:endParaRPr lang="en-US" sz="800" dirty="0"/>
           </a:p>
@@ -30825,7 +33349,7 @@
                 <a:ea typeface="Trebuchet MS" pitchFamily="34" charset="-122"/>
                 <a:cs typeface="Trebuchet MS" pitchFamily="34" charset="-120"/>
               </a:rPr>
-              <a:t>biplane</a:t>
+              <a:t>explanation</a:t>
             </a:r>
             <a:endParaRPr lang="en-US" sz="2800" dirty="0"/>
           </a:p>
@@ -30905,8 +33429,8 @@
         </p:nvSpPr>
         <p:spPr>
           <a:xfrm>
-            <a:off x="2938272" y="2258568"/>
-            <a:ext cx="1828800" cy="292608"/>
+            <a:off x="1989734" y="2258568"/>
+            <a:ext cx="1581912" cy="292608"/>
           </a:xfrm>
           <a:prstGeom prst="rect">
             <a:avLst>
@@ -30939,8 +33463,8 @@
         </p:nvSpPr>
         <p:spPr>
           <a:xfrm>
-            <a:off x="2938272" y="2258568"/>
-            <a:ext cx="1828800" cy="292608"/>
+            <a:off x="1989734" y="2258568"/>
+            <a:ext cx="1581912" cy="292608"/>
           </a:xfrm>
           <a:prstGeom prst="rect">
             <a:avLst/>
@@ -30964,7 +33488,7 @@
                 <a:ea typeface="Trebuchet MS" pitchFamily="34" charset="-122"/>
                 <a:cs typeface="Trebuchet MS" pitchFamily="34" charset="-120"/>
               </a:rPr>
-              <a:t>bi</a:t>
+              <a:t>ex</a:t>
             </a:r>
             <a:endParaRPr lang="en-US" sz="1300" dirty="0"/>
           </a:p>
@@ -30978,8 +33502,8 @@
         </p:nvSpPr>
         <p:spPr>
           <a:xfrm>
-            <a:off x="2938272" y="2569464"/>
-            <a:ext cx="1828800" cy="201168"/>
+            <a:off x="1989734" y="2569464"/>
+            <a:ext cx="1581912" cy="201168"/>
           </a:xfrm>
           <a:prstGeom prst="rect">
             <a:avLst/>
@@ -31003,7 +33527,7 @@
                 <a:ea typeface="Calibri" pitchFamily="34" charset="-122"/>
                 <a:cs typeface="Calibri" pitchFamily="34" charset="-120"/>
               </a:rPr>
-              <a:t>two</a:t>
+              <a:t>out or thoroughly</a:t>
             </a:r>
             <a:endParaRPr lang="en-US" sz="850" dirty="0"/>
           </a:p>
@@ -31017,8 +33541,8 @@
         </p:nvSpPr>
         <p:spPr>
           <a:xfrm>
-            <a:off x="5803392" y="2258568"/>
-            <a:ext cx="1828800" cy="292608"/>
+            <a:off x="3659429" y="2258568"/>
+            <a:ext cx="1581912" cy="292608"/>
           </a:xfrm>
           <a:prstGeom prst="rect">
             <a:avLst>
@@ -31026,11 +33550,11 @@
             </a:avLst>
           </a:prstGeom>
           <a:solidFill>
-            <a:srgbClr val="FCE7F3"/>
+            <a:srgbClr val="CCFBF1"/>
           </a:solidFill>
           <a:ln w="19050">
             <a:solidFill>
-              <a:srgbClr val="DB2777"/>
+              <a:srgbClr val="0D9488"/>
             </a:solidFill>
             <a:prstDash val="solid"/>
           </a:ln>
@@ -31051,8 +33575,8 @@
         </p:nvSpPr>
         <p:spPr>
           <a:xfrm>
-            <a:off x="5803392" y="2258568"/>
-            <a:ext cx="1828800" cy="292608"/>
+            <a:off x="3659429" y="2258568"/>
+            <a:ext cx="1581912" cy="292608"/>
           </a:xfrm>
           <a:prstGeom prst="rect">
             <a:avLst/>
@@ -31070,13 +33594,13 @@
             <a:r>
               <a:rPr lang="en-US" sz="1300" b="1" dirty="0">
                 <a:solidFill>
-                  <a:srgbClr val="9D174D"/>
+                  <a:srgbClr val="0F766E"/>
                 </a:solidFill>
                 <a:latin typeface="Trebuchet MS" pitchFamily="34" charset="0"/>
                 <a:ea typeface="Trebuchet MS" pitchFamily="34" charset="-122"/>
                 <a:cs typeface="Trebuchet MS" pitchFamily="34" charset="-120"/>
               </a:rPr>
-              <a:t>plane</a:t>
+              <a:t>plan</a:t>
             </a:r>
             <a:endParaRPr lang="en-US" sz="1300" dirty="0"/>
           </a:p>
@@ -31090,8 +33614,8 @@
         </p:nvSpPr>
         <p:spPr>
           <a:xfrm>
-            <a:off x="5803392" y="2569464"/>
-            <a:ext cx="1828800" cy="201168"/>
+            <a:off x="3659429" y="2569464"/>
+            <a:ext cx="1581912" cy="201168"/>
           </a:xfrm>
           <a:prstGeom prst="rect">
             <a:avLst/>
@@ -31115,7 +33639,7 @@
                 <a:ea typeface="Calibri" pitchFamily="34" charset="-122"/>
                 <a:cs typeface="Calibri" pitchFamily="34" charset="-120"/>
               </a:rPr>
-              <a:t>flat surface, level</a:t>
+              <a:t>a scheme or flat surface</a:t>
             </a:r>
             <a:endParaRPr lang="en-US" sz="850" dirty="0"/>
           </a:p>
@@ -31124,6 +33648,308 @@
       <p:sp>
         <p:nvSpPr>
           <p:cNvPr id="22" name="Shape 20"/>
+          <p:cNvSpPr/>
+          <p:nvPr/>
+        </p:nvSpPr>
+        <p:spPr>
+          <a:xfrm>
+            <a:off x="5329123" y="2258568"/>
+            <a:ext cx="1581912" cy="292608"/>
+          </a:xfrm>
+          <a:prstGeom prst="rect">
+            <a:avLst>
+              <a:gd name="adj" fmla="val 25000"/>
+            </a:avLst>
+          </a:prstGeom>
+          <a:solidFill>
+            <a:srgbClr val="FCE7F3"/>
+          </a:solidFill>
+          <a:ln w="19050">
+            <a:solidFill>
+              <a:srgbClr val="DB2777"/>
+            </a:solidFill>
+            <a:prstDash val="solid"/>
+          </a:ln>
+          <a:effectLst>
+            <a:outerShdw sx="100000" sy="100000" kx="0" ky="0" algn="bl" rotWithShape="0" blurRad="101600" dist="38100" dir="8100000">
+              <a:srgbClr val="000000">
+                <a:alpha val="12000"/>
+              </a:srgbClr>
+            </a:outerShdw>
+          </a:effectLst>
+        </p:spPr>
+      </p:sp>
+      <p:sp>
+        <p:nvSpPr>
+          <p:cNvPr id="23" name="Text 21"/>
+          <p:cNvSpPr/>
+          <p:nvPr/>
+        </p:nvSpPr>
+        <p:spPr>
+          <a:xfrm>
+            <a:off x="5329123" y="2258568"/>
+            <a:ext cx="1581912" cy="292608"/>
+          </a:xfrm>
+          <a:prstGeom prst="rect">
+            <a:avLst/>
+          </a:prstGeom>
+          <a:noFill/>
+          <a:ln/>
+        </p:spPr>
+        <p:txBody>
+          <a:bodyPr wrap="square" lIns="0" tIns="0" rIns="0" bIns="0" rtlCol="0" anchor="ctr"/>
+          <a:lstStyle/>
+          <a:p>
+            <a:pPr algn="ctr" indent="0" marL="0">
+              <a:buNone/>
+            </a:pPr>
+            <a:r>
+              <a:rPr lang="en-US" sz="1300" b="1" dirty="0">
+                <a:solidFill>
+                  <a:srgbClr val="9D174D"/>
+                </a:solidFill>
+                <a:latin typeface="Trebuchet MS" pitchFamily="34" charset="0"/>
+                <a:ea typeface="Trebuchet MS" pitchFamily="34" charset="-122"/>
+                <a:cs typeface="Trebuchet MS" pitchFamily="34" charset="-120"/>
+              </a:rPr>
+              <a:t>a</a:t>
+            </a:r>
+            <a:endParaRPr lang="en-US" sz="1300" dirty="0"/>
+          </a:p>
+        </p:txBody>
+      </p:sp>
+      <p:sp>
+        <p:nvSpPr>
+          <p:cNvPr id="24" name="Text 22"/>
+          <p:cNvSpPr/>
+          <p:nvPr/>
+        </p:nvSpPr>
+        <p:spPr>
+          <a:xfrm>
+            <a:off x="5329123" y="2569464"/>
+            <a:ext cx="1581912" cy="201168"/>
+          </a:xfrm>
+          <a:prstGeom prst="rect">
+            <a:avLst/>
+          </a:prstGeom>
+          <a:noFill/>
+          <a:ln/>
+        </p:spPr>
+        <p:txBody>
+          <a:bodyPr wrap="square" lIns="0" tIns="0" rIns="0" bIns="0" rtlCol="0" anchor="t"/>
+          <a:lstStyle/>
+          <a:p>
+            <a:pPr algn="ctr" indent="0" marL="0">
+              <a:buNone/>
+            </a:pPr>
+            <a:r>
+              <a:rPr lang="en-US" sz="850" dirty="0">
+                <a:solidFill>
+                  <a:srgbClr val="475569"/>
+                </a:solidFill>
+                <a:latin typeface="Calibri" pitchFamily="34" charset="0"/>
+                <a:ea typeface="Calibri" pitchFamily="34" charset="-122"/>
+                <a:cs typeface="Calibri" pitchFamily="34" charset="-120"/>
+              </a:rPr>
+              <a:t>connecting vowel</a:t>
+            </a:r>
+            <a:endParaRPr lang="en-US" sz="850" dirty="0"/>
+          </a:p>
+        </p:txBody>
+      </p:sp>
+      <p:sp>
+        <p:nvSpPr>
+          <p:cNvPr id="25" name="Text 23"/>
+          <p:cNvSpPr/>
+          <p:nvPr/>
+        </p:nvSpPr>
+        <p:spPr>
+          <a:xfrm>
+            <a:off x="5329123" y="2752344"/>
+            <a:ext cx="1581912" cy="182880"/>
+          </a:xfrm>
+          <a:prstGeom prst="rect">
+            <a:avLst/>
+          </a:prstGeom>
+          <a:noFill/>
+          <a:ln/>
+        </p:spPr>
+        <p:txBody>
+          <a:bodyPr wrap="square" lIns="0" tIns="0" rIns="0" bIns="0" rtlCol="0" anchor="t"/>
+          <a:lstStyle/>
+          <a:p>
+            <a:pPr algn="ctr" indent="0" marL="0">
+              <a:buNone/>
+            </a:pPr>
+            <a:r>
+              <a:rPr lang="en-US" sz="700" i="1" dirty="0">
+                <a:solidFill>
+                  <a:srgbClr val="94A3B8"/>
+                </a:solidFill>
+                <a:latin typeface="Calibri" pitchFamily="34" charset="0"/>
+                <a:ea typeface="Calibri" pitchFamily="34" charset="-122"/>
+                <a:cs typeface="Calibri" pitchFamily="34" charset="-120"/>
+              </a:rPr>
+              <a:t>links base to suffix</a:t>
+            </a:r>
+            <a:endParaRPr lang="en-US" sz="700" dirty="0"/>
+          </a:p>
+        </p:txBody>
+      </p:sp>
+      <p:sp>
+        <p:nvSpPr>
+          <p:cNvPr id="26" name="Shape 24"/>
+          <p:cNvSpPr/>
+          <p:nvPr/>
+        </p:nvSpPr>
+        <p:spPr>
+          <a:xfrm>
+            <a:off x="6998818" y="2258568"/>
+            <a:ext cx="1581912" cy="292608"/>
+          </a:xfrm>
+          <a:prstGeom prst="rect">
+            <a:avLst>
+              <a:gd name="adj" fmla="val 25000"/>
+            </a:avLst>
+          </a:prstGeom>
+          <a:solidFill>
+            <a:srgbClr val="FCE7F3"/>
+          </a:solidFill>
+          <a:ln w="19050">
+            <a:solidFill>
+              <a:srgbClr val="DB2777"/>
+            </a:solidFill>
+            <a:prstDash val="solid"/>
+          </a:ln>
+          <a:effectLst>
+            <a:outerShdw sx="100000" sy="100000" kx="0" ky="0" algn="bl" rotWithShape="0" blurRad="101600" dist="38100" dir="8100000">
+              <a:srgbClr val="000000">
+                <a:alpha val="12000"/>
+              </a:srgbClr>
+            </a:outerShdw>
+          </a:effectLst>
+        </p:spPr>
+      </p:sp>
+      <p:sp>
+        <p:nvSpPr>
+          <p:cNvPr id="27" name="Text 25"/>
+          <p:cNvSpPr/>
+          <p:nvPr/>
+        </p:nvSpPr>
+        <p:spPr>
+          <a:xfrm>
+            <a:off x="6998818" y="2258568"/>
+            <a:ext cx="1581912" cy="292608"/>
+          </a:xfrm>
+          <a:prstGeom prst="rect">
+            <a:avLst/>
+          </a:prstGeom>
+          <a:noFill/>
+          <a:ln/>
+        </p:spPr>
+        <p:txBody>
+          <a:bodyPr wrap="square" lIns="0" tIns="0" rIns="0" bIns="0" rtlCol="0" anchor="ctr"/>
+          <a:lstStyle/>
+          <a:p>
+            <a:pPr algn="ctr" indent="0" marL="0">
+              <a:buNone/>
+            </a:pPr>
+            <a:r>
+              <a:rPr lang="en-US" sz="1300" b="1" dirty="0">
+                <a:solidFill>
+                  <a:srgbClr val="9D174D"/>
+                </a:solidFill>
+                <a:latin typeface="Trebuchet MS" pitchFamily="34" charset="0"/>
+                <a:ea typeface="Trebuchet MS" pitchFamily="34" charset="-122"/>
+                <a:cs typeface="Trebuchet MS" pitchFamily="34" charset="-120"/>
+              </a:rPr>
+              <a:t>tion</a:t>
+            </a:r>
+            <a:endParaRPr lang="en-US" sz="1300" dirty="0"/>
+          </a:p>
+        </p:txBody>
+      </p:sp>
+      <p:sp>
+        <p:nvSpPr>
+          <p:cNvPr id="28" name="Text 26"/>
+          <p:cNvSpPr/>
+          <p:nvPr/>
+        </p:nvSpPr>
+        <p:spPr>
+          <a:xfrm>
+            <a:off x="6998818" y="2569464"/>
+            <a:ext cx="1581912" cy="201168"/>
+          </a:xfrm>
+          <a:prstGeom prst="rect">
+            <a:avLst/>
+          </a:prstGeom>
+          <a:noFill/>
+          <a:ln/>
+        </p:spPr>
+        <p:txBody>
+          <a:bodyPr wrap="square" lIns="0" tIns="0" rIns="0" bIns="0" rtlCol="0" anchor="t"/>
+          <a:lstStyle/>
+          <a:p>
+            <a:pPr algn="ctr" indent="0" marL="0">
+              <a:buNone/>
+            </a:pPr>
+            <a:r>
+              <a:rPr lang="en-US" sz="850" dirty="0">
+                <a:solidFill>
+                  <a:srgbClr val="475569"/>
+                </a:solidFill>
+                <a:latin typeface="Calibri" pitchFamily="34" charset="0"/>
+                <a:ea typeface="Calibri" pitchFamily="34" charset="-122"/>
+                <a:cs typeface="Calibri" pitchFamily="34" charset="-120"/>
+              </a:rPr>
+              <a:t>the act or result of</a:t>
+            </a:r>
+            <a:endParaRPr lang="en-US" sz="850" dirty="0"/>
+          </a:p>
+        </p:txBody>
+      </p:sp>
+      <p:sp>
+        <p:nvSpPr>
+          <p:cNvPr id="29" name="Text 27"/>
+          <p:cNvSpPr/>
+          <p:nvPr/>
+        </p:nvSpPr>
+        <p:spPr>
+          <a:xfrm>
+            <a:off x="6998818" y="2752344"/>
+            <a:ext cx="1581912" cy="182880"/>
+          </a:xfrm>
+          <a:prstGeom prst="rect">
+            <a:avLst/>
+          </a:prstGeom>
+          <a:noFill/>
+          <a:ln/>
+        </p:spPr>
+        <p:txBody>
+          <a:bodyPr wrap="square" lIns="0" tIns="0" rIns="0" bIns="0" rtlCol="0" anchor="t"/>
+          <a:lstStyle/>
+          <a:p>
+            <a:pPr algn="ctr" indent="0" marL="0">
+              <a:buNone/>
+            </a:pPr>
+            <a:r>
+              <a:rPr lang="en-US" sz="700" i="1" dirty="0">
+                <a:solidFill>
+                  <a:srgbClr val="94A3B8"/>
+                </a:solidFill>
+                <a:latin typeface="Calibri" pitchFamily="34" charset="0"/>
+                <a:ea typeface="Calibri" pitchFamily="34" charset="-122"/>
+                <a:cs typeface="Calibri" pitchFamily="34" charset="-120"/>
+              </a:rPr>
+              <a:t>ti makes /sh/ sound</a:t>
+            </a:r>
+            <a:endParaRPr lang="en-US" sz="700" dirty="0"/>
+          </a:p>
+        </p:txBody>
+      </p:sp>
+      <p:sp>
+        <p:nvSpPr>
+          <p:cNvPr id="30" name="Shape 28"/>
           <p:cNvSpPr/>
           <p:nvPr/>
         </p:nvSpPr>
@@ -31150,7 +33976,7 @@
       </p:sp>
       <p:sp>
         <p:nvSpPr>
-          <p:cNvPr id="23" name="Text 21"/>
+          <p:cNvPr id="31" name="Text 29"/>
           <p:cNvSpPr/>
           <p:nvPr/>
         </p:nvSpPr>
@@ -31189,7 +34015,7 @@
       </p:sp>
       <p:sp>
         <p:nvSpPr>
-          <p:cNvPr id="24" name="Shape 22"/>
+          <p:cNvPr id="32" name="Shape 30"/>
           <p:cNvSpPr/>
           <p:nvPr/>
         </p:nvSpPr>
@@ -31216,14 +34042,14 @@
       </p:sp>
       <p:sp>
         <p:nvSpPr>
-          <p:cNvPr id="25" name="Shape 23"/>
-          <p:cNvSpPr/>
-          <p:nvPr/>
-        </p:nvSpPr>
-        <p:spPr>
-          <a:xfrm>
-            <a:off x="2999232" y="3364992"/>
-            <a:ext cx="1645920" cy="475488"/>
+          <p:cNvPr id="33" name="Shape 31"/>
+          <p:cNvSpPr/>
+          <p:nvPr/>
+        </p:nvSpPr>
+        <p:spPr>
+          <a:xfrm>
+            <a:off x="1975104" y="3364992"/>
+            <a:ext cx="1554480" cy="475488"/>
           </a:xfrm>
           <a:prstGeom prst="rect">
             <a:avLst>
@@ -31243,14 +34069,14 @@
       </p:sp>
       <p:sp>
         <p:nvSpPr>
-          <p:cNvPr id="26" name="Text 24"/>
-          <p:cNvSpPr/>
-          <p:nvPr/>
-        </p:nvSpPr>
-        <p:spPr>
-          <a:xfrm>
-            <a:off x="2999232" y="3364992"/>
-            <a:ext cx="1645920" cy="475488"/>
+          <p:cNvPr id="34" name="Text 32"/>
+          <p:cNvSpPr/>
+          <p:nvPr/>
+        </p:nvSpPr>
+        <p:spPr>
+          <a:xfrm>
+            <a:off x="1975104" y="3364992"/>
+            <a:ext cx="1554480" cy="475488"/>
           </a:xfrm>
           <a:prstGeom prst="rect">
             <a:avLst/>
@@ -31274,7 +34100,7 @@
                 <a:ea typeface="Trebuchet MS" pitchFamily="34" charset="-122"/>
                 <a:cs typeface="Trebuchet MS" pitchFamily="34" charset="-120"/>
               </a:rPr>
-              <a:t>bi</a:t>
+              <a:t>ex</a:t>
             </a:r>
             <a:endParaRPr lang="en-US" sz="1400" dirty="0"/>
           </a:p>
@@ -31282,14 +34108,14 @@
       </p:sp>
       <p:sp>
         <p:nvSpPr>
-          <p:cNvPr id="27" name="Text 25"/>
-          <p:cNvSpPr/>
-          <p:nvPr/>
-        </p:nvSpPr>
-        <p:spPr>
-          <a:xfrm>
-            <a:off x="4645152" y="3364992"/>
-            <a:ext cx="1097280" cy="475488"/>
+          <p:cNvPr id="35" name="Text 33"/>
+          <p:cNvSpPr/>
+          <p:nvPr/>
+        </p:nvSpPr>
+        <p:spPr>
+          <a:xfrm>
+            <a:off x="3529584" y="3364992"/>
+            <a:ext cx="73152" cy="475488"/>
           </a:xfrm>
           <a:prstGeom prst="rect">
             <a:avLst/>
@@ -31321,14 +34147,14 @@
       </p:sp>
       <p:sp>
         <p:nvSpPr>
-          <p:cNvPr id="28" name="Shape 26"/>
-          <p:cNvSpPr/>
-          <p:nvPr/>
-        </p:nvSpPr>
-        <p:spPr>
-          <a:xfrm>
-            <a:off x="5742432" y="3364992"/>
-            <a:ext cx="1645920" cy="475488"/>
+          <p:cNvPr id="36" name="Shape 34"/>
+          <p:cNvSpPr/>
+          <p:nvPr/>
+        </p:nvSpPr>
+        <p:spPr>
+          <a:xfrm>
+            <a:off x="3602736" y="3364992"/>
+            <a:ext cx="1554480" cy="475488"/>
           </a:xfrm>
           <a:prstGeom prst="rect">
             <a:avLst>
@@ -31348,14 +34174,14 @@
       </p:sp>
       <p:sp>
         <p:nvSpPr>
-          <p:cNvPr id="29" name="Text 27"/>
-          <p:cNvSpPr/>
-          <p:nvPr/>
-        </p:nvSpPr>
-        <p:spPr>
-          <a:xfrm>
-            <a:off x="5742432" y="3364992"/>
-            <a:ext cx="1645920" cy="475488"/>
+          <p:cNvPr id="37" name="Text 35"/>
+          <p:cNvSpPr/>
+          <p:nvPr/>
+        </p:nvSpPr>
+        <p:spPr>
+          <a:xfrm>
+            <a:off x="3602736" y="3364992"/>
+            <a:ext cx="1554480" cy="475488"/>
           </a:xfrm>
           <a:prstGeom prst="rect">
             <a:avLst/>
@@ -31379,7 +34205,7 @@
                 <a:ea typeface="Trebuchet MS" pitchFamily="34" charset="-122"/>
                 <a:cs typeface="Trebuchet MS" pitchFamily="34" charset="-120"/>
               </a:rPr>
-              <a:t>plane</a:t>
+              <a:t>plan</a:t>
             </a:r>
             <a:endParaRPr lang="en-US" sz="1400" dirty="0"/>
           </a:p>
@@ -31387,7 +34213,217 @@
       </p:sp>
       <p:sp>
         <p:nvSpPr>
-          <p:cNvPr id="30" name="Shape 28"/>
+          <p:cNvPr id="38" name="Text 36"/>
+          <p:cNvSpPr/>
+          <p:nvPr/>
+        </p:nvSpPr>
+        <p:spPr>
+          <a:xfrm>
+            <a:off x="5157216" y="3364992"/>
+            <a:ext cx="73152" cy="475488"/>
+          </a:xfrm>
+          <a:prstGeom prst="rect">
+            <a:avLst/>
+          </a:prstGeom>
+          <a:noFill/>
+          <a:ln/>
+        </p:spPr>
+        <p:txBody>
+          <a:bodyPr wrap="square" lIns="0" tIns="0" rIns="0" bIns="0" rtlCol="0" anchor="ctr"/>
+          <a:lstStyle/>
+          <a:p>
+            <a:pPr algn="ctr" indent="0" marL="0">
+              <a:buNone/>
+            </a:pPr>
+            <a:r>
+              <a:rPr lang="en-US" sz="1600" b="1" dirty="0">
+                <a:solidFill>
+                  <a:srgbClr val="0D9488"/>
+                </a:solidFill>
+                <a:latin typeface="Trebuchet MS" pitchFamily="34" charset="0"/>
+                <a:ea typeface="Trebuchet MS" pitchFamily="34" charset="-122"/>
+                <a:cs typeface="Trebuchet MS" pitchFamily="34" charset="-120"/>
+              </a:rPr>
+              <a:t>·</a:t>
+            </a:r>
+            <a:endParaRPr lang="en-US" sz="1600" dirty="0"/>
+          </a:p>
+        </p:txBody>
+      </p:sp>
+      <p:sp>
+        <p:nvSpPr>
+          <p:cNvPr id="39" name="Shape 37"/>
+          <p:cNvSpPr/>
+          <p:nvPr/>
+        </p:nvSpPr>
+        <p:spPr>
+          <a:xfrm>
+            <a:off x="5230368" y="3364992"/>
+            <a:ext cx="1554480" cy="475488"/>
+          </a:xfrm>
+          <a:prstGeom prst="rect">
+            <a:avLst>
+              <a:gd name="adj" fmla="val 9615"/>
+            </a:avLst>
+          </a:prstGeom>
+          <a:solidFill>
+            <a:srgbClr val="FFFFFF"/>
+          </a:solidFill>
+          <a:ln w="12700">
+            <a:solidFill>
+              <a:srgbClr val="0D9488"/>
+            </a:solidFill>
+            <a:prstDash val="solid"/>
+          </a:ln>
+        </p:spPr>
+      </p:sp>
+      <p:sp>
+        <p:nvSpPr>
+          <p:cNvPr id="40" name="Text 38"/>
+          <p:cNvSpPr/>
+          <p:nvPr/>
+        </p:nvSpPr>
+        <p:spPr>
+          <a:xfrm>
+            <a:off x="5230368" y="3364992"/>
+            <a:ext cx="1554480" cy="475488"/>
+          </a:xfrm>
+          <a:prstGeom prst="rect">
+            <a:avLst/>
+          </a:prstGeom>
+          <a:noFill/>
+          <a:ln/>
+        </p:spPr>
+        <p:txBody>
+          <a:bodyPr wrap="square" lIns="0" tIns="0" rIns="0" bIns="0" rtlCol="0" anchor="ctr"/>
+          <a:lstStyle/>
+          <a:p>
+            <a:pPr algn="ctr" indent="0" marL="0">
+              <a:buNone/>
+            </a:pPr>
+            <a:r>
+              <a:rPr lang="en-US" sz="1400" b="1" dirty="0">
+                <a:solidFill>
+                  <a:srgbClr val="0D9488"/>
+                </a:solidFill>
+                <a:latin typeface="Trebuchet MS" pitchFamily="34" charset="0"/>
+                <a:ea typeface="Trebuchet MS" pitchFamily="34" charset="-122"/>
+                <a:cs typeface="Trebuchet MS" pitchFamily="34" charset="-120"/>
+              </a:rPr>
+              <a:t>a</a:t>
+            </a:r>
+            <a:endParaRPr lang="en-US" sz="1400" dirty="0"/>
+          </a:p>
+        </p:txBody>
+      </p:sp>
+      <p:sp>
+        <p:nvSpPr>
+          <p:cNvPr id="41" name="Text 39"/>
+          <p:cNvSpPr/>
+          <p:nvPr/>
+        </p:nvSpPr>
+        <p:spPr>
+          <a:xfrm>
+            <a:off x="6784848" y="3364992"/>
+            <a:ext cx="73152" cy="475488"/>
+          </a:xfrm>
+          <a:prstGeom prst="rect">
+            <a:avLst/>
+          </a:prstGeom>
+          <a:noFill/>
+          <a:ln/>
+        </p:spPr>
+        <p:txBody>
+          <a:bodyPr wrap="square" lIns="0" tIns="0" rIns="0" bIns="0" rtlCol="0" anchor="ctr"/>
+          <a:lstStyle/>
+          <a:p>
+            <a:pPr algn="ctr" indent="0" marL="0">
+              <a:buNone/>
+            </a:pPr>
+            <a:r>
+              <a:rPr lang="en-US" sz="1600" b="1" dirty="0">
+                <a:solidFill>
+                  <a:srgbClr val="0D9488"/>
+                </a:solidFill>
+                <a:latin typeface="Trebuchet MS" pitchFamily="34" charset="0"/>
+                <a:ea typeface="Trebuchet MS" pitchFamily="34" charset="-122"/>
+                <a:cs typeface="Trebuchet MS" pitchFamily="34" charset="-120"/>
+              </a:rPr>
+              <a:t>·</a:t>
+            </a:r>
+            <a:endParaRPr lang="en-US" sz="1600" dirty="0"/>
+          </a:p>
+        </p:txBody>
+      </p:sp>
+      <p:sp>
+        <p:nvSpPr>
+          <p:cNvPr id="42" name="Shape 40"/>
+          <p:cNvSpPr/>
+          <p:nvPr/>
+        </p:nvSpPr>
+        <p:spPr>
+          <a:xfrm>
+            <a:off x="6858000" y="3364992"/>
+            <a:ext cx="1554480" cy="475488"/>
+          </a:xfrm>
+          <a:prstGeom prst="rect">
+            <a:avLst>
+              <a:gd name="adj" fmla="val 9615"/>
+            </a:avLst>
+          </a:prstGeom>
+          <a:solidFill>
+            <a:srgbClr val="FFFFFF"/>
+          </a:solidFill>
+          <a:ln w="12700">
+            <a:solidFill>
+              <a:srgbClr val="0D9488"/>
+            </a:solidFill>
+            <a:prstDash val="solid"/>
+          </a:ln>
+        </p:spPr>
+      </p:sp>
+      <p:sp>
+        <p:nvSpPr>
+          <p:cNvPr id="43" name="Text 41"/>
+          <p:cNvSpPr/>
+          <p:nvPr/>
+        </p:nvSpPr>
+        <p:spPr>
+          <a:xfrm>
+            <a:off x="6858000" y="3364992"/>
+            <a:ext cx="1554480" cy="475488"/>
+          </a:xfrm>
+          <a:prstGeom prst="rect">
+            <a:avLst/>
+          </a:prstGeom>
+          <a:noFill/>
+          <a:ln/>
+        </p:spPr>
+        <p:txBody>
+          <a:bodyPr wrap="square" lIns="0" tIns="0" rIns="0" bIns="0" rtlCol="0" anchor="ctr"/>
+          <a:lstStyle/>
+          <a:p>
+            <a:pPr algn="ctr" indent="0" marL="0">
+              <a:buNone/>
+            </a:pPr>
+            <a:r>
+              <a:rPr lang="en-US" sz="1400" b="1" dirty="0">
+                <a:solidFill>
+                  <a:srgbClr val="0D9488"/>
+                </a:solidFill>
+                <a:latin typeface="Trebuchet MS" pitchFamily="34" charset="0"/>
+                <a:ea typeface="Trebuchet MS" pitchFamily="34" charset="-122"/>
+                <a:cs typeface="Trebuchet MS" pitchFamily="34" charset="-120"/>
+              </a:rPr>
+              <a:t>tion</a:t>
+            </a:r>
+            <a:endParaRPr lang="en-US" sz="1400" dirty="0"/>
+          </a:p>
+        </p:txBody>
+      </p:sp>
+      <p:sp>
+        <p:nvSpPr>
+          <p:cNvPr id="44" name="Shape 42"/>
           <p:cNvSpPr/>
           <p:nvPr/>
         </p:nvSpPr>
@@ -31414,7 +34450,7 @@
       </p:sp>
       <p:sp>
         <p:nvSpPr>
-          <p:cNvPr id="31" name="Text 29"/>
+          <p:cNvPr id="45" name="Text 43"/>
           <p:cNvSpPr/>
           <p:nvPr/>
         </p:nvSpPr>
@@ -31453,18 +34489,18 @@
       </p:sp>
       <p:sp>
         <p:nvSpPr>
-          <p:cNvPr id="32" name="Shape 30"/>
+          <p:cNvPr id="46" name="Shape 44"/>
           <p:cNvSpPr/>
           <p:nvPr/>
         </p:nvSpPr>
         <p:spPr>
           <a:xfrm>
             <a:off x="1874520" y="4096512"/>
-            <a:ext cx="6903720" cy="658368"/>
+            <a:ext cx="6903720" cy="804672"/>
           </a:xfrm>
           <a:prstGeom prst="rect">
             <a:avLst>
-              <a:gd name="adj" fmla="val 8333"/>
+              <a:gd name="adj" fmla="val 6818"/>
             </a:avLst>
           </a:prstGeom>
           <a:solidFill>
@@ -31480,18 +34516,18 @@
       </p:sp>
       <p:sp>
         <p:nvSpPr>
-          <p:cNvPr id="33" name="Shape 31"/>
-          <p:cNvSpPr/>
-          <p:nvPr/>
-        </p:nvSpPr>
-        <p:spPr>
-          <a:xfrm>
-            <a:off x="2254649" y="4169664"/>
-            <a:ext cx="685800" cy="475488"/>
+          <p:cNvPr id="47" name="Shape 45"/>
+          <p:cNvSpPr/>
+          <p:nvPr/>
+        </p:nvSpPr>
+        <p:spPr>
+          <a:xfrm>
+            <a:off x="1951330" y="4169664"/>
+            <a:ext cx="676656" cy="384048"/>
           </a:xfrm>
           <a:prstGeom prst="rect">
             <a:avLst>
-              <a:gd name="adj" fmla="val 7692"/>
+              <a:gd name="adj" fmla="val 9524"/>
             </a:avLst>
           </a:prstGeom>
           <a:solidFill>
@@ -31507,14 +34543,14 @@
       </p:sp>
       <p:sp>
         <p:nvSpPr>
-          <p:cNvPr id="34" name="Text 32"/>
-          <p:cNvSpPr/>
-          <p:nvPr/>
-        </p:nvSpPr>
-        <p:spPr>
-          <a:xfrm>
-            <a:off x="2254649" y="4169664"/>
-            <a:ext cx="685800" cy="475488"/>
+          <p:cNvPr id="48" name="Text 46"/>
+          <p:cNvSpPr/>
+          <p:nvPr/>
+        </p:nvSpPr>
+        <p:spPr>
+          <a:xfrm>
+            <a:off x="1951330" y="4169664"/>
+            <a:ext cx="676656" cy="384048"/>
           </a:xfrm>
           <a:prstGeom prst="rect">
             <a:avLst/>
@@ -31538,7 +34574,7 @@
                 <a:ea typeface="Trebuchet MS" pitchFamily="34" charset="-122"/>
                 <a:cs typeface="Trebuchet MS" pitchFamily="34" charset="-120"/>
               </a:rPr>
-              <a:t>b</a:t>
+              <a:t>e</a:t>
             </a:r>
             <a:endParaRPr lang="en-US" sz="900" dirty="0"/>
           </a:p>
@@ -31546,18 +34582,18 @@
       </p:sp>
       <p:sp>
         <p:nvSpPr>
-          <p:cNvPr id="35" name="Shape 33"/>
-          <p:cNvSpPr/>
-          <p:nvPr/>
-        </p:nvSpPr>
-        <p:spPr>
-          <a:xfrm>
-            <a:off x="3293146" y="4169664"/>
-            <a:ext cx="685800" cy="475488"/>
+          <p:cNvPr id="49" name="Shape 47"/>
+          <p:cNvSpPr/>
+          <p:nvPr/>
+        </p:nvSpPr>
+        <p:spPr>
+          <a:xfrm>
+            <a:off x="2677363" y="4169664"/>
+            <a:ext cx="676656" cy="384048"/>
           </a:xfrm>
           <a:prstGeom prst="rect">
             <a:avLst>
-              <a:gd name="adj" fmla="val 7692"/>
+              <a:gd name="adj" fmla="val 9524"/>
             </a:avLst>
           </a:prstGeom>
           <a:solidFill>
@@ -31573,14 +34609,14 @@
       </p:sp>
       <p:sp>
         <p:nvSpPr>
-          <p:cNvPr id="36" name="Text 34"/>
-          <p:cNvSpPr/>
-          <p:nvPr/>
-        </p:nvSpPr>
-        <p:spPr>
-          <a:xfrm>
-            <a:off x="3293146" y="4169664"/>
-            <a:ext cx="685800" cy="475488"/>
+          <p:cNvPr id="50" name="Text 48"/>
+          <p:cNvSpPr/>
+          <p:nvPr/>
+        </p:nvSpPr>
+        <p:spPr>
+          <a:xfrm>
+            <a:off x="2677363" y="4169664"/>
+            <a:ext cx="676656" cy="384048"/>
           </a:xfrm>
           <a:prstGeom prst="rect">
             <a:avLst/>
@@ -31604,7 +34640,7 @@
                 <a:ea typeface="Trebuchet MS" pitchFamily="34" charset="-122"/>
                 <a:cs typeface="Trebuchet MS" pitchFamily="34" charset="-120"/>
               </a:rPr>
-              <a:t>i</a:t>
+              <a:t>x</a:t>
             </a:r>
             <a:endParaRPr lang="en-US" sz="900" dirty="0"/>
           </a:p>
@@ -31612,18 +34648,18 @@
       </p:sp>
       <p:sp>
         <p:nvSpPr>
-          <p:cNvPr id="37" name="Shape 35"/>
-          <p:cNvSpPr/>
-          <p:nvPr/>
-        </p:nvSpPr>
-        <p:spPr>
-          <a:xfrm>
-            <a:off x="4331643" y="4169664"/>
-            <a:ext cx="685800" cy="475488"/>
+          <p:cNvPr id="51" name="Shape 49"/>
+          <p:cNvSpPr/>
+          <p:nvPr/>
+        </p:nvSpPr>
+        <p:spPr>
+          <a:xfrm>
+            <a:off x="3403397" y="4169664"/>
+            <a:ext cx="676656" cy="384048"/>
           </a:xfrm>
           <a:prstGeom prst="rect">
             <a:avLst>
-              <a:gd name="adj" fmla="val 7692"/>
+              <a:gd name="adj" fmla="val 9524"/>
             </a:avLst>
           </a:prstGeom>
           <a:solidFill>
@@ -31639,14 +34675,14 @@
       </p:sp>
       <p:sp>
         <p:nvSpPr>
-          <p:cNvPr id="38" name="Text 36"/>
-          <p:cNvSpPr/>
-          <p:nvPr/>
-        </p:nvSpPr>
-        <p:spPr>
-          <a:xfrm>
-            <a:off x="4331643" y="4169664"/>
-            <a:ext cx="685800" cy="475488"/>
+          <p:cNvPr id="52" name="Text 50"/>
+          <p:cNvSpPr/>
+          <p:nvPr/>
+        </p:nvSpPr>
+        <p:spPr>
+          <a:xfrm>
+            <a:off x="3403397" y="4169664"/>
+            <a:ext cx="676656" cy="384048"/>
           </a:xfrm>
           <a:prstGeom prst="rect">
             <a:avLst/>
@@ -31678,18 +34714,18 @@
       </p:sp>
       <p:sp>
         <p:nvSpPr>
-          <p:cNvPr id="39" name="Shape 37"/>
-          <p:cNvSpPr/>
-          <p:nvPr/>
-        </p:nvSpPr>
-        <p:spPr>
-          <a:xfrm>
-            <a:off x="5370141" y="4169664"/>
-            <a:ext cx="685800" cy="475488"/>
+          <p:cNvPr id="53" name="Shape 51"/>
+          <p:cNvSpPr/>
+          <p:nvPr/>
+        </p:nvSpPr>
+        <p:spPr>
+          <a:xfrm>
+            <a:off x="4129430" y="4169664"/>
+            <a:ext cx="676656" cy="384048"/>
           </a:xfrm>
           <a:prstGeom prst="rect">
             <a:avLst>
-              <a:gd name="adj" fmla="val 7692"/>
+              <a:gd name="adj" fmla="val 9524"/>
             </a:avLst>
           </a:prstGeom>
           <a:solidFill>
@@ -31705,14 +34741,14 @@
       </p:sp>
       <p:sp>
         <p:nvSpPr>
-          <p:cNvPr id="40" name="Text 38"/>
-          <p:cNvSpPr/>
-          <p:nvPr/>
-        </p:nvSpPr>
-        <p:spPr>
-          <a:xfrm>
-            <a:off x="5370141" y="4169664"/>
-            <a:ext cx="685800" cy="475488"/>
+          <p:cNvPr id="54" name="Text 52"/>
+          <p:cNvSpPr/>
+          <p:nvPr/>
+        </p:nvSpPr>
+        <p:spPr>
+          <a:xfrm>
+            <a:off x="4129430" y="4169664"/>
+            <a:ext cx="676656" cy="384048"/>
           </a:xfrm>
           <a:prstGeom prst="rect">
             <a:avLst/>
@@ -31744,18 +34780,18 @@
       </p:sp>
       <p:sp>
         <p:nvSpPr>
-          <p:cNvPr id="41" name="Shape 39"/>
-          <p:cNvSpPr/>
-          <p:nvPr/>
-        </p:nvSpPr>
-        <p:spPr>
-          <a:xfrm>
-            <a:off x="6408638" y="4169664"/>
-            <a:ext cx="685800" cy="475488"/>
+          <p:cNvPr id="55" name="Shape 53"/>
+          <p:cNvSpPr/>
+          <p:nvPr/>
+        </p:nvSpPr>
+        <p:spPr>
+          <a:xfrm>
+            <a:off x="4855464" y="4169664"/>
+            <a:ext cx="676656" cy="384048"/>
           </a:xfrm>
           <a:prstGeom prst="rect">
             <a:avLst>
-              <a:gd name="adj" fmla="val 7692"/>
+              <a:gd name="adj" fmla="val 9524"/>
             </a:avLst>
           </a:prstGeom>
           <a:solidFill>
@@ -31771,14 +34807,14 @@
       </p:sp>
       <p:sp>
         <p:nvSpPr>
-          <p:cNvPr id="42" name="Text 40"/>
-          <p:cNvSpPr/>
-          <p:nvPr/>
-        </p:nvSpPr>
-        <p:spPr>
-          <a:xfrm>
-            <a:off x="6408638" y="4169664"/>
-            <a:ext cx="685800" cy="475488"/>
+          <p:cNvPr id="56" name="Text 54"/>
+          <p:cNvSpPr/>
+          <p:nvPr/>
+        </p:nvSpPr>
+        <p:spPr>
+          <a:xfrm>
+            <a:off x="4855464" y="4169664"/>
+            <a:ext cx="676656" cy="384048"/>
           </a:xfrm>
           <a:prstGeom prst="rect">
             <a:avLst/>
@@ -31810,18 +34846,18 @@
       </p:sp>
       <p:sp>
         <p:nvSpPr>
-          <p:cNvPr id="43" name="Shape 41"/>
-          <p:cNvSpPr/>
-          <p:nvPr/>
-        </p:nvSpPr>
-        <p:spPr>
-          <a:xfrm>
-            <a:off x="7447135" y="4169664"/>
-            <a:ext cx="685800" cy="475488"/>
+          <p:cNvPr id="57" name="Shape 55"/>
+          <p:cNvSpPr/>
+          <p:nvPr/>
+        </p:nvSpPr>
+        <p:spPr>
+          <a:xfrm>
+            <a:off x="5581498" y="4169664"/>
+            <a:ext cx="676656" cy="384048"/>
           </a:xfrm>
           <a:prstGeom prst="rect">
             <a:avLst>
-              <a:gd name="adj" fmla="val 7692"/>
+              <a:gd name="adj" fmla="val 9524"/>
             </a:avLst>
           </a:prstGeom>
           <a:solidFill>
@@ -31837,14 +34873,14 @@
       </p:sp>
       <p:sp>
         <p:nvSpPr>
-          <p:cNvPr id="44" name="Text 42"/>
-          <p:cNvSpPr/>
-          <p:nvPr/>
-        </p:nvSpPr>
-        <p:spPr>
-          <a:xfrm>
-            <a:off x="7447135" y="4169664"/>
-            <a:ext cx="685800" cy="475488"/>
+          <p:cNvPr id="58" name="Text 56"/>
+          <p:cNvSpPr/>
+          <p:nvPr/>
+        </p:nvSpPr>
+        <p:spPr>
+          <a:xfrm>
+            <a:off x="5581498" y="4169664"/>
+            <a:ext cx="676656" cy="384048"/>
           </a:xfrm>
           <a:prstGeom prst="rect">
             <a:avLst/>
@@ -31868,7 +34904,244 @@
                 <a:ea typeface="Trebuchet MS" pitchFamily="34" charset="-122"/>
                 <a:cs typeface="Trebuchet MS" pitchFamily="34" charset="-120"/>
               </a:rPr>
-              <a:t>e</a:t>
+              <a:t>a</a:t>
+            </a:r>
+            <a:endParaRPr lang="en-US" sz="900" dirty="0"/>
+          </a:p>
+        </p:txBody>
+      </p:sp>
+      <p:sp>
+        <p:nvSpPr>
+          <p:cNvPr id="59" name="Shape 57"/>
+          <p:cNvSpPr/>
+          <p:nvPr/>
+        </p:nvSpPr>
+        <p:spPr>
+          <a:xfrm>
+            <a:off x="6307531" y="4169664"/>
+            <a:ext cx="676656" cy="384048"/>
+          </a:xfrm>
+          <a:prstGeom prst="rect">
+            <a:avLst>
+              <a:gd name="adj" fmla="val 9524"/>
+            </a:avLst>
+          </a:prstGeom>
+          <a:solidFill>
+            <a:srgbClr val="FFFFFF"/>
+          </a:solidFill>
+          <a:ln w="12700">
+            <a:solidFill>
+              <a:srgbClr val="DB2777"/>
+            </a:solidFill>
+            <a:prstDash val="solid"/>
+          </a:ln>
+        </p:spPr>
+      </p:sp>
+      <p:sp>
+        <p:nvSpPr>
+          <p:cNvPr id="60" name="Text 58"/>
+          <p:cNvSpPr/>
+          <p:nvPr/>
+        </p:nvSpPr>
+        <p:spPr>
+          <a:xfrm>
+            <a:off x="6307531" y="4169664"/>
+            <a:ext cx="676656" cy="384048"/>
+          </a:xfrm>
+          <a:prstGeom prst="rect">
+            <a:avLst/>
+          </a:prstGeom>
+          <a:noFill/>
+          <a:ln/>
+        </p:spPr>
+        <p:txBody>
+          <a:bodyPr wrap="square" lIns="0" tIns="0" rIns="0" bIns="0" rtlCol="0" anchor="ctr"/>
+          <a:lstStyle/>
+          <a:p>
+            <a:pPr algn="ctr" indent="0" marL="0">
+              <a:buNone/>
+            </a:pPr>
+            <a:r>
+              <a:rPr lang="en-US" sz="900" b="1" dirty="0">
+                <a:solidFill>
+                  <a:srgbClr val="9D174D"/>
+                </a:solidFill>
+                <a:latin typeface="Trebuchet MS" pitchFamily="34" charset="0"/>
+                <a:ea typeface="Trebuchet MS" pitchFamily="34" charset="-122"/>
+                <a:cs typeface="Trebuchet MS" pitchFamily="34" charset="-120"/>
+              </a:rPr>
+              <a:t>t</a:t>
+            </a:r>
+            <a:endParaRPr lang="en-US" sz="900" dirty="0"/>
+          </a:p>
+        </p:txBody>
+      </p:sp>
+      <p:sp>
+        <p:nvSpPr>
+          <p:cNvPr id="61" name="Text 59"/>
+          <p:cNvSpPr/>
+          <p:nvPr/>
+        </p:nvSpPr>
+        <p:spPr>
+          <a:xfrm>
+            <a:off x="6307531" y="4572000"/>
+            <a:ext cx="676656" cy="219456"/>
+          </a:xfrm>
+          <a:prstGeom prst="rect">
+            <a:avLst/>
+          </a:prstGeom>
+          <a:noFill/>
+          <a:ln/>
+        </p:spPr>
+        <p:txBody>
+          <a:bodyPr wrap="square" lIns="0" tIns="0" rIns="0" bIns="0" rtlCol="0" anchor="t"/>
+          <a:lstStyle/>
+          <a:p>
+            <a:pPr algn="ctr" indent="0" marL="0">
+              <a:buNone/>
+            </a:pPr>
+            <a:r>
+              <a:rPr lang="en-US" sz="750" i="1" dirty="0">
+                <a:solidFill>
+                  <a:srgbClr val="94A3B8"/>
+                </a:solidFill>
+                <a:latin typeface="Calibri" pitchFamily="34" charset="0"/>
+                <a:ea typeface="Calibri" pitchFamily="34" charset="-122"/>
+                <a:cs typeface="Calibri" pitchFamily="34" charset="-120"/>
+              </a:rPr>
+              <a:t>/sh/</a:t>
+            </a:r>
+            <a:endParaRPr lang="en-US" sz="750" dirty="0"/>
+          </a:p>
+        </p:txBody>
+      </p:sp>
+      <p:sp>
+        <p:nvSpPr>
+          <p:cNvPr id="62" name="Shape 60"/>
+          <p:cNvSpPr/>
+          <p:nvPr/>
+        </p:nvSpPr>
+        <p:spPr>
+          <a:xfrm>
+            <a:off x="7033565" y="4169664"/>
+            <a:ext cx="676656" cy="384048"/>
+          </a:xfrm>
+          <a:prstGeom prst="rect">
+            <a:avLst>
+              <a:gd name="adj" fmla="val 9524"/>
+            </a:avLst>
+          </a:prstGeom>
+          <a:solidFill>
+            <a:srgbClr val="FFFFFF"/>
+          </a:solidFill>
+          <a:ln w="12700">
+            <a:solidFill>
+              <a:srgbClr val="DB2777"/>
+            </a:solidFill>
+            <a:prstDash val="solid"/>
+          </a:ln>
+        </p:spPr>
+      </p:sp>
+      <p:sp>
+        <p:nvSpPr>
+          <p:cNvPr id="63" name="Text 61"/>
+          <p:cNvSpPr/>
+          <p:nvPr/>
+        </p:nvSpPr>
+        <p:spPr>
+          <a:xfrm>
+            <a:off x="7033565" y="4169664"/>
+            <a:ext cx="676656" cy="384048"/>
+          </a:xfrm>
+          <a:prstGeom prst="rect">
+            <a:avLst/>
+          </a:prstGeom>
+          <a:noFill/>
+          <a:ln/>
+        </p:spPr>
+        <p:txBody>
+          <a:bodyPr wrap="square" lIns="0" tIns="0" rIns="0" bIns="0" rtlCol="0" anchor="ctr"/>
+          <a:lstStyle/>
+          <a:p>
+            <a:pPr algn="ctr" indent="0" marL="0">
+              <a:buNone/>
+            </a:pPr>
+            <a:r>
+              <a:rPr lang="en-US" sz="900" b="1" dirty="0">
+                <a:solidFill>
+                  <a:srgbClr val="9D174D"/>
+                </a:solidFill>
+                <a:latin typeface="Trebuchet MS" pitchFamily="34" charset="0"/>
+                <a:ea typeface="Trebuchet MS" pitchFamily="34" charset="-122"/>
+                <a:cs typeface="Trebuchet MS" pitchFamily="34" charset="-120"/>
+              </a:rPr>
+              <a:t>io</a:t>
+            </a:r>
+            <a:endParaRPr lang="en-US" sz="900" dirty="0"/>
+          </a:p>
+        </p:txBody>
+      </p:sp>
+      <p:sp>
+        <p:nvSpPr>
+          <p:cNvPr id="64" name="Shape 62"/>
+          <p:cNvSpPr/>
+          <p:nvPr/>
+        </p:nvSpPr>
+        <p:spPr>
+          <a:xfrm>
+            <a:off x="7759598" y="4169664"/>
+            <a:ext cx="676656" cy="384048"/>
+          </a:xfrm>
+          <a:prstGeom prst="rect">
+            <a:avLst>
+              <a:gd name="adj" fmla="val 9524"/>
+            </a:avLst>
+          </a:prstGeom>
+          <a:solidFill>
+            <a:srgbClr val="FFFFFF"/>
+          </a:solidFill>
+          <a:ln w="12700">
+            <a:solidFill>
+              <a:srgbClr val="DB2777"/>
+            </a:solidFill>
+            <a:prstDash val="solid"/>
+          </a:ln>
+        </p:spPr>
+      </p:sp>
+      <p:sp>
+        <p:nvSpPr>
+          <p:cNvPr id="65" name="Text 63"/>
+          <p:cNvSpPr/>
+          <p:nvPr/>
+        </p:nvSpPr>
+        <p:spPr>
+          <a:xfrm>
+            <a:off x="7759598" y="4169664"/>
+            <a:ext cx="676656" cy="384048"/>
+          </a:xfrm>
+          <a:prstGeom prst="rect">
+            <a:avLst/>
+          </a:prstGeom>
+          <a:noFill/>
+          <a:ln/>
+        </p:spPr>
+        <p:txBody>
+          <a:bodyPr wrap="square" lIns="0" tIns="0" rIns="0" bIns="0" rtlCol="0" anchor="ctr"/>
+          <a:lstStyle/>
+          <a:p>
+            <a:pPr algn="ctr" indent="0" marL="0">
+              <a:buNone/>
+            </a:pPr>
+            <a:r>
+              <a:rPr lang="en-US" sz="900" b="1" dirty="0">
+                <a:solidFill>
+                  <a:srgbClr val="9D174D"/>
+                </a:solidFill>
+                <a:latin typeface="Trebuchet MS" pitchFamily="34" charset="0"/>
+                <a:ea typeface="Trebuchet MS" pitchFamily="34" charset="-122"/>
+                <a:cs typeface="Trebuchet MS" pitchFamily="34" charset="-120"/>
+              </a:rPr>
+              <a:t>n</a:t>
             </a:r>
             <a:endParaRPr lang="en-US" sz="900" dirty="0"/>
           </a:p>
@@ -32160,7 +35433,7 @@
                 <a:ea typeface="Calibri" pitchFamily="34" charset="-122"/>
                 <a:cs typeface="Calibri" pitchFamily="34" charset="-120"/>
               </a:rPr>
-              <a:t>Word Labs  •  wordlabs.app  •  Root: 'plan' = arrange, design, flat surface</a:t>
+              <a:t>Word Labs  •  wordlabs.app  •  Root: 'plan' = a scheme or flat surface</a:t>
             </a:r>
             <a:endParaRPr lang="en-US" sz="800" dirty="0"/>
           </a:p>
@@ -33329,7 +36602,7 @@
                 <a:ea typeface="Calibri" pitchFamily="34" charset="-122"/>
                 <a:cs typeface="Calibri" pitchFamily="34" charset="-120"/>
               </a:rPr>
-              <a:t>Word Labs  •  wordlabs.app  •  Root: 'plan' = arrange, design, flat surface</a:t>
+              <a:t>Word Labs  •  wordlabs.app  •  Root: 'plan' = a scheme or flat surface</a:t>
             </a:r>
             <a:endParaRPr lang="en-US" sz="800" dirty="0"/>
           </a:p>
@@ -33630,7 +36903,7 @@
                 <a:ea typeface="Trebuchet MS" pitchFamily="34" charset="-122"/>
                 <a:cs typeface="Trebuchet MS" pitchFamily="34" charset="-120"/>
               </a:rPr>
-              <a:t>ex-</a:t>
+              <a:t>re-</a:t>
             </a:r>
             <a:endParaRPr lang="en-US" sz="1300" dirty="0"/>
           </a:p>
@@ -33758,7 +37031,7 @@
                 <a:ea typeface="Trebuchet MS" pitchFamily="34" charset="-122"/>
                 <a:cs typeface="Trebuchet MS" pitchFamily="34" charset="-120"/>
               </a:rPr>
-              <a:t>-ned</a:t>
+              <a:t>-ed</a:t>
             </a:r>
             <a:endParaRPr lang="en-US" sz="1300" dirty="0"/>
           </a:p>
@@ -33822,7 +37095,7 @@
                 <a:ea typeface="Trebuchet MS" pitchFamily="34" charset="-122"/>
                 <a:cs typeface="Trebuchet MS" pitchFamily="34" charset="-120"/>
               </a:rPr>
-              <a:t>bi-</a:t>
+              <a:t>un-</a:t>
             </a:r>
             <a:endParaRPr lang="en-US" sz="1300" dirty="0"/>
           </a:p>
@@ -33911,7 +37184,7 @@
                 <a:ea typeface="Trebuchet MS" pitchFamily="34" charset="-122"/>
                 <a:cs typeface="Trebuchet MS" pitchFamily="34" charset="-120"/>
               </a:rPr>
-              <a:t>-ning</a:t>
+              <a:t>-ing</a:t>
             </a:r>
             <a:endParaRPr lang="en-US" sz="1300" dirty="0"/>
           </a:p>
@@ -33975,7 +37248,7 @@
                 <a:ea typeface="Trebuchet MS" pitchFamily="34" charset="-122"/>
                 <a:cs typeface="Trebuchet MS" pitchFamily="34" charset="-120"/>
               </a:rPr>
-              <a:t>air-</a:t>
+              <a:t>out-</a:t>
             </a:r>
             <a:endParaRPr lang="en-US" sz="1300" dirty="0"/>
           </a:p>
@@ -34064,7 +37337,7 @@
                 <a:ea typeface="Trebuchet MS" pitchFamily="34" charset="-122"/>
                 <a:cs typeface="Trebuchet MS" pitchFamily="34" charset="-120"/>
               </a:rPr>
-              <a:t>-ner</a:t>
+              <a:t>-er</a:t>
             </a:r>
             <a:endParaRPr lang="en-US" sz="1300" dirty="0"/>
           </a:p>
@@ -34128,7 +37401,7 @@
                 <a:ea typeface="Trebuchet MS" pitchFamily="34" charset="-122"/>
                 <a:cs typeface="Trebuchet MS" pitchFamily="34" charset="-120"/>
               </a:rPr>
-              <a:t>out-</a:t>
+              <a:t>bi-</a:t>
             </a:r>
             <a:endParaRPr lang="en-US" sz="1300" dirty="0"/>
           </a:p>
@@ -34217,7 +37490,7 @@
                 <a:ea typeface="Trebuchet MS" pitchFamily="34" charset="-122"/>
                 <a:cs typeface="Trebuchet MS" pitchFamily="34" charset="-120"/>
               </a:rPr>
-              <a:t>-t</a:t>
+              <a:t>-ation</a:t>
             </a:r>
             <a:endParaRPr lang="en-US" sz="1300" dirty="0"/>
           </a:p>
@@ -34281,7 +37554,7 @@
                 <a:ea typeface="Trebuchet MS" pitchFamily="34" charset="-122"/>
                 <a:cs typeface="Trebuchet MS" pitchFamily="34" charset="-120"/>
               </a:rPr>
-              <a:t>fore-</a:t>
+              <a:t>ex-</a:t>
             </a:r>
             <a:endParaRPr lang="en-US" sz="1300" dirty="0"/>
           </a:p>
@@ -34370,7 +37643,7 @@
                 <a:ea typeface="Trebuchet MS" pitchFamily="34" charset="-122"/>
                 <a:cs typeface="Trebuchet MS" pitchFamily="34" charset="-120"/>
               </a:rPr>
-              <a:t>-ation</a:t>
+              <a:t>-s</a:t>
             </a:r>
             <a:endParaRPr lang="en-US" sz="1300" dirty="0"/>
           </a:p>
@@ -34673,7 +37946,7 @@
                 <a:ea typeface="Trebuchet MS" pitchFamily="34" charset="-122"/>
                 <a:cs typeface="Trebuchet MS" pitchFamily="34" charset="-120"/>
               </a:rPr>
-              <a:t>plant</a:t>
+              <a:t>replanned</a:t>
             </a:r>
             <a:endParaRPr lang="en-US" sz="1200" dirty="0"/>
           </a:p>
@@ -34739,7 +38012,7 @@
                 <a:ea typeface="Trebuchet MS" pitchFamily="34" charset="-122"/>
                 <a:cs typeface="Trebuchet MS" pitchFamily="34" charset="-120"/>
               </a:rPr>
-              <a:t>explain</a:t>
+              <a:t>unplanned</a:t>
             </a:r>
             <a:endParaRPr lang="en-US" sz="1200" dirty="0"/>
           </a:p>
@@ -34805,7 +38078,7 @@
                 <a:ea typeface="Trebuchet MS" pitchFamily="34" charset="-122"/>
                 <a:cs typeface="Trebuchet MS" pitchFamily="34" charset="-120"/>
               </a:rPr>
-              <a:t>biplane</a:t>
+              <a:t>outplanned</a:t>
             </a:r>
             <a:endParaRPr lang="en-US" sz="1200" dirty="0"/>
           </a:p>
@@ -34871,7 +38144,7 @@
                 <a:ea typeface="Trebuchet MS" pitchFamily="34" charset="-122"/>
                 <a:cs typeface="Trebuchet MS" pitchFamily="34" charset="-120"/>
               </a:rPr>
-              <a:t>airplane</a:t>
+              <a:t>explanation</a:t>
             </a:r>
             <a:endParaRPr lang="en-US" sz="1200" dirty="0"/>
           </a:p>
@@ -34937,7 +38210,7 @@
                 <a:ea typeface="Trebuchet MS" pitchFamily="34" charset="-122"/>
                 <a:cs typeface="Trebuchet MS" pitchFamily="34" charset="-120"/>
               </a:rPr>
-              <a:t>explanation</a:t>
+              <a:t>plans</a:t>
             </a:r>
             <a:endParaRPr lang="en-US" sz="1200" dirty="0"/>
           </a:p>
@@ -35229,7 +38502,7 @@
                 <a:ea typeface="Calibri" pitchFamily="34" charset="-122"/>
                 <a:cs typeface="Calibri" pitchFamily="34" charset="-120"/>
               </a:rPr>
-              <a:t>Word Labs  •  wordlabs.app  •  Root: 'plan' = arrange, design, flat surface</a:t>
+              <a:t>Word Labs  •  wordlabs.app  •  Root: 'plan' = a scheme or flat surface</a:t>
             </a:r>
             <a:endParaRPr lang="en-US" sz="800" dirty="0"/>
           </a:p>
@@ -35393,7 +38666,7 @@
                 <a:ea typeface="Calibri" pitchFamily="34" charset="-122"/>
                 <a:cs typeface="Calibri" pitchFamily="34" charset="-120"/>
               </a:rPr>
-              <a:t>The core part of a word carrying its basic meaning. For example, 'plan' means 'arrange, design, flat surface'.</a:t>
+              <a:t>The core part of a word carrying its basic meaning. For example, 'plan' means 'a scheme or flat surface'.</a:t>
             </a:r>
             <a:endParaRPr lang="en-US" sz="1350" dirty="0"/>
           </a:p>
@@ -36013,7 +39286,7 @@
                 <a:ea typeface="Calibri" pitchFamily="34" charset="-122"/>
                 <a:cs typeface="Calibri" pitchFamily="34" charset="-120"/>
               </a:rPr>
-              <a:t>Word Labs  •  wordlabs.app  •  Root: 'plan' = arrange, design, flat surface</a:t>
+              <a:t>Word Labs  •  wordlabs.app  •  Root: 'plan' = a scheme or flat surface</a:t>
             </a:r>
             <a:endParaRPr lang="en-US" sz="800" dirty="0"/>
           </a:p>
@@ -36125,7 +39398,7 @@
                 <a:ea typeface="Calibri" pitchFamily="34" charset="-122"/>
                 <a:cs typeface="Calibri" pitchFamily="34" charset="-120"/>
               </a:rPr>
-              <a:t>1.  The root 'plan' comes from Latin and relates to a flat surface or design.</a:t>
+              <a:t>1.  The word 'planner' contains the root 'plan' and a suffix.</a:t>
             </a:r>
             <a:endParaRPr lang="en-US" sz="1300" dirty="0"/>
           </a:p>
@@ -36264,7 +39537,7 @@
                 <a:ea typeface="Calibri" pitchFamily="34" charset="-122"/>
                 <a:cs typeface="Calibri" pitchFamily="34" charset="-120"/>
               </a:rPr>
-              <a:t>2.  The word 'biplane' has a prefix meaning 'three'.</a:t>
+              <a:t>2.  The root 'plan' comes from a Greek word meaning 'to write'.</a:t>
             </a:r>
             <a:endParaRPr lang="en-US" sz="1300" dirty="0"/>
           </a:p>
@@ -36403,7 +39676,7 @@
                 <a:ea typeface="Calibri" pitchFamily="34" charset="-122"/>
                 <a:cs typeface="Calibri" pitchFamily="34" charset="-120"/>
               </a:rPr>
-              <a:t>3.  The word 'planner' contains the root 'plan' plus a suffix meaning a person or thing.</a:t>
+              <a:t>3.  Adding the prefix 'un' to 'planned' makes a word meaning not organised.</a:t>
             </a:r>
             <a:endParaRPr lang="en-US" sz="1300" dirty="0"/>
           </a:p>
@@ -36542,7 +39815,7 @@
                 <a:ea typeface="Calibri" pitchFamily="34" charset="-122"/>
                 <a:cs typeface="Calibri" pitchFamily="34" charset="-120"/>
               </a:rPr>
-              <a:t>4.  The word 'explain' contains the root 'plan' and the prefix 'ex' meaning 'out'.</a:t>
+              <a:t>4.  The root 'plan' can be found in the word 'planning'.</a:t>
             </a:r>
             <a:endParaRPr lang="en-US" sz="1300" dirty="0"/>
           </a:p>
@@ -36681,7 +39954,7 @@
                 <a:ea typeface="Calibri" pitchFamily="34" charset="-122"/>
                 <a:cs typeface="Calibri" pitchFamily="34" charset="-120"/>
               </a:rPr>
-              <a:t>5.  The word 'planning' has no suffix added to the root 'plan'.</a:t>
+              <a:t>5.  The word 'planet' contains the root 'plan' meaning a scheme.</a:t>
             </a:r>
             <a:endParaRPr lang="en-US" sz="1300" dirty="0"/>
           </a:p>
@@ -37039,7 +40312,7 @@
                 <a:ea typeface="Calibri" pitchFamily="34" charset="-122"/>
                 <a:cs typeface="Calibri" pitchFamily="34" charset="-120"/>
               </a:rPr>
-              <a:t>Word Labs  •  wordlabs.app  •  Root: 'plan' = arrange, design, flat surface</a:t>
+              <a:t>Word Labs  •  wordlabs.app  •  Root: 'plan' = a scheme or flat surface</a:t>
             </a:r>
             <a:endParaRPr lang="en-US" sz="800" dirty="0"/>
           </a:p>
@@ -37176,7 +40449,7 @@
                 <a:ea typeface="Trebuchet MS" pitchFamily="34" charset="-122"/>
                 <a:cs typeface="Trebuchet MS" pitchFamily="34" charset="-120"/>
               </a:rPr>
-              <a:t>arrange, design, flat surface</a:t>
+              <a:t>a scheme or flat surface</a:t>
             </a:r>
             <a:endParaRPr lang="en-US" sz="2000" dirty="0"/>
           </a:p>
@@ -37518,7 +40791,7 @@
                 <a:ea typeface="Trebuchet MS" pitchFamily="34" charset="-122"/>
                 <a:cs typeface="Trebuchet MS" pitchFamily="34" charset="-120"/>
               </a:rPr>
-              <a:t>plant</a:t>
+              <a:t>replanned</a:t>
             </a:r>
             <a:endParaRPr lang="en-US" sz="1300" dirty="0"/>
           </a:p>
@@ -37584,7 +40857,7 @@
                 <a:ea typeface="Trebuchet MS" pitchFamily="34" charset="-122"/>
                 <a:cs typeface="Trebuchet MS" pitchFamily="34" charset="-120"/>
               </a:rPr>
-              <a:t>explain</a:t>
+              <a:t>unplanned</a:t>
             </a:r>
             <a:endParaRPr lang="en-US" sz="1300" dirty="0"/>
           </a:p>
@@ -37650,7 +40923,7 @@
                 <a:ea typeface="Trebuchet MS" pitchFamily="34" charset="-122"/>
                 <a:cs typeface="Trebuchet MS" pitchFamily="34" charset="-120"/>
               </a:rPr>
-              <a:t>biplane</a:t>
+              <a:t>outplanned</a:t>
             </a:r>
             <a:endParaRPr lang="en-US" sz="1300" dirty="0"/>
           </a:p>
@@ -37716,7 +40989,7 @@
                 <a:ea typeface="Trebuchet MS" pitchFamily="34" charset="-122"/>
                 <a:cs typeface="Trebuchet MS" pitchFamily="34" charset="-120"/>
               </a:rPr>
-              <a:t>airplane</a:t>
+              <a:t>explanation</a:t>
             </a:r>
             <a:endParaRPr lang="en-US" sz="1300" dirty="0"/>
           </a:p>
@@ -38008,7 +41281,7 @@
                 <a:ea typeface="Calibri" pitchFamily="34" charset="-122"/>
                 <a:cs typeface="Calibri" pitchFamily="34" charset="-120"/>
               </a:rPr>
-              <a:t>Word Labs  •  wordlabs.app  •  Root: 'plan' = arrange, design, flat surface</a:t>
+              <a:t>Word Labs  •  wordlabs.app  •  Root: 'plan' = a scheme or flat surface</a:t>
             </a:r>
             <a:endParaRPr lang="en-US" sz="800" dirty="0"/>
           </a:p>
@@ -38309,7 +41582,7 @@
                 <a:ea typeface="Trebuchet MS" pitchFamily="34" charset="-122"/>
                 <a:cs typeface="Trebuchet MS" pitchFamily="34" charset="-120"/>
               </a:rPr>
-              <a:t>ex-</a:t>
+              <a:t>re-</a:t>
             </a:r>
             <a:endParaRPr lang="en-US" sz="1300" dirty="0"/>
           </a:p>
@@ -38437,7 +41710,7 @@
                 <a:ea typeface="Trebuchet MS" pitchFamily="34" charset="-122"/>
                 <a:cs typeface="Trebuchet MS" pitchFamily="34" charset="-120"/>
               </a:rPr>
-              <a:t>-ned</a:t>
+              <a:t>-ed</a:t>
             </a:r>
             <a:endParaRPr lang="en-US" sz="1300" dirty="0"/>
           </a:p>
@@ -38501,7 +41774,7 @@
                 <a:ea typeface="Trebuchet MS" pitchFamily="34" charset="-122"/>
                 <a:cs typeface="Trebuchet MS" pitchFamily="34" charset="-120"/>
               </a:rPr>
-              <a:t>bi-</a:t>
+              <a:t>un-</a:t>
             </a:r>
             <a:endParaRPr lang="en-US" sz="1300" dirty="0"/>
           </a:p>
@@ -38590,7 +41863,7 @@
                 <a:ea typeface="Trebuchet MS" pitchFamily="34" charset="-122"/>
                 <a:cs typeface="Trebuchet MS" pitchFamily="34" charset="-120"/>
               </a:rPr>
-              <a:t>-ning</a:t>
+              <a:t>-ing</a:t>
             </a:r>
             <a:endParaRPr lang="en-US" sz="1300" dirty="0"/>
           </a:p>
@@ -38654,7 +41927,7 @@
                 <a:ea typeface="Trebuchet MS" pitchFamily="34" charset="-122"/>
                 <a:cs typeface="Trebuchet MS" pitchFamily="34" charset="-120"/>
               </a:rPr>
-              <a:t>air-</a:t>
+              <a:t>out-</a:t>
             </a:r>
             <a:endParaRPr lang="en-US" sz="1300" dirty="0"/>
           </a:p>
@@ -38743,7 +42016,7 @@
                 <a:ea typeface="Trebuchet MS" pitchFamily="34" charset="-122"/>
                 <a:cs typeface="Trebuchet MS" pitchFamily="34" charset="-120"/>
               </a:rPr>
-              <a:t>-ner</a:t>
+              <a:t>-er</a:t>
             </a:r>
             <a:endParaRPr lang="en-US" sz="1300" dirty="0"/>
           </a:p>
@@ -38807,7 +42080,7 @@
                 <a:ea typeface="Trebuchet MS" pitchFamily="34" charset="-122"/>
                 <a:cs typeface="Trebuchet MS" pitchFamily="34" charset="-120"/>
               </a:rPr>
-              <a:t>out-</a:t>
+              <a:t>bi-</a:t>
             </a:r>
             <a:endParaRPr lang="en-US" sz="1300" dirty="0"/>
           </a:p>
@@ -38896,7 +42169,7 @@
                 <a:ea typeface="Trebuchet MS" pitchFamily="34" charset="-122"/>
                 <a:cs typeface="Trebuchet MS" pitchFamily="34" charset="-120"/>
               </a:rPr>
-              <a:t>-t</a:t>
+              <a:t>-ation</a:t>
             </a:r>
             <a:endParaRPr lang="en-US" sz="1300" dirty="0"/>
           </a:p>
@@ -38960,7 +42233,7 @@
                 <a:ea typeface="Trebuchet MS" pitchFamily="34" charset="-122"/>
                 <a:cs typeface="Trebuchet MS" pitchFamily="34" charset="-120"/>
               </a:rPr>
-              <a:t>fore-</a:t>
+              <a:t>ex-</a:t>
             </a:r>
             <a:endParaRPr lang="en-US" sz="1300" dirty="0"/>
           </a:p>
@@ -39049,7 +42322,7 @@
                 <a:ea typeface="Trebuchet MS" pitchFamily="34" charset="-122"/>
                 <a:cs typeface="Trebuchet MS" pitchFamily="34" charset="-120"/>
               </a:rPr>
-              <a:t>-ation</a:t>
+              <a:t>-s</a:t>
             </a:r>
             <a:endParaRPr lang="en-US" sz="1300" dirty="0"/>
           </a:p>
@@ -39161,7 +42434,7 @@
                 <a:ea typeface="Trebuchet MS" pitchFamily="34" charset="-122"/>
                 <a:cs typeface="Trebuchet MS" pitchFamily="34" charset="-120"/>
               </a:rPr>
-              <a:t>ex-</a:t>
+              <a:t>re-</a:t>
             </a:r>
             <a:endParaRPr lang="en-US" sz="1300" dirty="0"/>
           </a:p>
@@ -39327,7 +42600,7 @@
         <p:spPr>
           <a:xfrm>
             <a:off x="4325112" y="4178808"/>
-            <a:ext cx="950976" cy="420624"/>
+            <a:ext cx="822960" cy="420624"/>
           </a:xfrm>
           <a:prstGeom prst="rect">
             <a:avLst>
@@ -39361,7 +42634,7 @@
         <p:spPr>
           <a:xfrm>
             <a:off x="4325112" y="4178808"/>
-            <a:ext cx="950976" cy="420624"/>
+            <a:ext cx="822960" cy="420624"/>
           </a:xfrm>
           <a:prstGeom prst="rect">
             <a:avLst/>
@@ -39385,7 +42658,7 @@
                 <a:ea typeface="Trebuchet MS" pitchFamily="34" charset="-122"/>
                 <a:cs typeface="Trebuchet MS" pitchFamily="34" charset="-120"/>
               </a:rPr>
-              <a:t>-ned</a:t>
+              <a:t>-ed</a:t>
             </a:r>
             <a:endParaRPr lang="en-US" sz="1300" dirty="0"/>
           </a:p>
@@ -39399,7 +42672,7 @@
         </p:nvSpPr>
         <p:spPr>
           <a:xfrm>
-            <a:off x="5349240" y="4178808"/>
+            <a:off x="5221224" y="4178808"/>
             <a:ext cx="365760" cy="420624"/>
           </a:xfrm>
           <a:prstGeom prst="rect">
@@ -39438,7 +42711,7 @@
         </p:nvSpPr>
         <p:spPr>
           <a:xfrm>
-            <a:off x="5760720" y="4178808"/>
+            <a:off x="5632704" y="4178808"/>
             <a:ext cx="2194560" cy="420624"/>
           </a:xfrm>
           <a:prstGeom prst="rect">
@@ -39465,7 +42738,7 @@
         </p:nvSpPr>
         <p:spPr>
           <a:xfrm>
-            <a:off x="5760720" y="4178808"/>
+            <a:off x="5632704" y="4178808"/>
             <a:ext cx="2194560" cy="420624"/>
           </a:xfrm>
           <a:prstGeom prst="rect">
@@ -39782,7 +43055,7 @@
                 <a:ea typeface="Calibri" pitchFamily="34" charset="-122"/>
                 <a:cs typeface="Calibri" pitchFamily="34" charset="-120"/>
               </a:rPr>
-              <a:t>Word Labs  •  wordlabs.app  •  Root: 'plan' = arrange, design, flat surface</a:t>
+              <a:t>Word Labs  •  wordlabs.app  •  Root: 'plan' = a scheme or flat surface</a:t>
             </a:r>
             <a:endParaRPr lang="en-US" sz="800" dirty="0"/>
           </a:p>
@@ -39960,7 +43233,7 @@
                 <a:ea typeface="Calibri" pitchFamily="34" charset="-122"/>
                 <a:cs typeface="Calibri" pitchFamily="34" charset="-120"/>
               </a:rPr>
-              <a:t>A person who organises things carefully, or a book used to organise schedules.</a:t>
+              <a:t>A person who organises things, or a book used to write down your schedule.</a:t>
             </a:r>
             <a:endParaRPr lang="en-US" sz="1200" dirty="0"/>
           </a:p>
@@ -40099,7 +43372,7 @@
                 <a:ea typeface="Calibri" pitchFamily="34" charset="-122"/>
                 <a:cs typeface="Calibri" pitchFamily="34" charset="-120"/>
               </a:rPr>
-              <a:t>To make something clear so others can understand it.</a:t>
+              <a:t>Something that happened without being organised or thought about beforehand.</a:t>
             </a:r>
             <a:endParaRPr lang="en-US" sz="1200" dirty="0"/>
           </a:p>
@@ -40238,7 +43511,7 @@
                 <a:ea typeface="Calibri" pitchFamily="34" charset="-122"/>
                 <a:cs typeface="Calibri" pitchFamily="34" charset="-120"/>
               </a:rPr>
-              <a:t>Decided in advance what you were going to do.</a:t>
+              <a:t>When you decided ahead of time what you were going to do.</a:t>
             </a:r>
             <a:endParaRPr lang="en-US" sz="1200" dirty="0"/>
           </a:p>
@@ -40311,7 +43584,7 @@
                 <a:ea typeface="Trebuchet MS" pitchFamily="34" charset="-122"/>
                 <a:cs typeface="Trebuchet MS" pitchFamily="34" charset="-120"/>
               </a:rPr>
-              <a:t>plant</a:t>
+              <a:t>replanned</a:t>
             </a:r>
             <a:endParaRPr lang="en-US" sz="1200" dirty="0"/>
           </a:p>
@@ -40377,7 +43650,7 @@
                 <a:ea typeface="Calibri" pitchFamily="34" charset="-122"/>
                 <a:cs typeface="Calibri" pitchFamily="34" charset="-120"/>
               </a:rPr>
-              <a:t>An old-fashioned aeroplane that has two sets of wings, one above the other.</a:t>
+              <a:t>When someone made better plans than another person or group.</a:t>
             </a:r>
             <a:endParaRPr lang="en-US" sz="1200" dirty="0"/>
           </a:p>
@@ -40450,7 +43723,7 @@
                 <a:ea typeface="Trebuchet MS" pitchFamily="34" charset="-122"/>
                 <a:cs typeface="Trebuchet MS" pitchFamily="34" charset="-120"/>
               </a:rPr>
-              <a:t>explain</a:t>
+              <a:t>unplanned</a:t>
             </a:r>
             <a:endParaRPr lang="en-US" sz="1200" dirty="0"/>
           </a:p>
@@ -40516,7 +43789,7 @@
                 <a:ea typeface="Calibri" pitchFamily="34" charset="-122"/>
                 <a:cs typeface="Calibri" pitchFamily="34" charset="-120"/>
               </a:rPr>
-              <a:t>A flying vehicle with wings and an engine that carries people or cargo.</a:t>
+              <a:t>When you make something clear by giving reasons and details so others can understand.</a:t>
             </a:r>
             <a:endParaRPr lang="en-US" sz="1200" dirty="0"/>
           </a:p>
@@ -40589,7 +43862,7 @@
                 <a:ea typeface="Trebuchet MS" pitchFamily="34" charset="-122"/>
                 <a:cs typeface="Trebuchet MS" pitchFamily="34" charset="-120"/>
               </a:rPr>
-              <a:t>biplane</a:t>
+              <a:t>outplanned</a:t>
             </a:r>
             <a:endParaRPr lang="en-US" sz="1200" dirty="0"/>
           </a:p>
@@ -40655,7 +43928,7 @@
                 <a:ea typeface="Calibri" pitchFamily="34" charset="-122"/>
                 <a:cs typeface="Calibri" pitchFamily="34" charset="-120"/>
               </a:rPr>
-              <a:t>A living thing that grows in soil and makes its own food from sunlight.</a:t>
+              <a:t>When you changed your plans and worked out a new way to do something.</a:t>
             </a:r>
             <a:endParaRPr lang="en-US" sz="1200" dirty="0"/>
           </a:p>
@@ -40728,7 +44001,7 @@
                 <a:ea typeface="Trebuchet MS" pitchFamily="34" charset="-122"/>
                 <a:cs typeface="Trebuchet MS" pitchFamily="34" charset="-120"/>
               </a:rPr>
-              <a:t>airplane</a:t>
+              <a:t>explanation</a:t>
             </a:r>
             <a:endParaRPr lang="en-US" sz="1200" dirty="0"/>
           </a:p>
@@ -40794,7 +44067,7 @@
                 <a:ea typeface="Calibri" pitchFamily="34" charset="-122"/>
                 <a:cs typeface="Calibri" pitchFamily="34" charset="-120"/>
               </a:rPr>
-              <a:t>The process of working out how to do something ahead of time.</a:t>
+              <a:t>The act of working out how to do something before you start.</a:t>
             </a:r>
             <a:endParaRPr lang="en-US" sz="1200" dirty="0"/>
           </a:p>
@@ -41086,7 +44359,7 @@
                 <a:ea typeface="Calibri" pitchFamily="34" charset="-122"/>
                 <a:cs typeface="Calibri" pitchFamily="34" charset="-120"/>
               </a:rPr>
-              <a:t>Word Labs  •  wordlabs.app  •  Root: 'plan' = arrange, design, flat surface</a:t>
+              <a:t>Word Labs  •  wordlabs.app  •  Root: 'plan' = a scheme or flat surface</a:t>
             </a:r>
             <a:endParaRPr lang="en-US" sz="800" dirty="0"/>
           </a:p>
@@ -41289,7 +44562,7 @@
                 <a:ea typeface="Calibri" pitchFamily="34" charset="-122"/>
                 <a:cs typeface="Calibri" pitchFamily="34" charset="-120"/>
               </a:rPr>
-              <a:t>The class made a careful planning chart before starting their science project.</a:t>
+              <a:t>The class created a planning chart to organise their science project over the next two weeks.</a:t>
             </a:r>
             <a:endParaRPr lang="en-US" sz="1500" dirty="0"/>
           </a:p>
@@ -41453,7 +44726,7 @@
                 <a:ea typeface="Calibri" pitchFamily="34" charset="-122"/>
                 <a:cs typeface="Calibri" pitchFamily="34" charset="-120"/>
               </a:rPr>
-              <a:t>She used her planner to write down all her homework tasks for the week.</a:t>
+              <a:t>Our teacher said that an unplanned trip to the zoo would still be lots of fun.</a:t>
             </a:r>
             <a:endParaRPr lang="en-US" sz="1500" dirty="0"/>
           </a:p>
@@ -41617,7 +44890,7 @@
                 <a:ea typeface="Calibri" pitchFamily="34" charset="-122"/>
                 <a:cs typeface="Calibri" pitchFamily="34" charset="-120"/>
               </a:rPr>
-              <a:t>Can you explain how you came up with your plan for the school fundraiser?</a:t>
+              <a:t>The student council made several plans to improve the school playground.</a:t>
             </a:r>
             <a:endParaRPr lang="en-US" sz="1500" dirty="0"/>
           </a:p>
